--- a/static/ppts/G7_Sci_T4_Chromatography_Adv.pptx
+++ b/static/ppts/G7_Sci_T4_Chromatography_Adv.pptx
@@ -13,12 +13,13 @@
     <p:sldId id="261" r:id="rId7"/>
     <p:sldId id="262" r:id="rId8"/>
     <p:sldId id="263" r:id="rId9"/>
+    <p:sldId id="264" r:id="rId10"/>
   </p:sldIdLst>
   <p:notesMasterIdLst>
-    <p:notesMasterId r:id="rId10"/>
+    <p:notesMasterId r:id="rId11"/>
   </p:notesMasterIdLst>
-  <p:sldSz cx="9144000" cy="5143500"/>
-  <p:notesSz cx="5143500" cy="9144000"/>
+  <p:sldSz cx="12192000" cy="6858000"/>
+  <p:notesSz cx="6858000" cy="12192000"/>
   <p:defaultTextStyle>
     <a:lvl1pPr marL="0" algn="l" defTabSz="914400" rtl="0" eaLnBrk="1" latinLnBrk="0" hangingPunct="1">
       <a:defRPr sz="1800" kern="1200">
@@ -1167,6 +1168,94 @@
 </p:notes>
 </file>
 
+<file path=ppt/notesSlides/notesSlide9.xml><?xml version="1.0" encoding="utf-8"?>
+<p:notes xmlns:a="http://schemas.openxmlformats.org/drawingml/2006/main" xmlns:r="http://schemas.openxmlformats.org/officeDocument/2006/relationships" xmlns:p="http://schemas.openxmlformats.org/presentationml/2006/main">
+  <p:cSld>
+    <p:spTree>
+      <p:nvGrpSpPr>
+        <p:cNvPr id="1" name=""/>
+        <p:cNvGrpSpPr/>
+        <p:nvPr/>
+      </p:nvGrpSpPr>
+      <p:grpSpPr>
+        <a:xfrm>
+          <a:off x="0" y="0"/>
+          <a:ext cx="0" cy="0"/>
+          <a:chOff x="0" y="0"/>
+          <a:chExt cx="0" cy="0"/>
+        </a:xfrm>
+      </p:grpSpPr>
+      <p:sp>
+        <p:nvSpPr>
+          <p:cNvPr id="2" name="Slide Image Placeholder 1"/>
+          <p:cNvSpPr>
+            <a:spLocks noGrp="1" noRot="1" noChangeAspect="1"/>
+          </p:cNvSpPr>
+          <p:nvPr>
+            <p:ph type="sldImg"/>
+          </p:nvPr>
+        </p:nvSpPr>
+        <p:spPr/>
+      </p:sp>
+      <p:sp>
+        <p:nvSpPr>
+          <p:cNvPr id="3" name="Notes Placeholder 2"/>
+          <p:cNvSpPr>
+            <a:spLocks noGrp="1"/>
+          </p:cNvSpPr>
+          <p:nvPr>
+            <p:ph type="body" idx="1"/>
+          </p:nvPr>
+        </p:nvSpPr>
+        <p:spPr/>
+        <p:txBody>
+          <a:bodyPr/>
+          <a:lstStyle/>
+          <a:p>
+            <a:r>
+              <a:rPr lang="en-US" dirty="0"/>
+              <a:t/>
+            </a:r>
+            <a:endParaRPr lang="en-US" dirty="0"/>
+          </a:p>
+        </p:txBody>
+      </p:sp>
+      <p:sp>
+        <p:nvSpPr>
+          <p:cNvPr id="4" name="Slide Number Placeholder 3"/>
+          <p:cNvSpPr>
+            <a:spLocks noGrp="1"/>
+          </p:cNvSpPr>
+          <p:nvPr>
+            <p:ph type="sldNum" sz="quarter" idx="10"/>
+          </p:nvPr>
+        </p:nvSpPr>
+        <p:spPr/>
+        <p:txBody>
+          <a:bodyPr/>
+          <a:lstStyle/>
+          <a:p>
+            <a:fld id="{F7021451-1387-4CA6-816F-3879F97B5CBC}" type="slidenum">
+              <a:rPr lang="en-US"/>
+              <a:t>9</a:t>
+            </a:fld>
+            <a:endParaRPr lang="en-US"/>
+          </a:p>
+        </p:txBody>
+      </p:sp>
+    </p:spTree>
+    <p:extLst>
+      <p:ext uri="{BB962C8B-B14F-4D97-AF65-F5344CB8AC3E}">
+        <p14:creationId xmlns:p14="http://schemas.microsoft.com/office/powerpoint/2010/main" val="1024086991"/>
+      </p:ext>
+    </p:extLst>
+  </p:cSld>
+  <p:clrMapOvr>
+    <a:masterClrMapping/>
+  </p:clrMapOvr>
+</p:notes>
+</file>
+
 <file path=ppt/slideLayouts/slideLayout1.xml><?xml version="1.0" encoding="utf-8"?>
 <p:sldLayout xmlns:a="http://schemas.openxmlformats.org/drawingml/2006/main" xmlns:r="http://schemas.openxmlformats.org/officeDocument/2006/relationships" xmlns:p="http://schemas.openxmlformats.org/presentationml/2006/main" preserve="1">
   <p:cSld name="DEFAULT">
@@ -1500,7 +1589,7 @@
         <p:spPr>
           <a:xfrm>
             <a:off x="0" y="0"/>
-            <a:ext cx="9144000" cy="5143500"/>
+            <a:ext cx="12188952" cy="6858000"/>
           </a:xfrm>
           <a:prstGeom prst="rect">
             <a:avLst/>
@@ -1519,8 +1608,8 @@
         </p:nvSpPr>
         <p:spPr>
           <a:xfrm>
-            <a:off x="0" y="4777740"/>
-            <a:ext cx="9144000" cy="365760"/>
+            <a:off x="0" y="0"/>
+            <a:ext cx="137160" cy="6858000"/>
           </a:xfrm>
           <a:prstGeom prst="rect">
             <a:avLst/>
@@ -1533,62 +1622,84 @@
       </p:sp>
       <p:sp>
         <p:nvSpPr>
-          <p:cNvPr id="4" name="Text 2"/>
-          <p:cNvSpPr/>
-          <p:nvPr/>
-        </p:nvSpPr>
-        <p:spPr>
-          <a:xfrm>
-            <a:off x="731520" y="1097280"/>
-            <a:ext cx="7680960" cy="457200"/>
-          </a:xfrm>
-          <a:prstGeom prst="rect">
-            <a:avLst/>
-          </a:prstGeom>
-          <a:noFill/>
-          <a:ln/>
-        </p:spPr>
-        <p:txBody>
-          <a:bodyPr wrap="square" rtlCol="0" anchor="ctr"/>
-          <a:lstStyle/>
-          <a:p>
-            <a:pPr indent="0" marL="0">
-              <a:buNone/>
-            </a:pPr>
-            <a:r>
-              <a:rPr lang="en-US" sz="1400" b="1" spc="400" kern="0" dirty="0">
-                <a:solidFill>
-                  <a:srgbClr val="C8372D"/>
-                </a:solidFill>
-                <a:latin typeface="Calibri" pitchFamily="34" charset="0"/>
-                <a:ea typeface="Calibri" pitchFamily="34" charset="-122"/>
-                <a:cs typeface="Calibri" pitchFamily="34" charset="-120"/>
+          <p:cNvPr id="4" name="Shape 2"/>
+          <p:cNvSpPr/>
+          <p:nvPr/>
+        </p:nvSpPr>
+        <p:spPr>
+          <a:xfrm>
+            <a:off x="731520" y="731520"/>
+            <a:ext cx="2011680" cy="411480"/>
+          </a:xfrm>
+          <a:prstGeom prst="roundRect">
+            <a:avLst>
+              <a:gd name="adj" fmla="val 33333"/>
+            </a:avLst>
+          </a:prstGeom>
+          <a:solidFill>
+            <a:srgbClr val="C8372D"/>
+          </a:solidFill>
+          <a:ln/>
+        </p:spPr>
+      </p:sp>
+      <p:sp>
+        <p:nvSpPr>
+          <p:cNvPr id="5" name="Text 3"/>
+          <p:cNvSpPr/>
+          <p:nvPr/>
+        </p:nvSpPr>
+        <p:spPr>
+          <a:xfrm>
+            <a:off x="731520" y="731520"/>
+            <a:ext cx="2011680" cy="411480"/>
+          </a:xfrm>
+          <a:prstGeom prst="rect">
+            <a:avLst/>
+          </a:prstGeom>
+          <a:noFill/>
+          <a:ln/>
+        </p:spPr>
+        <p:txBody>
+          <a:bodyPr wrap="square" rtlCol="0" anchor="ctr"/>
+          <a:lstStyle/>
+          <a:p>
+            <a:pPr algn="ctr" indent="0" marL="0">
+              <a:buNone/>
+            </a:pPr>
+            <a:r>
+              <a:rPr lang="en-US" sz="1100" b="1" dirty="0">
+                <a:solidFill>
+                  <a:srgbClr val="FFFFFF"/>
+                </a:solidFill>
+                <a:latin typeface="Arial" pitchFamily="34" charset="0"/>
+                <a:ea typeface="Arial" pitchFamily="34" charset="-122"/>
+                <a:cs typeface="Arial" pitchFamily="34" charset="-120"/>
               </a:rPr>
               <a:t>GRADE 7 SCIENCE</a:t>
             </a:r>
-            <a:endParaRPr lang="en-US" sz="1400" dirty="0"/>
-          </a:p>
-        </p:txBody>
-      </p:sp>
-      <p:sp>
-        <p:nvSpPr>
-          <p:cNvPr id="5" name="Text 3"/>
-          <p:cNvSpPr/>
-          <p:nvPr/>
-        </p:nvSpPr>
-        <p:spPr>
-          <a:xfrm>
-            <a:off x="731520" y="1645920"/>
-            <a:ext cx="7680960" cy="1463040"/>
-          </a:xfrm>
-          <a:prstGeom prst="rect">
-            <a:avLst/>
-          </a:prstGeom>
-          <a:noFill/>
-          <a:ln/>
-        </p:spPr>
-        <p:txBody>
-          <a:bodyPr wrap="square" rtlCol="0" anchor="t"/>
+            <a:endParaRPr lang="en-US" sz="1100" dirty="0"/>
+          </a:p>
+        </p:txBody>
+      </p:sp>
+      <p:sp>
+        <p:nvSpPr>
+          <p:cNvPr id="6" name="Text 4"/>
+          <p:cNvSpPr/>
+          <p:nvPr/>
+        </p:nvSpPr>
+        <p:spPr>
+          <a:xfrm>
+            <a:off x="731520" y="1828800"/>
+            <a:ext cx="10058400" cy="1371600"/>
+          </a:xfrm>
+          <a:prstGeom prst="rect">
+            <a:avLst/>
+          </a:prstGeom>
+          <a:noFill/>
+          <a:ln/>
+        </p:spPr>
+        <p:txBody>
+          <a:bodyPr wrap="square" rtlCol="0" anchor="ctr"/>
           <a:lstStyle/>
           <a:p>
             <a:pPr indent="0" marL="0">
@@ -1611,14 +1722,14 @@
       </p:sp>
       <p:sp>
         <p:nvSpPr>
-          <p:cNvPr id="6" name="Text 4"/>
+          <p:cNvPr id="7" name="Text 5"/>
           <p:cNvSpPr/>
           <p:nvPr/>
         </p:nvSpPr>
         <p:spPr>
           <a:xfrm>
             <a:off x="731520" y="3200400"/>
-            <a:ext cx="7680960" cy="548640"/>
+            <a:ext cx="7315200" cy="457200"/>
           </a:xfrm>
           <a:prstGeom prst="rect">
             <a:avLst/>
@@ -1634,56 +1745,95 @@
               <a:buNone/>
             </a:pPr>
             <a:r>
-              <a:rPr lang="en-US" sz="1600" i="1" dirty="0">
+              <a:rPr lang="en-US" sz="1600" dirty="0">
+                <a:solidFill>
+                  <a:srgbClr val="E9C46A"/>
+                </a:solidFill>
+                <a:latin typeface="Arial" pitchFamily="34" charset="0"/>
+                <a:ea typeface="Arial" pitchFamily="34" charset="-122"/>
+                <a:cs typeface="Arial" pitchFamily="34" charset="-120"/>
+              </a:rPr>
+              <a:t>Term 4 · Chemistry — Separation</a:t>
+            </a:r>
+            <a:endParaRPr lang="en-US" sz="1600" dirty="0"/>
+          </a:p>
+        </p:txBody>
+      </p:sp>
+      <p:sp>
+        <p:nvSpPr>
+          <p:cNvPr id="8" name="Text 6"/>
+          <p:cNvSpPr/>
+          <p:nvPr/>
+        </p:nvSpPr>
+        <p:spPr>
+          <a:xfrm>
+            <a:off x="731520" y="5669280"/>
+            <a:ext cx="2743200" cy="365760"/>
+          </a:xfrm>
+          <a:prstGeom prst="rect">
+            <a:avLst/>
+          </a:prstGeom>
+          <a:noFill/>
+          <a:ln/>
+        </p:spPr>
+        <p:txBody>
+          <a:bodyPr wrap="square" rtlCol="0" anchor="ctr"/>
+          <a:lstStyle/>
+          <a:p>
+            <a:pPr indent="0" marL="0">
+              <a:buNone/>
+            </a:pPr>
+            <a:r>
+              <a:rPr lang="en-US" sz="1400" b="1" dirty="0">
+                <a:solidFill>
+                  <a:srgbClr val="E9C46A"/>
+                </a:solidFill>
+                <a:latin typeface="Arial" pitchFamily="34" charset="0"/>
+                <a:ea typeface="Arial" pitchFamily="34" charset="-122"/>
+                <a:cs typeface="Arial" pitchFamily="34" charset="-120"/>
+              </a:rPr>
+              <a:t>MR ZOCCHI</a:t>
+            </a:r>
+            <a:endParaRPr lang="en-US" sz="1400" dirty="0"/>
+          </a:p>
+        </p:txBody>
+      </p:sp>
+      <p:sp>
+        <p:nvSpPr>
+          <p:cNvPr id="9" name="Text 7"/>
+          <p:cNvSpPr/>
+          <p:nvPr/>
+        </p:nvSpPr>
+        <p:spPr>
+          <a:xfrm>
+            <a:off x="731520" y="6035040"/>
+            <a:ext cx="2743200" cy="274320"/>
+          </a:xfrm>
+          <a:prstGeom prst="rect">
+            <a:avLst/>
+          </a:prstGeom>
+          <a:noFill/>
+          <a:ln/>
+        </p:spPr>
+        <p:txBody>
+          <a:bodyPr wrap="square" rtlCol="0" anchor="ctr"/>
+          <a:lstStyle/>
+          <a:p>
+            <a:pPr indent="0" marL="0">
+              <a:buNone/>
+            </a:pPr>
+            <a:r>
+              <a:rPr lang="en-US" sz="1100" dirty="0">
                 <a:solidFill>
                   <a:srgbClr val="9B9690"/>
                 </a:solidFill>
-                <a:latin typeface="Calibri" pitchFamily="34" charset="0"/>
-                <a:ea typeface="Calibri" pitchFamily="34" charset="-122"/>
-                <a:cs typeface="Calibri" pitchFamily="34" charset="-120"/>
-              </a:rPr>
-              <a:t>Separating colours and hidden mixtures</a:t>
-            </a:r>
-            <a:endParaRPr lang="en-US" sz="1600" dirty="0"/>
-          </a:p>
-        </p:txBody>
-      </p:sp>
-      <p:sp>
-        <p:nvSpPr>
-          <p:cNvPr id="7" name="Text 5"/>
-          <p:cNvSpPr/>
-          <p:nvPr/>
-        </p:nvSpPr>
-        <p:spPr>
-          <a:xfrm>
-            <a:off x="731520" y="4206240"/>
-            <a:ext cx="3657600" cy="365760"/>
-          </a:xfrm>
-          <a:prstGeom prst="rect">
-            <a:avLst/>
-          </a:prstGeom>
-          <a:noFill/>
-          <a:ln/>
-        </p:spPr>
-        <p:txBody>
-          <a:bodyPr wrap="square" rtlCol="0" anchor="ctr"/>
-          <a:lstStyle/>
-          <a:p>
-            <a:pPr indent="0" marL="0">
-              <a:buNone/>
-            </a:pPr>
-            <a:r>
-              <a:rPr lang="en-US" sz="1200" dirty="0">
-                <a:solidFill>
-                  <a:srgbClr val="6B6660"/>
-                </a:solidFill>
-                <a:latin typeface="Calibri" pitchFamily="34" charset="0"/>
-                <a:ea typeface="Calibri" pitchFamily="34" charset="-122"/>
-                <a:cs typeface="Calibri" pitchFamily="34" charset="-120"/>
-              </a:rPr>
-              <a:t>Mr Zocchi</a:t>
-            </a:r>
-            <a:endParaRPr lang="en-US" sz="1200" dirty="0"/>
+                <a:latin typeface="Arial" pitchFamily="34" charset="0"/>
+                <a:ea typeface="Arial" pitchFamily="34" charset="-122"/>
+                <a:cs typeface="Arial" pitchFamily="34" charset="-120"/>
+              </a:rPr>
+              <a:t>mrzocchi.com</a:t>
+            </a:r>
+            <a:endParaRPr lang="en-US" sz="1100" dirty="0"/>
           </a:p>
         </p:txBody>
       </p:sp>
@@ -1721,13 +1871,13 @@
         <p:spPr>
           <a:xfrm>
             <a:off x="0" y="0"/>
-            <a:ext cx="9144000" cy="5143500"/>
-          </a:xfrm>
-          <a:prstGeom prst="rect">
-            <a:avLst/>
-          </a:prstGeom>
-          <a:solidFill>
-            <a:srgbClr val="111D35"/>
+            <a:ext cx="12188952" cy="1097280"/>
+          </a:xfrm>
+          <a:prstGeom prst="rect">
+            <a:avLst/>
+          </a:prstGeom>
+          <a:solidFill>
+            <a:srgbClr val="1B2A4A"/>
           </a:solidFill>
           <a:ln/>
         </p:spPr>
@@ -1740,36 +1890,34 @@
         </p:nvSpPr>
         <p:spPr>
           <a:xfrm>
-            <a:off x="6858000" y="182880"/>
-            <a:ext cx="2286000" cy="2743200"/>
-          </a:xfrm>
-          <a:prstGeom prst="rect">
-            <a:avLst/>
-          </a:prstGeom>
-          <a:noFill/>
-          <a:ln/>
-        </p:spPr>
-        <p:txBody>
-          <a:bodyPr wrap="square" rtlCol="0" anchor="ctr"/>
-          <a:lstStyle/>
-          <a:p>
-            <a:pPr algn="ctr" indent="0" marL="0">
-              <a:buNone/>
-            </a:pPr>
-            <a:r>
-              <a:rPr lang="en-US" sz="16000" b="1" dirty="0">
-                <a:solidFill>
-                  <a:srgbClr val="C8372D">
-                    <a:alpha val="80000"/>
-                  </a:srgbClr>
+            <a:off x="548640" y="182880"/>
+            <a:ext cx="9144000" cy="731520"/>
+          </a:xfrm>
+          <a:prstGeom prst="rect">
+            <a:avLst/>
+          </a:prstGeom>
+          <a:noFill/>
+          <a:ln/>
+        </p:spPr>
+        <p:txBody>
+          <a:bodyPr wrap="square" rtlCol="0" anchor="ctr"/>
+          <a:lstStyle/>
+          <a:p>
+            <a:pPr indent="0" marL="0">
+              <a:buNone/>
+            </a:pPr>
+            <a:r>
+              <a:rPr lang="en-US" sz="2600" b="1" dirty="0">
+                <a:solidFill>
+                  <a:srgbClr val="FFFFFF"/>
                 </a:solidFill>
                 <a:latin typeface="Georgia" pitchFamily="34" charset="0"/>
                 <a:ea typeface="Georgia" pitchFamily="34" charset="-122"/>
                 <a:cs typeface="Georgia" pitchFamily="34" charset="-120"/>
               </a:rPr>
-              <a:t>?</a:t>
-            </a:r>
-            <a:endParaRPr lang="en-US" sz="16000" dirty="0"/>
+              <a:t>🎯 Learning Objectives</a:t>
+            </a:r>
+            <a:endParaRPr lang="en-US" sz="2600" dirty="0"/>
           </a:p>
         </p:txBody>
       </p:sp>
@@ -1781,8 +1929,8 @@
         </p:nvSpPr>
         <p:spPr>
           <a:xfrm>
-            <a:off x="731520" y="548640"/>
-            <a:ext cx="2743200" cy="365760"/>
+            <a:off x="731520" y="1371600"/>
+            <a:ext cx="9144000" cy="365760"/>
           </a:xfrm>
           <a:prstGeom prst="rect">
             <a:avLst/>
@@ -1798,15 +1946,101 @@
               <a:buNone/>
             </a:pPr>
             <a:r>
-              <a:rPr lang="en-US" sz="1200" b="1" spc="400" kern="0" dirty="0">
-                <a:solidFill>
-                  <a:srgbClr val="C8372D"/>
-                </a:solidFill>
-                <a:latin typeface="Calibri" pitchFamily="34" charset="0"/>
-                <a:ea typeface="Calibri" pitchFamily="34" charset="-122"/>
-                <a:cs typeface="Calibri" pitchFamily="34" charset="-120"/>
-              </a:rPr>
-              <a:t>INQUIRY</a:t>
+              <a:rPr lang="en-US" sz="1400" i="1" dirty="0">
+                <a:solidFill>
+                  <a:srgbClr val="6B6660"/>
+                </a:solidFill>
+                <a:latin typeface="Arial" pitchFamily="34" charset="0"/>
+                <a:ea typeface="Arial" pitchFamily="34" charset="-122"/>
+                <a:cs typeface="Arial" pitchFamily="34" charset="-120"/>
+              </a:rPr>
+              <a:t>By the end of this lesson, you will be able to:</a:t>
+            </a:r>
+            <a:endParaRPr lang="en-US" sz="1400" dirty="0"/>
+          </a:p>
+        </p:txBody>
+      </p:sp>
+      <p:sp>
+        <p:nvSpPr>
+          <p:cNvPr id="5" name="Shape 3"/>
+          <p:cNvSpPr/>
+          <p:nvPr/>
+        </p:nvSpPr>
+        <p:spPr>
+          <a:xfrm>
+            <a:off x="731520" y="2011680"/>
+            <a:ext cx="10515600" cy="594360"/>
+          </a:xfrm>
+          <a:prstGeom prst="roundRect">
+            <a:avLst>
+              <a:gd name="adj" fmla="val 15385"/>
+            </a:avLst>
+          </a:prstGeom>
+          <a:solidFill>
+            <a:srgbClr val="F3F1EE"/>
+          </a:solidFill>
+          <a:ln w="12700">
+            <a:solidFill>
+              <a:srgbClr val="E5E2DC"/>
+            </a:solidFill>
+            <a:prstDash val="solid"/>
+          </a:ln>
+        </p:spPr>
+      </p:sp>
+      <p:sp>
+        <p:nvSpPr>
+          <p:cNvPr id="6" name="Shape 4"/>
+          <p:cNvSpPr/>
+          <p:nvPr/>
+        </p:nvSpPr>
+        <p:spPr>
+          <a:xfrm>
+            <a:off x="914400" y="2121408"/>
+            <a:ext cx="365760" cy="365760"/>
+          </a:xfrm>
+          <a:prstGeom prst="ellipse">
+            <a:avLst/>
+          </a:prstGeom>
+          <a:solidFill>
+            <a:srgbClr val="C8372D"/>
+          </a:solidFill>
+          <a:ln/>
+        </p:spPr>
+      </p:sp>
+      <p:sp>
+        <p:nvSpPr>
+          <p:cNvPr id="7" name="Text 5"/>
+          <p:cNvSpPr/>
+          <p:nvPr/>
+        </p:nvSpPr>
+        <p:spPr>
+          <a:xfrm>
+            <a:off x="914400" y="2121408"/>
+            <a:ext cx="365760" cy="365760"/>
+          </a:xfrm>
+          <a:prstGeom prst="rect">
+            <a:avLst/>
+          </a:prstGeom>
+          <a:noFill/>
+          <a:ln/>
+        </p:spPr>
+        <p:txBody>
+          <a:bodyPr wrap="square" rtlCol="0" anchor="ctr"/>
+          <a:lstStyle/>
+          <a:p>
+            <a:pPr algn="ctr" indent="0" marL="0">
+              <a:buNone/>
+            </a:pPr>
+            <a:r>
+              <a:rPr lang="en-US" sz="1200" b="1" dirty="0">
+                <a:solidFill>
+                  <a:srgbClr val="FFFFFF"/>
+                </a:solidFill>
+                <a:latin typeface="Arial" pitchFamily="34" charset="0"/>
+                <a:ea typeface="Arial" pitchFamily="34" charset="-122"/>
+                <a:cs typeface="Arial" pitchFamily="34" charset="-120"/>
+              </a:rPr>
+              <a:t>1</a:t>
             </a:r>
             <a:endParaRPr lang="en-US" sz="1200" dirty="0"/>
           </a:p>
@@ -1814,53 +2048,139 @@
       </p:sp>
       <p:sp>
         <p:nvSpPr>
-          <p:cNvPr id="5" name="Text 3"/>
-          <p:cNvSpPr/>
-          <p:nvPr/>
-        </p:nvSpPr>
-        <p:spPr>
-          <a:xfrm>
-            <a:off x="731520" y="1005840"/>
-            <a:ext cx="6858000" cy="1463040"/>
-          </a:xfrm>
-          <a:prstGeom prst="rect">
-            <a:avLst/>
-          </a:prstGeom>
-          <a:noFill/>
-          <a:ln/>
-        </p:spPr>
-        <p:txBody>
-          <a:bodyPr wrap="square" rtlCol="0" anchor="t"/>
+          <p:cNvPr id="8" name="Text 6"/>
+          <p:cNvSpPr/>
+          <p:nvPr/>
+        </p:nvSpPr>
+        <p:spPr>
+          <a:xfrm>
+            <a:off x="1463040" y="2057400"/>
+            <a:ext cx="9601200" cy="502920"/>
+          </a:xfrm>
+          <a:prstGeom prst="rect">
+            <a:avLst/>
+          </a:prstGeom>
+          <a:noFill/>
+          <a:ln/>
+        </p:spPr>
+        <p:txBody>
+          <a:bodyPr wrap="square" rtlCol="0" anchor="ctr"/>
           <a:lstStyle/>
           <a:p>
             <a:pPr indent="0" marL="0">
               <a:buNone/>
             </a:pPr>
             <a:r>
-              <a:rPr lang="en-US" sz="2800" b="1" dirty="0">
+              <a:rPr lang="en-US" sz="1500" dirty="0">
+                <a:solidFill>
+                  <a:srgbClr val="3D3A36"/>
+                </a:solidFill>
+                <a:latin typeface="Arial" pitchFamily="34" charset="0"/>
+                <a:ea typeface="Arial" pitchFamily="34" charset="-122"/>
+                <a:cs typeface="Arial" pitchFamily="34" charset="-120"/>
+              </a:rPr>
+              <a:t>Explain how chromatography separates dissolved substances</a:t>
+            </a:r>
+            <a:endParaRPr lang="en-US" sz="1500" dirty="0"/>
+          </a:p>
+        </p:txBody>
+      </p:sp>
+      <p:sp>
+        <p:nvSpPr>
+          <p:cNvPr id="9" name="Shape 7"/>
+          <p:cNvSpPr/>
+          <p:nvPr/>
+        </p:nvSpPr>
+        <p:spPr>
+          <a:xfrm>
+            <a:off x="731520" y="2743200"/>
+            <a:ext cx="10515600" cy="594360"/>
+          </a:xfrm>
+          <a:prstGeom prst="roundRect">
+            <a:avLst>
+              <a:gd name="adj" fmla="val 15385"/>
+            </a:avLst>
+          </a:prstGeom>
+          <a:solidFill>
+            <a:srgbClr val="F3F1EE"/>
+          </a:solidFill>
+          <a:ln w="12700">
+            <a:solidFill>
+              <a:srgbClr val="E5E2DC"/>
+            </a:solidFill>
+            <a:prstDash val="solid"/>
+          </a:ln>
+        </p:spPr>
+      </p:sp>
+      <p:sp>
+        <p:nvSpPr>
+          <p:cNvPr id="10" name="Shape 8"/>
+          <p:cNvSpPr/>
+          <p:nvPr/>
+        </p:nvSpPr>
+        <p:spPr>
+          <a:xfrm>
+            <a:off x="914400" y="2852928"/>
+            <a:ext cx="365760" cy="365760"/>
+          </a:xfrm>
+          <a:prstGeom prst="ellipse">
+            <a:avLst/>
+          </a:prstGeom>
+          <a:solidFill>
+            <a:srgbClr val="C8372D"/>
+          </a:solidFill>
+          <a:ln/>
+        </p:spPr>
+      </p:sp>
+      <p:sp>
+        <p:nvSpPr>
+          <p:cNvPr id="11" name="Text 9"/>
+          <p:cNvSpPr/>
+          <p:nvPr/>
+        </p:nvSpPr>
+        <p:spPr>
+          <a:xfrm>
+            <a:off x="914400" y="2852928"/>
+            <a:ext cx="365760" cy="365760"/>
+          </a:xfrm>
+          <a:prstGeom prst="rect">
+            <a:avLst/>
+          </a:prstGeom>
+          <a:noFill/>
+          <a:ln/>
+        </p:spPr>
+        <p:txBody>
+          <a:bodyPr wrap="square" rtlCol="0" anchor="ctr"/>
+          <a:lstStyle/>
+          <a:p>
+            <a:pPr algn="ctr" indent="0" marL="0">
+              <a:buNone/>
+            </a:pPr>
+            <a:r>
+              <a:rPr lang="en-US" sz="1200" b="1" dirty="0">
                 <a:solidFill>
                   <a:srgbClr val="FFFFFF"/>
                 </a:solidFill>
-                <a:latin typeface="Georgia" pitchFamily="34" charset="0"/>
-                <a:ea typeface="Georgia" pitchFamily="34" charset="-122"/>
-                <a:cs typeface="Georgia" pitchFamily="34" charset="-120"/>
-              </a:rPr>
-              <a:t>A black marker looks like one colour. But is it really? What happens if you put a dot of black ink on paper and add water?</a:t>
-            </a:r>
-            <a:endParaRPr lang="en-US" sz="2800" dirty="0"/>
-          </a:p>
-        </p:txBody>
-      </p:sp>
-      <p:sp>
-        <p:nvSpPr>
-          <p:cNvPr id="6" name="Text 4"/>
-          <p:cNvSpPr/>
-          <p:nvPr/>
-        </p:nvSpPr>
-        <p:spPr>
-          <a:xfrm>
-            <a:off x="731520" y="2560320"/>
-            <a:ext cx="6858000" cy="548640"/>
+                <a:latin typeface="Arial" pitchFamily="34" charset="0"/>
+                <a:ea typeface="Arial" pitchFamily="34" charset="-122"/>
+                <a:cs typeface="Arial" pitchFamily="34" charset="-120"/>
+              </a:rPr>
+              <a:t>2</a:t>
+            </a:r>
+            <a:endParaRPr lang="en-US" sz="1200" dirty="0"/>
+          </a:p>
+        </p:txBody>
+      </p:sp>
+      <p:sp>
+        <p:nvSpPr>
+          <p:cNvPr id="12" name="Text 10"/>
+          <p:cNvSpPr/>
+          <p:nvPr/>
+        </p:nvSpPr>
+        <p:spPr>
+          <a:xfrm>
+            <a:off x="1463040" y="2788920"/>
+            <a:ext cx="9601200" cy="502920"/>
           </a:xfrm>
           <a:prstGeom prst="rect">
             <a:avLst/>
@@ -1876,50 +2196,116 @@
               <a:buNone/>
             </a:pPr>
             <a:r>
-              <a:rPr lang="en-US" sz="1400" i="1" dirty="0">
-                <a:solidFill>
-                  <a:srgbClr val="9B9690"/>
-                </a:solidFill>
-                <a:latin typeface="Calibri" pitchFamily="34" charset="0"/>
-                <a:ea typeface="Calibri" pitchFamily="34" charset="-122"/>
-                <a:cs typeface="Calibri" pitchFamily="34" charset="-120"/>
-              </a:rPr>
-              <a:t>Chromatography separates substances based on how they travel through a material.</a:t>
-            </a:r>
-            <a:endParaRPr lang="en-US" sz="1400" dirty="0"/>
-          </a:p>
-        </p:txBody>
-      </p:sp>
-      <p:sp>
-        <p:nvSpPr>
-          <p:cNvPr id="7" name="Shape 5"/>
-          <p:cNvSpPr/>
-          <p:nvPr/>
-        </p:nvSpPr>
-        <p:spPr>
-          <a:xfrm>
-            <a:off x="548640" y="3200400"/>
-            <a:ext cx="7315200" cy="1645920"/>
-          </a:xfrm>
-          <a:prstGeom prst="rect">
-            <a:avLst/>
-          </a:prstGeom>
-          <a:solidFill>
-            <a:srgbClr val="243660"/>
-          </a:solidFill>
-          <a:ln/>
-        </p:spPr>
-      </p:sp>
-      <p:sp>
-        <p:nvSpPr>
-          <p:cNvPr id="8" name="Text 6"/>
-          <p:cNvSpPr/>
-          <p:nvPr/>
-        </p:nvSpPr>
-        <p:spPr>
-          <a:xfrm>
-            <a:off x="731520" y="3246120"/>
-            <a:ext cx="3657600" cy="320040"/>
+              <a:rPr lang="en-US" sz="1500" dirty="0">
+                <a:solidFill>
+                  <a:srgbClr val="3D3A36"/>
+                </a:solidFill>
+                <a:latin typeface="Arial" pitchFamily="34" charset="0"/>
+                <a:ea typeface="Arial" pitchFamily="34" charset="-122"/>
+                <a:cs typeface="Arial" pitchFamily="34" charset="-120"/>
+              </a:rPr>
+              <a:t>Calculate and interpret Rf values</a:t>
+            </a:r>
+            <a:endParaRPr lang="en-US" sz="1500" dirty="0"/>
+          </a:p>
+        </p:txBody>
+      </p:sp>
+      <p:sp>
+        <p:nvSpPr>
+          <p:cNvPr id="13" name="Shape 11"/>
+          <p:cNvSpPr/>
+          <p:nvPr/>
+        </p:nvSpPr>
+        <p:spPr>
+          <a:xfrm>
+            <a:off x="731520" y="3474720"/>
+            <a:ext cx="10515600" cy="594360"/>
+          </a:xfrm>
+          <a:prstGeom prst="roundRect">
+            <a:avLst>
+              <a:gd name="adj" fmla="val 15385"/>
+            </a:avLst>
+          </a:prstGeom>
+          <a:solidFill>
+            <a:srgbClr val="F3F1EE"/>
+          </a:solidFill>
+          <a:ln w="12700">
+            <a:solidFill>
+              <a:srgbClr val="E5E2DC"/>
+            </a:solidFill>
+            <a:prstDash val="solid"/>
+          </a:ln>
+        </p:spPr>
+      </p:sp>
+      <p:sp>
+        <p:nvSpPr>
+          <p:cNvPr id="14" name="Shape 12"/>
+          <p:cNvSpPr/>
+          <p:nvPr/>
+        </p:nvSpPr>
+        <p:spPr>
+          <a:xfrm>
+            <a:off x="914400" y="3584448"/>
+            <a:ext cx="365760" cy="365760"/>
+          </a:xfrm>
+          <a:prstGeom prst="ellipse">
+            <a:avLst/>
+          </a:prstGeom>
+          <a:solidFill>
+            <a:srgbClr val="C8372D"/>
+          </a:solidFill>
+          <a:ln/>
+        </p:spPr>
+      </p:sp>
+      <p:sp>
+        <p:nvSpPr>
+          <p:cNvPr id="15" name="Text 13"/>
+          <p:cNvSpPr/>
+          <p:nvPr/>
+        </p:nvSpPr>
+        <p:spPr>
+          <a:xfrm>
+            <a:off x="914400" y="3584448"/>
+            <a:ext cx="365760" cy="365760"/>
+          </a:xfrm>
+          <a:prstGeom prst="rect">
+            <a:avLst/>
+          </a:prstGeom>
+          <a:noFill/>
+          <a:ln/>
+        </p:spPr>
+        <p:txBody>
+          <a:bodyPr wrap="square" rtlCol="0" anchor="ctr"/>
+          <a:lstStyle/>
+          <a:p>
+            <a:pPr algn="ctr" indent="0" marL="0">
+              <a:buNone/>
+            </a:pPr>
+            <a:r>
+              <a:rPr lang="en-US" sz="1200" b="1" dirty="0">
+                <a:solidFill>
+                  <a:srgbClr val="FFFFFF"/>
+                </a:solidFill>
+                <a:latin typeface="Arial" pitchFamily="34" charset="0"/>
+                <a:ea typeface="Arial" pitchFamily="34" charset="-122"/>
+                <a:cs typeface="Arial" pitchFamily="34" charset="-120"/>
+              </a:rPr>
+              <a:t>3</a:t>
+            </a:r>
+            <a:endParaRPr lang="en-US" sz="1200" dirty="0"/>
+          </a:p>
+        </p:txBody>
+      </p:sp>
+      <p:sp>
+        <p:nvSpPr>
+          <p:cNvPr id="16" name="Text 14"/>
+          <p:cNvSpPr/>
+          <p:nvPr/>
+        </p:nvSpPr>
+        <p:spPr>
+          <a:xfrm>
+            <a:off x="1463040" y="3520440"/>
+            <a:ext cx="9601200" cy="502920"/>
           </a:xfrm>
           <a:prstGeom prst="rect">
             <a:avLst/>
@@ -1935,102 +2321,201 @@
               <a:buNone/>
             </a:pPr>
             <a:r>
-              <a:rPr lang="en-US" sz="1100" b="1" spc="200" kern="0" dirty="0">
-                <a:solidFill>
-                  <a:srgbClr val="C8372D"/>
-                </a:solidFill>
-                <a:latin typeface="Calibri" pitchFamily="34" charset="0"/>
-                <a:ea typeface="Calibri" pitchFamily="34" charset="-122"/>
-                <a:cs typeface="Calibri" pitchFamily="34" charset="-120"/>
-              </a:rPr>
-              <a:t>Think — Pair — Share</a:t>
-            </a:r>
-            <a:endParaRPr lang="en-US" sz="1100" dirty="0"/>
-          </a:p>
-        </p:txBody>
-      </p:sp>
-      <p:sp>
-        <p:nvSpPr>
-          <p:cNvPr id="9" name="Text 7"/>
-          <p:cNvSpPr/>
-          <p:nvPr/>
-        </p:nvSpPr>
-        <p:spPr>
-          <a:xfrm>
-            <a:off x="731520" y="3566160"/>
-            <a:ext cx="6949440" cy="1188720"/>
-          </a:xfrm>
-          <a:prstGeom prst="rect">
-            <a:avLst/>
-          </a:prstGeom>
-          <a:noFill/>
-          <a:ln/>
-        </p:spPr>
-        <p:txBody>
-          <a:bodyPr wrap="square" rtlCol="0" anchor="ctr"/>
-          <a:lstStyle/>
-          <a:p>
-            <a:pPr marL="342900" indent="-342900">
-              <a:spcAft>
-                <a:spcPts val="600"/>
-              </a:spcAft>
-              <a:buSzPct val="100000"/>
-              <a:buChar char="•"/>
-            </a:pPr>
-            <a:r>
-              <a:rPr lang="en-US" sz="1400" dirty="0">
-                <a:solidFill>
-                  <a:srgbClr val="E5E2DC"/>
-                </a:solidFill>
-                <a:latin typeface="Calibri" pitchFamily="34" charset="0"/>
-                <a:ea typeface="Calibri" pitchFamily="34" charset="-122"/>
-                <a:cs typeface="Calibri" pitchFamily="34" charset="-120"/>
-              </a:rPr>
-              <a:t>What colours might be hidden inside black ink?</a:t>
-            </a:r>
-            <a:endParaRPr lang="en-US" sz="1400" dirty="0"/>
-          </a:p>
-          <a:p>
-            <a:pPr marL="342900" indent="-342900">
-              <a:spcAft>
-                <a:spcPts val="600"/>
-              </a:spcAft>
-              <a:buSzPct val="100000"/>
-              <a:buChar char="•"/>
-            </a:pPr>
-            <a:r>
-              <a:rPr lang="en-US" sz="1400" dirty="0">
-                <a:solidFill>
-                  <a:srgbClr val="E5E2DC"/>
-                </a:solidFill>
-                <a:latin typeface="Calibri" pitchFamily="34" charset="0"/>
-                <a:ea typeface="Calibri" pitchFamily="34" charset="-122"/>
-                <a:cs typeface="Calibri" pitchFamily="34" charset="-120"/>
-              </a:rPr>
-              <a:t>Why would different colours travel different distances?</a:t>
-            </a:r>
-            <a:endParaRPr lang="en-US" sz="1400" dirty="0"/>
-          </a:p>
-          <a:p>
-            <a:pPr marL="342900" indent="-342900">
-              <a:spcAft>
-                <a:spcPts val="600"/>
-              </a:spcAft>
-              <a:buSzPct val="100000"/>
-              <a:buChar char="•"/>
-            </a:pPr>
-            <a:r>
-              <a:rPr lang="en-US" sz="1400" dirty="0">
-                <a:solidFill>
-                  <a:srgbClr val="E5E2DC"/>
-                </a:solidFill>
-                <a:latin typeface="Calibri" pitchFamily="34" charset="0"/>
-                <a:ea typeface="Calibri" pitchFamily="34" charset="-122"/>
-                <a:cs typeface="Calibri" pitchFamily="34" charset="-120"/>
-              </a:rPr>
-              <a:t>Could you use this to catch a forger who used a different pen?</a:t>
-            </a:r>
-            <a:endParaRPr lang="en-US" sz="1400" dirty="0"/>
+              <a:rPr lang="en-US" sz="1500" dirty="0">
+                <a:solidFill>
+                  <a:srgbClr val="3D3A36"/>
+                </a:solidFill>
+                <a:latin typeface="Arial" pitchFamily="34" charset="0"/>
+                <a:ea typeface="Arial" pitchFamily="34" charset="-122"/>
+                <a:cs typeface="Arial" pitchFamily="34" charset="-120"/>
+              </a:rPr>
+              <a:t>Compare unknown substances using chromatograms</a:t>
+            </a:r>
+            <a:endParaRPr lang="en-US" sz="1500" dirty="0"/>
+          </a:p>
+        </p:txBody>
+      </p:sp>
+      <p:sp>
+        <p:nvSpPr>
+          <p:cNvPr id="17" name="Shape 15"/>
+          <p:cNvSpPr/>
+          <p:nvPr/>
+        </p:nvSpPr>
+        <p:spPr>
+          <a:xfrm>
+            <a:off x="731520" y="4206240"/>
+            <a:ext cx="10515600" cy="594360"/>
+          </a:xfrm>
+          <a:prstGeom prst="roundRect">
+            <a:avLst>
+              <a:gd name="adj" fmla="val 15385"/>
+            </a:avLst>
+          </a:prstGeom>
+          <a:solidFill>
+            <a:srgbClr val="F3F1EE"/>
+          </a:solidFill>
+          <a:ln w="12700">
+            <a:solidFill>
+              <a:srgbClr val="E5E2DC"/>
+            </a:solidFill>
+            <a:prstDash val="solid"/>
+          </a:ln>
+        </p:spPr>
+      </p:sp>
+      <p:sp>
+        <p:nvSpPr>
+          <p:cNvPr id="18" name="Shape 16"/>
+          <p:cNvSpPr/>
+          <p:nvPr/>
+        </p:nvSpPr>
+        <p:spPr>
+          <a:xfrm>
+            <a:off x="914400" y="4315968"/>
+            <a:ext cx="365760" cy="365760"/>
+          </a:xfrm>
+          <a:prstGeom prst="ellipse">
+            <a:avLst/>
+          </a:prstGeom>
+          <a:solidFill>
+            <a:srgbClr val="C8372D"/>
+          </a:solidFill>
+          <a:ln/>
+        </p:spPr>
+      </p:sp>
+      <p:sp>
+        <p:nvSpPr>
+          <p:cNvPr id="19" name="Text 17"/>
+          <p:cNvSpPr/>
+          <p:nvPr/>
+        </p:nvSpPr>
+        <p:spPr>
+          <a:xfrm>
+            <a:off x="914400" y="4315968"/>
+            <a:ext cx="365760" cy="365760"/>
+          </a:xfrm>
+          <a:prstGeom prst="rect">
+            <a:avLst/>
+          </a:prstGeom>
+          <a:noFill/>
+          <a:ln/>
+        </p:spPr>
+        <p:txBody>
+          <a:bodyPr wrap="square" rtlCol="0" anchor="ctr"/>
+          <a:lstStyle/>
+          <a:p>
+            <a:pPr algn="ctr" indent="0" marL="0">
+              <a:buNone/>
+            </a:pPr>
+            <a:r>
+              <a:rPr lang="en-US" sz="1200" b="1" dirty="0">
+                <a:solidFill>
+                  <a:srgbClr val="FFFFFF"/>
+                </a:solidFill>
+                <a:latin typeface="Arial" pitchFamily="34" charset="0"/>
+                <a:ea typeface="Arial" pitchFamily="34" charset="-122"/>
+                <a:cs typeface="Arial" pitchFamily="34" charset="-120"/>
+              </a:rPr>
+              <a:t>4</a:t>
+            </a:r>
+            <a:endParaRPr lang="en-US" sz="1200" dirty="0"/>
+          </a:p>
+        </p:txBody>
+      </p:sp>
+      <p:sp>
+        <p:nvSpPr>
+          <p:cNvPr id="20" name="Text 18"/>
+          <p:cNvSpPr/>
+          <p:nvPr/>
+        </p:nvSpPr>
+        <p:spPr>
+          <a:xfrm>
+            <a:off x="1463040" y="4251960"/>
+            <a:ext cx="9601200" cy="502920"/>
+          </a:xfrm>
+          <a:prstGeom prst="rect">
+            <a:avLst/>
+          </a:prstGeom>
+          <a:noFill/>
+          <a:ln/>
+        </p:spPr>
+        <p:txBody>
+          <a:bodyPr wrap="square" rtlCol="0" anchor="ctr"/>
+          <a:lstStyle/>
+          <a:p>
+            <a:pPr indent="0" marL="0">
+              <a:buNone/>
+            </a:pPr>
+            <a:r>
+              <a:rPr lang="en-US" sz="1500" dirty="0">
+                <a:solidFill>
+                  <a:srgbClr val="3D3A36"/>
+                </a:solidFill>
+                <a:latin typeface="Arial" pitchFamily="34" charset="0"/>
+                <a:ea typeface="Arial" pitchFamily="34" charset="-122"/>
+                <a:cs typeface="Arial" pitchFamily="34" charset="-120"/>
+              </a:rPr>
+              <a:t>Identify applications of chromatography</a:t>
+            </a:r>
+            <a:endParaRPr lang="en-US" sz="1500" dirty="0"/>
+          </a:p>
+        </p:txBody>
+      </p:sp>
+      <p:sp>
+        <p:nvSpPr>
+          <p:cNvPr id="21" name="Shape 19"/>
+          <p:cNvSpPr/>
+          <p:nvPr/>
+        </p:nvSpPr>
+        <p:spPr>
+          <a:xfrm>
+            <a:off x="0" y="6492240"/>
+            <a:ext cx="12188952" cy="365760"/>
+          </a:xfrm>
+          <a:prstGeom prst="rect">
+            <a:avLst/>
+          </a:prstGeom>
+          <a:solidFill>
+            <a:srgbClr val="1B2A4A"/>
+          </a:solidFill>
+          <a:ln/>
+        </p:spPr>
+      </p:sp>
+      <p:sp>
+        <p:nvSpPr>
+          <p:cNvPr id="22" name="Text 20"/>
+          <p:cNvSpPr/>
+          <p:nvPr/>
+        </p:nvSpPr>
+        <p:spPr>
+          <a:xfrm>
+            <a:off x="10058400" y="6537960"/>
+            <a:ext cx="1828800" cy="274320"/>
+          </a:xfrm>
+          <a:prstGeom prst="rect">
+            <a:avLst/>
+          </a:prstGeom>
+          <a:noFill/>
+          <a:ln/>
+        </p:spPr>
+        <p:txBody>
+          <a:bodyPr wrap="square" rtlCol="0" anchor="ctr"/>
+          <a:lstStyle/>
+          <a:p>
+            <a:pPr algn="r" indent="0" marL="0">
+              <a:buNone/>
+            </a:pPr>
+            <a:r>
+              <a:rPr lang="en-US" sz="900" dirty="0">
+                <a:solidFill>
+                  <a:srgbClr val="E9C46A"/>
+                </a:solidFill>
+                <a:latin typeface="Arial" pitchFamily="34" charset="0"/>
+                <a:ea typeface="Arial" pitchFamily="34" charset="-122"/>
+                <a:cs typeface="Arial" pitchFamily="34" charset="-120"/>
+              </a:rPr>
+              <a:t>mrzocchi.com</a:t>
+            </a:r>
+            <a:endParaRPr lang="en-US" sz="900" dirty="0"/>
           </a:p>
         </p:txBody>
       </p:sp>
@@ -2045,13 +2530,6 @@
 <file path=ppt/slides/slide3.xml><?xml version="1.0" encoding="utf-8"?>
 <p:sld xmlns:a="http://schemas.openxmlformats.org/drawingml/2006/main" xmlns:r="http://schemas.openxmlformats.org/officeDocument/2006/relationships" xmlns:p="http://schemas.openxmlformats.org/presentationml/2006/main">
   <p:cSld name="Slide 3">
-    <p:bg>
-      <p:bgPr>
-        <a:solidFill>
-          <a:srgbClr val="FAF8F5"/>
-        </a:solidFill>
-      </p:bgPr>
-    </p:bg>
     <p:spTree>
       <p:nvGrpSpPr>
         <p:cNvPr id="1" name=""/>
@@ -2075,286 +2553,481 @@
         <p:spPr>
           <a:xfrm>
             <a:off x="0" y="0"/>
-            <a:ext cx="9144000" cy="822960"/>
-          </a:xfrm>
-          <a:prstGeom prst="rect">
-            <a:avLst/>
-          </a:prstGeom>
-          <a:solidFill>
-            <a:srgbClr val="FFFFFF"/>
-          </a:solidFill>
-          <a:ln/>
-        </p:spPr>
-      </p:sp>
-      <p:sp>
-        <p:nvSpPr>
-          <p:cNvPr id="3" name="Shape 1"/>
-          <p:cNvSpPr/>
-          <p:nvPr/>
-        </p:nvSpPr>
-        <p:spPr>
-          <a:xfrm>
-            <a:off x="0" y="795528"/>
-            <a:ext cx="9144000" cy="27432"/>
-          </a:xfrm>
-          <a:prstGeom prst="rect">
-            <a:avLst/>
-          </a:prstGeom>
-          <a:solidFill>
-            <a:srgbClr val="C8372D"/>
-          </a:solidFill>
-          <a:ln/>
-        </p:spPr>
-      </p:sp>
-      <p:sp>
-        <p:nvSpPr>
-          <p:cNvPr id="4" name="Text 2"/>
-          <p:cNvSpPr/>
-          <p:nvPr/>
-        </p:nvSpPr>
-        <p:spPr>
-          <a:xfrm>
-            <a:off x="640080" y="91440"/>
-            <a:ext cx="7863840" cy="640080"/>
-          </a:xfrm>
-          <a:prstGeom prst="rect">
-            <a:avLst/>
-          </a:prstGeom>
-          <a:noFill/>
-          <a:ln/>
-        </p:spPr>
-        <p:txBody>
-          <a:bodyPr wrap="square" lIns="0" tIns="0" rIns="0" bIns="0" rtlCol="0" anchor="ctr"/>
+            <a:ext cx="12188952" cy="1097280"/>
+          </a:xfrm>
+          <a:prstGeom prst="rect">
+            <a:avLst/>
+          </a:prstGeom>
+          <a:solidFill>
+            <a:srgbClr val="1B2A4A"/>
+          </a:solidFill>
+          <a:ln/>
+        </p:spPr>
+      </p:sp>
+      <p:sp>
+        <p:nvSpPr>
+          <p:cNvPr id="3" name="Text 1"/>
+          <p:cNvSpPr/>
+          <p:nvPr/>
+        </p:nvSpPr>
+        <p:spPr>
+          <a:xfrm>
+            <a:off x="548640" y="182880"/>
+            <a:ext cx="10972800" cy="731520"/>
+          </a:xfrm>
+          <a:prstGeom prst="rect">
+            <a:avLst/>
+          </a:prstGeom>
+          <a:noFill/>
+          <a:ln/>
+        </p:spPr>
+        <p:txBody>
+          <a:bodyPr wrap="square" rtlCol="0" anchor="ctr"/>
           <a:lstStyle/>
           <a:p>
             <a:pPr indent="0" marL="0">
               <a:buNone/>
             </a:pPr>
             <a:r>
-              <a:rPr lang="en-US" sz="2200" b="1" dirty="0">
-                <a:solidFill>
-                  <a:srgbClr val="1B2A4A"/>
+              <a:rPr lang="en-US" sz="2600" b="1" dirty="0">
+                <a:solidFill>
+                  <a:srgbClr val="FFFFFF"/>
                 </a:solidFill>
                 <a:latin typeface="Georgia" pitchFamily="34" charset="0"/>
                 <a:ea typeface="Georgia" pitchFamily="34" charset="-122"/>
                 <a:cs typeface="Georgia" pitchFamily="34" charset="-120"/>
               </a:rPr>
-              <a:t>How Chromatography Works</a:t>
-            </a:r>
-            <a:endParaRPr lang="en-US" sz="2200" dirty="0"/>
-          </a:p>
-        </p:txBody>
-      </p:sp>
-      <p:sp>
-        <p:nvSpPr>
-          <p:cNvPr id="5" name="Text 3"/>
-          <p:cNvSpPr/>
-          <p:nvPr/>
-        </p:nvSpPr>
-        <p:spPr>
-          <a:xfrm>
-            <a:off x="640080" y="1005840"/>
-            <a:ext cx="7863840" cy="2926080"/>
-          </a:xfrm>
-          <a:prstGeom prst="rect">
-            <a:avLst/>
-          </a:prstGeom>
-          <a:noFill/>
-          <a:ln/>
-        </p:spPr>
-        <p:txBody>
-          <a:bodyPr wrap="square" rtlCol="0" anchor="ctr"/>
-          <a:lstStyle/>
-          <a:p>
-            <a:pPr marL="342900" indent="-342900">
-              <a:spcAft>
-                <a:spcPts val="800"/>
-              </a:spcAft>
-              <a:buSzPct val="100000"/>
-              <a:buChar char="•"/>
-            </a:pPr>
-            <a:r>
-              <a:rPr lang="en-US" sz="1600" dirty="0">
+              <a:t>Chromatography Review</a:t>
+            </a:r>
+            <a:endParaRPr lang="en-US" sz="2600" dirty="0"/>
+          </a:p>
+        </p:txBody>
+      </p:sp>
+      <p:sp>
+        <p:nvSpPr>
+          <p:cNvPr id="4" name="Text 2"/>
+          <p:cNvSpPr/>
+          <p:nvPr/>
+        </p:nvSpPr>
+        <p:spPr>
+          <a:xfrm>
+            <a:off x="731520" y="1325880"/>
+            <a:ext cx="10515600" cy="457200"/>
+          </a:xfrm>
+          <a:prstGeom prst="rect">
+            <a:avLst/>
+          </a:prstGeom>
+          <a:noFill/>
+          <a:ln/>
+        </p:spPr>
+        <p:txBody>
+          <a:bodyPr wrap="square" rtlCol="0" anchor="ctr"/>
+          <a:lstStyle/>
+          <a:p>
+            <a:pPr indent="0" marL="0">
+              <a:buNone/>
+            </a:pPr>
+            <a:r>
+              <a:rPr lang="en-US" sz="1400" i="1" dirty="0">
+                <a:solidFill>
+                  <a:srgbClr val="6B6660"/>
+                </a:solidFill>
+                <a:latin typeface="Arial" pitchFamily="34" charset="0"/>
+                <a:ea typeface="Arial" pitchFamily="34" charset="-122"/>
+                <a:cs typeface="Arial" pitchFamily="34" charset="-120"/>
+              </a:rPr>
+              <a:t>Chromatography identifies unknown substances by their Rf values.</a:t>
+            </a:r>
+            <a:endParaRPr lang="en-US" sz="1400" dirty="0"/>
+          </a:p>
+        </p:txBody>
+      </p:sp>
+      <p:sp>
+        <p:nvSpPr>
+          <p:cNvPr id="5" name="Shape 3"/>
+          <p:cNvSpPr/>
+          <p:nvPr/>
+        </p:nvSpPr>
+        <p:spPr>
+          <a:xfrm>
+            <a:off x="731520" y="1920240"/>
+            <a:ext cx="10515600" cy="640080"/>
+          </a:xfrm>
+          <a:prstGeom prst="roundRect">
+            <a:avLst>
+              <a:gd name="adj" fmla="val 14286"/>
+            </a:avLst>
+          </a:prstGeom>
+          <a:solidFill>
+            <a:srgbClr val="FFFFFF"/>
+          </a:solidFill>
+          <a:ln w="6350">
+            <a:solidFill>
+              <a:srgbClr val="E5E2DC"/>
+            </a:solidFill>
+            <a:prstDash val="solid"/>
+          </a:ln>
+        </p:spPr>
+      </p:sp>
+      <p:sp>
+        <p:nvSpPr>
+          <p:cNvPr id="6" name="Text 4"/>
+          <p:cNvSpPr/>
+          <p:nvPr/>
+        </p:nvSpPr>
+        <p:spPr>
+          <a:xfrm>
+            <a:off x="1005840" y="1965960"/>
+            <a:ext cx="10058400" cy="548640"/>
+          </a:xfrm>
+          <a:prstGeom prst="rect">
+            <a:avLst/>
+          </a:prstGeom>
+          <a:noFill/>
+          <a:ln/>
+        </p:spPr>
+        <p:txBody>
+          <a:bodyPr wrap="square" rtlCol="0" anchor="ctr"/>
+          <a:lstStyle/>
+          <a:p>
+            <a:pPr indent="0" marL="0">
+              <a:buNone/>
+            </a:pPr>
+            <a:r>
+              <a:rPr lang="en-US" sz="1500" dirty="0">
                 <a:solidFill>
                   <a:srgbClr val="3D3A36"/>
                 </a:solidFill>
-                <a:latin typeface="Calibri" pitchFamily="34" charset="0"/>
-                <a:ea typeface="Calibri" pitchFamily="34" charset="-122"/>
-                <a:cs typeface="Calibri" pitchFamily="34" charset="-120"/>
-              </a:rPr>
-              <a:t>A dot of mixture is placed on paper near the bottom.</a:t>
-            </a:r>
-            <a:endParaRPr lang="en-US" sz="1600" dirty="0"/>
-          </a:p>
-          <a:p>
-            <a:pPr marL="342900" indent="-342900">
-              <a:spcAft>
-                <a:spcPts val="800"/>
-              </a:spcAft>
-              <a:buSzPct val="100000"/>
-              <a:buChar char="•"/>
-            </a:pPr>
-            <a:r>
-              <a:rPr lang="en-US" sz="1600" dirty="0">
+                <a:latin typeface="Arial" pitchFamily="34" charset="0"/>
+                <a:ea typeface="Arial" pitchFamily="34" charset="-122"/>
+                <a:cs typeface="Arial" pitchFamily="34" charset="-120"/>
+              </a:rPr>
+              <a:t>▸ Separates dissolved substances based on how they travel through paper</a:t>
+            </a:r>
+            <a:endParaRPr lang="en-US" sz="1500" dirty="0"/>
+          </a:p>
+        </p:txBody>
+      </p:sp>
+      <p:sp>
+        <p:nvSpPr>
+          <p:cNvPr id="7" name="Shape 5"/>
+          <p:cNvSpPr/>
+          <p:nvPr/>
+        </p:nvSpPr>
+        <p:spPr>
+          <a:xfrm>
+            <a:off x="731520" y="2697480"/>
+            <a:ext cx="10515600" cy="640080"/>
+          </a:xfrm>
+          <a:prstGeom prst="roundRect">
+            <a:avLst>
+              <a:gd name="adj" fmla="val 14286"/>
+            </a:avLst>
+          </a:prstGeom>
+          <a:solidFill>
+            <a:srgbClr val="F8F6F3"/>
+          </a:solidFill>
+          <a:ln w="6350">
+            <a:solidFill>
+              <a:srgbClr val="E5E2DC"/>
+            </a:solidFill>
+            <a:prstDash val="solid"/>
+          </a:ln>
+        </p:spPr>
+      </p:sp>
+      <p:sp>
+        <p:nvSpPr>
+          <p:cNvPr id="8" name="Text 6"/>
+          <p:cNvSpPr/>
+          <p:nvPr/>
+        </p:nvSpPr>
+        <p:spPr>
+          <a:xfrm>
+            <a:off x="1005840" y="2743200"/>
+            <a:ext cx="10058400" cy="548640"/>
+          </a:xfrm>
+          <a:prstGeom prst="rect">
+            <a:avLst/>
+          </a:prstGeom>
+          <a:noFill/>
+          <a:ln/>
+        </p:spPr>
+        <p:txBody>
+          <a:bodyPr wrap="square" rtlCol="0" anchor="ctr"/>
+          <a:lstStyle/>
+          <a:p>
+            <a:pPr indent="0" marL="0">
+              <a:buNone/>
+            </a:pPr>
+            <a:r>
+              <a:rPr lang="en-US" sz="1500" dirty="0">
                 <a:solidFill>
                   <a:srgbClr val="3D3A36"/>
                 </a:solidFill>
-                <a:latin typeface="Calibri" pitchFamily="34" charset="0"/>
-                <a:ea typeface="Calibri" pitchFamily="34" charset="-122"/>
-                <a:cs typeface="Calibri" pitchFamily="34" charset="-120"/>
-              </a:rPr>
-              <a:t>The paper is dipped in a solvent (water or ethanol) — NOT touching the dot.</a:t>
-            </a:r>
-            <a:endParaRPr lang="en-US" sz="1600" dirty="0"/>
-          </a:p>
-          <a:p>
-            <a:pPr marL="342900" indent="-342900">
-              <a:spcAft>
-                <a:spcPts val="800"/>
-              </a:spcAft>
-              <a:buSzPct val="100000"/>
-              <a:buChar char="•"/>
-            </a:pPr>
-            <a:r>
-              <a:rPr lang="en-US" sz="1600" dirty="0">
+                <a:latin typeface="Arial" pitchFamily="34" charset="0"/>
+                <a:ea typeface="Arial" pitchFamily="34" charset="-122"/>
+                <a:cs typeface="Arial" pitchFamily="34" charset="-120"/>
+              </a:rPr>
+              <a:t>▸ Different substances have different attractions to the paper/solvent</a:t>
+            </a:r>
+            <a:endParaRPr lang="en-US" sz="1500" dirty="0"/>
+          </a:p>
+        </p:txBody>
+      </p:sp>
+      <p:sp>
+        <p:nvSpPr>
+          <p:cNvPr id="9" name="Shape 7"/>
+          <p:cNvSpPr/>
+          <p:nvPr/>
+        </p:nvSpPr>
+        <p:spPr>
+          <a:xfrm>
+            <a:off x="731520" y="3474720"/>
+            <a:ext cx="10515600" cy="640080"/>
+          </a:xfrm>
+          <a:prstGeom prst="roundRect">
+            <a:avLst>
+              <a:gd name="adj" fmla="val 14286"/>
+            </a:avLst>
+          </a:prstGeom>
+          <a:solidFill>
+            <a:srgbClr val="FFFFFF"/>
+          </a:solidFill>
+          <a:ln w="6350">
+            <a:solidFill>
+              <a:srgbClr val="E5E2DC"/>
+            </a:solidFill>
+            <a:prstDash val="solid"/>
+          </a:ln>
+        </p:spPr>
+      </p:sp>
+      <p:sp>
+        <p:nvSpPr>
+          <p:cNvPr id="10" name="Text 8"/>
+          <p:cNvSpPr/>
+          <p:nvPr/>
+        </p:nvSpPr>
+        <p:spPr>
+          <a:xfrm>
+            <a:off x="1005840" y="3520440"/>
+            <a:ext cx="10058400" cy="548640"/>
+          </a:xfrm>
+          <a:prstGeom prst="rect">
+            <a:avLst/>
+          </a:prstGeom>
+          <a:noFill/>
+          <a:ln/>
+        </p:spPr>
+        <p:txBody>
+          <a:bodyPr wrap="square" rtlCol="0" anchor="ctr"/>
+          <a:lstStyle/>
+          <a:p>
+            <a:pPr indent="0" marL="0">
+              <a:buNone/>
+            </a:pPr>
+            <a:r>
+              <a:rPr lang="en-US" sz="1500" dirty="0">
                 <a:solidFill>
                   <a:srgbClr val="3D3A36"/>
                 </a:solidFill>
-                <a:latin typeface="Calibri" pitchFamily="34" charset="0"/>
-                <a:ea typeface="Calibri" pitchFamily="34" charset="-122"/>
-                <a:cs typeface="Calibri" pitchFamily="34" charset="-120"/>
-              </a:rPr>
-              <a:t>Solvent travels up the paper by capillary action.</a:t>
-            </a:r>
-            <a:endParaRPr lang="en-US" sz="1600" dirty="0"/>
-          </a:p>
-          <a:p>
-            <a:pPr marL="342900" indent="-342900">
-              <a:spcAft>
-                <a:spcPts val="800"/>
-              </a:spcAft>
-              <a:buSzPct val="100000"/>
-              <a:buChar char="•"/>
-            </a:pPr>
-            <a:r>
-              <a:rPr lang="en-US" sz="1600" dirty="0">
+                <a:latin typeface="Arial" pitchFamily="34" charset="0"/>
+                <a:ea typeface="Arial" pitchFamily="34" charset="-122"/>
+                <a:cs typeface="Arial" pitchFamily="34" charset="-120"/>
+              </a:rPr>
+              <a:t>▸ More soluble substances travel further with the solvent</a:t>
+            </a:r>
+            <a:endParaRPr lang="en-US" sz="1500" dirty="0"/>
+          </a:p>
+        </p:txBody>
+      </p:sp>
+      <p:sp>
+        <p:nvSpPr>
+          <p:cNvPr id="11" name="Shape 9"/>
+          <p:cNvSpPr/>
+          <p:nvPr/>
+        </p:nvSpPr>
+        <p:spPr>
+          <a:xfrm>
+            <a:off x="731520" y="4251960"/>
+            <a:ext cx="10515600" cy="640080"/>
+          </a:xfrm>
+          <a:prstGeom prst="roundRect">
+            <a:avLst>
+              <a:gd name="adj" fmla="val 14286"/>
+            </a:avLst>
+          </a:prstGeom>
+          <a:solidFill>
+            <a:srgbClr val="F8F6F3"/>
+          </a:solidFill>
+          <a:ln w="6350">
+            <a:solidFill>
+              <a:srgbClr val="E5E2DC"/>
+            </a:solidFill>
+            <a:prstDash val="solid"/>
+          </a:ln>
+        </p:spPr>
+      </p:sp>
+      <p:sp>
+        <p:nvSpPr>
+          <p:cNvPr id="12" name="Text 10"/>
+          <p:cNvSpPr/>
+          <p:nvPr/>
+        </p:nvSpPr>
+        <p:spPr>
+          <a:xfrm>
+            <a:off x="1005840" y="4297680"/>
+            <a:ext cx="10058400" cy="548640"/>
+          </a:xfrm>
+          <a:prstGeom prst="rect">
+            <a:avLst/>
+          </a:prstGeom>
+          <a:noFill/>
+          <a:ln/>
+        </p:spPr>
+        <p:txBody>
+          <a:bodyPr wrap="square" rtlCol="0" anchor="ctr"/>
+          <a:lstStyle/>
+          <a:p>
+            <a:pPr indent="0" marL="0">
+              <a:buNone/>
+            </a:pPr>
+            <a:r>
+              <a:rPr lang="en-US" sz="1500" dirty="0">
                 <a:solidFill>
                   <a:srgbClr val="3D3A36"/>
                 </a:solidFill>
-                <a:latin typeface="Calibri" pitchFamily="34" charset="0"/>
-                <a:ea typeface="Calibri" pitchFamily="34" charset="-122"/>
-                <a:cs typeface="Calibri" pitchFamily="34" charset="-120"/>
-              </a:rPr>
-              <a:t>Different substances travel different distances based on their solubility.</a:t>
-            </a:r>
-            <a:endParaRPr lang="en-US" sz="1600" dirty="0"/>
-          </a:p>
-          <a:p>
-            <a:pPr marL="342900" indent="-342900">
-              <a:spcAft>
-                <a:spcPts val="800"/>
-              </a:spcAft>
-              <a:buSzPct val="100000"/>
-              <a:buChar char="•"/>
-            </a:pPr>
-            <a:r>
-              <a:rPr lang="en-US" sz="1600" dirty="0">
+                <a:latin typeface="Arial" pitchFamily="34" charset="0"/>
+                <a:ea typeface="Arial" pitchFamily="34" charset="-122"/>
+                <a:cs typeface="Arial" pitchFamily="34" charset="-120"/>
+              </a:rPr>
+              <a:t>▸ Less soluble substances stay closer to the start line</a:t>
+            </a:r>
+            <a:endParaRPr lang="en-US" sz="1500" dirty="0"/>
+          </a:p>
+        </p:txBody>
+      </p:sp>
+      <p:sp>
+        <p:nvSpPr>
+          <p:cNvPr id="13" name="Shape 11"/>
+          <p:cNvSpPr/>
+          <p:nvPr/>
+        </p:nvSpPr>
+        <p:spPr>
+          <a:xfrm>
+            <a:off x="731520" y="5029200"/>
+            <a:ext cx="10515600" cy="640080"/>
+          </a:xfrm>
+          <a:prstGeom prst="roundRect">
+            <a:avLst>
+              <a:gd name="adj" fmla="val 14286"/>
+            </a:avLst>
+          </a:prstGeom>
+          <a:solidFill>
+            <a:srgbClr val="FFFFFF"/>
+          </a:solidFill>
+          <a:ln w="6350">
+            <a:solidFill>
+              <a:srgbClr val="E5E2DC"/>
+            </a:solidFill>
+            <a:prstDash val="solid"/>
+          </a:ln>
+        </p:spPr>
+      </p:sp>
+      <p:sp>
+        <p:nvSpPr>
+          <p:cNvPr id="14" name="Text 12"/>
+          <p:cNvSpPr/>
+          <p:nvPr/>
+        </p:nvSpPr>
+        <p:spPr>
+          <a:xfrm>
+            <a:off x="1005840" y="5074920"/>
+            <a:ext cx="10058400" cy="548640"/>
+          </a:xfrm>
+          <a:prstGeom prst="rect">
+            <a:avLst/>
+          </a:prstGeom>
+          <a:noFill/>
+          <a:ln/>
+        </p:spPr>
+        <p:txBody>
+          <a:bodyPr wrap="square" rtlCol="0" anchor="ctr"/>
+          <a:lstStyle/>
+          <a:p>
+            <a:pPr indent="0" marL="0">
+              <a:buNone/>
+            </a:pPr>
+            <a:r>
+              <a:rPr lang="en-US" sz="1500" dirty="0">
                 <a:solidFill>
                   <a:srgbClr val="3D3A36"/>
                 </a:solidFill>
-                <a:latin typeface="Calibri" pitchFamily="34" charset="0"/>
-                <a:ea typeface="Calibri" pitchFamily="34" charset="-122"/>
-                <a:cs typeface="Calibri" pitchFamily="34" charset="-120"/>
-              </a:rPr>
-              <a:t>More soluble = travels further. Less soluble = stays near the start.</a:t>
-            </a:r>
-            <a:endParaRPr lang="en-US" sz="1600" dirty="0"/>
-          </a:p>
-        </p:txBody>
-      </p:sp>
-      <p:sp>
-        <p:nvSpPr>
-          <p:cNvPr id="6" name="Shape 4"/>
-          <p:cNvSpPr/>
-          <p:nvPr/>
-        </p:nvSpPr>
-        <p:spPr>
-          <a:xfrm>
-            <a:off x="640080" y="4114800"/>
-            <a:ext cx="7863840" cy="731520"/>
-          </a:xfrm>
-          <a:prstGeom prst="rect">
-            <a:avLst/>
-          </a:prstGeom>
-          <a:solidFill>
-            <a:srgbClr val="E8F5F3"/>
-          </a:solidFill>
-          <a:ln/>
-          <a:effectLst>
-            <a:outerShdw sx="100000" sy="100000" kx="0" ky="0" algn="bl" rotWithShape="0" blurRad="76200" dist="25400" dir="8100000">
-              <a:srgbClr val="000000">
-                <a:alpha val="12000"/>
-              </a:srgbClr>
-            </a:outerShdw>
-          </a:effectLst>
-        </p:spPr>
-      </p:sp>
-      <p:sp>
-        <p:nvSpPr>
-          <p:cNvPr id="7" name="Shape 5"/>
-          <p:cNvSpPr/>
-          <p:nvPr/>
-        </p:nvSpPr>
-        <p:spPr>
-          <a:xfrm>
-            <a:off x="640080" y="4114800"/>
-            <a:ext cx="64008" cy="731520"/>
-          </a:xfrm>
-          <a:prstGeom prst="rect">
-            <a:avLst/>
-          </a:prstGeom>
-          <a:solidFill>
-            <a:srgbClr val="C8372D"/>
-          </a:solidFill>
-          <a:ln/>
-        </p:spPr>
-      </p:sp>
-      <p:sp>
-        <p:nvSpPr>
-          <p:cNvPr id="8" name="Text 6"/>
-          <p:cNvSpPr/>
-          <p:nvPr/>
-        </p:nvSpPr>
-        <p:spPr>
-          <a:xfrm>
-            <a:off x="914400" y="4160520"/>
-            <a:ext cx="7406640" cy="640080"/>
-          </a:xfrm>
-          <a:prstGeom prst="rect">
-            <a:avLst/>
-          </a:prstGeom>
-          <a:noFill/>
-          <a:ln/>
-        </p:spPr>
-        <p:txBody>
-          <a:bodyPr wrap="square" rtlCol="0" anchor="ctr"/>
-          <a:lstStyle/>
-          <a:p>
-            <a:pPr indent="0" marL="0">
-              <a:buNone/>
-            </a:pPr>
-            <a:r>
-              <a:rPr lang="en-US" sz="1300" i="1" dirty="0">
-                <a:solidFill>
-                  <a:srgbClr val="3D3A36"/>
-                </a:solidFill>
-                <a:latin typeface="Calibri" pitchFamily="34" charset="0"/>
-                <a:ea typeface="Calibri" pitchFamily="34" charset="-122"/>
-                <a:cs typeface="Calibri" pitchFamily="34" charset="-120"/>
-              </a:rPr>
-              <a:t>Chromatography means 'colour writing' in Greek — it was invented to separate plant pigments.</a:t>
-            </a:r>
-            <a:endParaRPr lang="en-US" sz="1300" dirty="0"/>
+                <a:latin typeface="Arial" pitchFamily="34" charset="0"/>
+                <a:ea typeface="Arial" pitchFamily="34" charset="-122"/>
+                <a:cs typeface="Arial" pitchFamily="34" charset="-120"/>
+              </a:rPr>
+              <a:t>▸ Each substance has a unique Rf value — like a fingerprint</a:t>
+            </a:r>
+            <a:endParaRPr lang="en-US" sz="1500" dirty="0"/>
+          </a:p>
+        </p:txBody>
+      </p:sp>
+      <p:sp>
+        <p:nvSpPr>
+          <p:cNvPr id="15" name="Shape 13"/>
+          <p:cNvSpPr/>
+          <p:nvPr/>
+        </p:nvSpPr>
+        <p:spPr>
+          <a:xfrm>
+            <a:off x="0" y="6492240"/>
+            <a:ext cx="12188952" cy="365760"/>
+          </a:xfrm>
+          <a:prstGeom prst="rect">
+            <a:avLst/>
+          </a:prstGeom>
+          <a:solidFill>
+            <a:srgbClr val="1B2A4A"/>
+          </a:solidFill>
+          <a:ln/>
+        </p:spPr>
+      </p:sp>
+      <p:sp>
+        <p:nvSpPr>
+          <p:cNvPr id="16" name="Text 14"/>
+          <p:cNvSpPr/>
+          <p:nvPr/>
+        </p:nvSpPr>
+        <p:spPr>
+          <a:xfrm>
+            <a:off x="10058400" y="6537960"/>
+            <a:ext cx="1828800" cy="274320"/>
+          </a:xfrm>
+          <a:prstGeom prst="rect">
+            <a:avLst/>
+          </a:prstGeom>
+          <a:noFill/>
+          <a:ln/>
+        </p:spPr>
+        <p:txBody>
+          <a:bodyPr wrap="square" rtlCol="0" anchor="ctr"/>
+          <a:lstStyle/>
+          <a:p>
+            <a:pPr algn="r" indent="0" marL="0">
+              <a:buNone/>
+            </a:pPr>
+            <a:r>
+              <a:rPr lang="en-US" sz="900" dirty="0">
+                <a:solidFill>
+                  <a:srgbClr val="E9C46A"/>
+                </a:solidFill>
+                <a:latin typeface="Arial" pitchFamily="34" charset="0"/>
+                <a:ea typeface="Arial" pitchFamily="34" charset="-122"/>
+                <a:cs typeface="Arial" pitchFamily="34" charset="-120"/>
+              </a:rPr>
+              <a:t>mrzocchi.com</a:t>
+            </a:r>
+            <a:endParaRPr lang="en-US" sz="900" dirty="0"/>
           </a:p>
         </p:txBody>
       </p:sp>
@@ -2369,13 +3042,6 @@
 <file path=ppt/slides/slide4.xml><?xml version="1.0" encoding="utf-8"?>
 <p:sld xmlns:a="http://schemas.openxmlformats.org/drawingml/2006/main" xmlns:r="http://schemas.openxmlformats.org/officeDocument/2006/relationships" xmlns:p="http://schemas.openxmlformats.org/presentationml/2006/main">
   <p:cSld name="Slide 4">
-    <p:bg>
-      <p:bgPr>
-        <a:solidFill>
-          <a:srgbClr val="FAF8F5"/>
-        </a:solidFill>
-      </p:bgPr>
-    </p:bg>
     <p:spTree>
       <p:nvGrpSpPr>
         <p:cNvPr id="1" name=""/>
@@ -2399,75 +3065,82 @@
         <p:spPr>
           <a:xfrm>
             <a:off x="0" y="0"/>
-            <a:ext cx="9144000" cy="822960"/>
-          </a:xfrm>
-          <a:prstGeom prst="rect">
-            <a:avLst/>
-          </a:prstGeom>
-          <a:solidFill>
-            <a:srgbClr val="FFFFFF"/>
-          </a:solidFill>
-          <a:ln/>
-        </p:spPr>
-      </p:sp>
-      <p:sp>
-        <p:nvSpPr>
-          <p:cNvPr id="3" name="Shape 1"/>
-          <p:cNvSpPr/>
-          <p:nvPr/>
-        </p:nvSpPr>
-        <p:spPr>
-          <a:xfrm>
-            <a:off x="0" y="795528"/>
-            <a:ext cx="9144000" cy="27432"/>
-          </a:xfrm>
-          <a:prstGeom prst="rect">
-            <a:avLst/>
-          </a:prstGeom>
-          <a:solidFill>
-            <a:srgbClr val="C8372D"/>
-          </a:solidFill>
-          <a:ln/>
-        </p:spPr>
-      </p:sp>
-      <p:sp>
-        <p:nvSpPr>
-          <p:cNvPr id="4" name="Text 2"/>
-          <p:cNvSpPr/>
-          <p:nvPr/>
-        </p:nvSpPr>
-        <p:spPr>
-          <a:xfrm>
-            <a:off x="640080" y="91440"/>
-            <a:ext cx="7863840" cy="640080"/>
-          </a:xfrm>
-          <a:prstGeom prst="rect">
-            <a:avLst/>
-          </a:prstGeom>
-          <a:noFill/>
-          <a:ln/>
-        </p:spPr>
-        <p:txBody>
-          <a:bodyPr wrap="square" lIns="0" tIns="0" rIns="0" bIns="0" rtlCol="0" anchor="ctr"/>
+            <a:ext cx="12188952" cy="1097280"/>
+          </a:xfrm>
+          <a:prstGeom prst="rect">
+            <a:avLst/>
+          </a:prstGeom>
+          <a:solidFill>
+            <a:srgbClr val="1B2A4A"/>
+          </a:solidFill>
+          <a:ln/>
+        </p:spPr>
+      </p:sp>
+      <p:sp>
+        <p:nvSpPr>
+          <p:cNvPr id="3" name="Text 1"/>
+          <p:cNvSpPr/>
+          <p:nvPr/>
+        </p:nvSpPr>
+        <p:spPr>
+          <a:xfrm>
+            <a:off x="548640" y="182880"/>
+            <a:ext cx="10972800" cy="731520"/>
+          </a:xfrm>
+          <a:prstGeom prst="rect">
+            <a:avLst/>
+          </a:prstGeom>
+          <a:noFill/>
+          <a:ln/>
+        </p:spPr>
+        <p:txBody>
+          <a:bodyPr wrap="square" rtlCol="0" anchor="ctr"/>
           <a:lstStyle/>
           <a:p>
             <a:pPr indent="0" marL="0">
               <a:buNone/>
             </a:pPr>
             <a:r>
-              <a:rPr lang="en-US" sz="2200" b="1" dirty="0">
-                <a:solidFill>
-                  <a:srgbClr val="1B2A4A"/>
+              <a:rPr lang="en-US" sz="2600" b="1" dirty="0">
+                <a:solidFill>
+                  <a:srgbClr val="FFFFFF"/>
                 </a:solidFill>
                 <a:latin typeface="Georgia" pitchFamily="34" charset="0"/>
                 <a:ea typeface="Georgia" pitchFamily="34" charset="-122"/>
                 <a:cs typeface="Georgia" pitchFamily="34" charset="-120"/>
               </a:rPr>
-              <a:t>Reading a Chromatogram</a:t>
-            </a:r>
-            <a:endParaRPr lang="en-US" sz="2200" dirty="0"/>
-          </a:p>
-        </p:txBody>
+              <a:t>✏️ Calculating Rf Values</a:t>
+            </a:r>
+            <a:endParaRPr lang="en-US" sz="2600" dirty="0"/>
+          </a:p>
+        </p:txBody>
+      </p:sp>
+      <p:sp>
+        <p:nvSpPr>
+          <p:cNvPr id="4" name="Shape 2"/>
+          <p:cNvSpPr/>
+          <p:nvPr/>
+        </p:nvSpPr>
+        <p:spPr>
+          <a:xfrm>
+            <a:off x="548640" y="1371600"/>
+            <a:ext cx="10972800" cy="914400"/>
+          </a:xfrm>
+          <a:prstGeom prst="roundRect">
+            <a:avLst>
+              <a:gd name="adj" fmla="val 12000"/>
+            </a:avLst>
+          </a:prstGeom>
+          <a:solidFill>
+            <a:srgbClr val="FFF8E7"/>
+          </a:solidFill>
+          <a:ln w="19050">
+            <a:solidFill>
+              <a:srgbClr val="E9C46A"/>
+            </a:solidFill>
+            <a:prstDash val="solid"/>
+          </a:ln>
+        </p:spPr>
       </p:sp>
       <p:sp>
         <p:nvSpPr>
@@ -2477,122 +3150,485 @@
         </p:nvSpPr>
         <p:spPr>
           <a:xfrm>
-            <a:off x="640080" y="1005840"/>
-            <a:ext cx="7863840" cy="2926080"/>
-          </a:xfrm>
-          <a:prstGeom prst="rect">
-            <a:avLst/>
-          </a:prstGeom>
-          <a:noFill/>
-          <a:ln/>
-        </p:spPr>
-        <p:txBody>
-          <a:bodyPr wrap="square" rtlCol="0" anchor="ctr"/>
-          <a:lstStyle/>
-          <a:p>
-            <a:pPr marL="342900" indent="-342900">
-              <a:spcAft>
-                <a:spcPts val="800"/>
-              </a:spcAft>
-              <a:buSzPct val="100000"/>
-              <a:buChar char="•"/>
-            </a:pPr>
-            <a:r>
-              <a:rPr lang="en-US" sz="1600" dirty="0">
+            <a:off x="822960" y="1417320"/>
+            <a:ext cx="10424160" cy="822960"/>
+          </a:xfrm>
+          <a:prstGeom prst="rect">
+            <a:avLst/>
+          </a:prstGeom>
+          <a:noFill/>
+          <a:ln/>
+        </p:spPr>
+        <p:txBody>
+          <a:bodyPr wrap="square" rtlCol="0" anchor="ctr"/>
+          <a:lstStyle/>
+          <a:p>
+            <a:pPr indent="0" marL="0">
+              <a:buNone/>
+            </a:pPr>
+            <a:r>
+              <a:rPr lang="en-US" sz="1600" b="1" dirty="0">
+                <a:solidFill>
+                  <a:srgbClr val="1B2A4A"/>
+                </a:solidFill>
+                <a:latin typeface="Arial" pitchFamily="34" charset="0"/>
+                <a:ea typeface="Arial" pitchFamily="34" charset="-122"/>
+                <a:cs typeface="Arial" pitchFamily="34" charset="-120"/>
+              </a:rPr>
+              <a:t>Substance A moved 3.5 cm. Substance B moved 5.6 cm. Solvent front = 7.0 cm.</a:t>
+            </a:r>
+            <a:endParaRPr lang="en-US" sz="1600" dirty="0"/>
+          </a:p>
+        </p:txBody>
+      </p:sp>
+      <p:sp>
+        <p:nvSpPr>
+          <p:cNvPr id="6" name="Shape 4"/>
+          <p:cNvSpPr/>
+          <p:nvPr/>
+        </p:nvSpPr>
+        <p:spPr>
+          <a:xfrm>
+            <a:off x="731520" y="2651760"/>
+            <a:ext cx="365760" cy="365760"/>
+          </a:xfrm>
+          <a:prstGeom prst="ellipse">
+            <a:avLst/>
+          </a:prstGeom>
+          <a:solidFill>
+            <a:srgbClr val="C8372D"/>
+          </a:solidFill>
+          <a:ln/>
+        </p:spPr>
+      </p:sp>
+      <p:sp>
+        <p:nvSpPr>
+          <p:cNvPr id="7" name="Text 5"/>
+          <p:cNvSpPr/>
+          <p:nvPr/>
+        </p:nvSpPr>
+        <p:spPr>
+          <a:xfrm>
+            <a:off x="731520" y="2651760"/>
+            <a:ext cx="365760" cy="365760"/>
+          </a:xfrm>
+          <a:prstGeom prst="rect">
+            <a:avLst/>
+          </a:prstGeom>
+          <a:noFill/>
+          <a:ln/>
+        </p:spPr>
+        <p:txBody>
+          <a:bodyPr wrap="square" rtlCol="0" anchor="ctr"/>
+          <a:lstStyle/>
+          <a:p>
+            <a:pPr algn="ctr" indent="0" marL="0">
+              <a:buNone/>
+            </a:pPr>
+            <a:r>
+              <a:rPr lang="en-US" sz="1200" b="1" dirty="0">
+                <a:solidFill>
+                  <a:srgbClr val="FFFFFF"/>
+                </a:solidFill>
+                <a:latin typeface="Arial" pitchFamily="34" charset="0"/>
+                <a:ea typeface="Arial" pitchFamily="34" charset="-122"/>
+                <a:cs typeface="Arial" pitchFamily="34" charset="-120"/>
+              </a:rPr>
+              <a:t>1</a:t>
+            </a:r>
+            <a:endParaRPr lang="en-US" sz="1200" dirty="0"/>
+          </a:p>
+        </p:txBody>
+      </p:sp>
+      <p:sp>
+        <p:nvSpPr>
+          <p:cNvPr id="8" name="Text 6"/>
+          <p:cNvSpPr/>
+          <p:nvPr/>
+        </p:nvSpPr>
+        <p:spPr>
+          <a:xfrm>
+            <a:off x="1280160" y="2606040"/>
+            <a:ext cx="10058400" cy="548640"/>
+          </a:xfrm>
+          <a:prstGeom prst="rect">
+            <a:avLst/>
+          </a:prstGeom>
+          <a:noFill/>
+          <a:ln/>
+        </p:spPr>
+        <p:txBody>
+          <a:bodyPr wrap="square" rtlCol="0" anchor="ctr"/>
+          <a:lstStyle/>
+          <a:p>
+            <a:pPr indent="0" marL="0">
+              <a:buNone/>
+            </a:pPr>
+            <a:r>
+              <a:rPr lang="en-US" sz="1400" dirty="0">
                 <a:solidFill>
                   <a:srgbClr val="3D3A36"/>
                 </a:solidFill>
-                <a:latin typeface="Calibri" pitchFamily="34" charset="0"/>
-                <a:ea typeface="Calibri" pitchFamily="34" charset="-122"/>
-                <a:cs typeface="Calibri" pitchFamily="34" charset="-120"/>
-              </a:rPr>
-              <a:t>Each spot = one substance in the mixture.</a:t>
-            </a:r>
-            <a:endParaRPr lang="en-US" sz="1600" dirty="0"/>
-          </a:p>
-          <a:p>
-            <a:pPr marL="342900" indent="-342900">
-              <a:spcAft>
-                <a:spcPts val="800"/>
-              </a:spcAft>
-              <a:buSzPct val="100000"/>
-              <a:buChar char="•"/>
-            </a:pPr>
-            <a:r>
-              <a:rPr lang="en-US" sz="1600" dirty="0">
+                <a:latin typeface="Arial" pitchFamily="34" charset="0"/>
+                <a:ea typeface="Arial" pitchFamily="34" charset="-122"/>
+                <a:cs typeface="Arial" pitchFamily="34" charset="-120"/>
+              </a:rPr>
+              <a:t>Rf for A = 3.5 ÷ 7.0 = 0.50</a:t>
+            </a:r>
+            <a:endParaRPr lang="en-US" sz="1400" dirty="0"/>
+          </a:p>
+        </p:txBody>
+      </p:sp>
+      <p:sp>
+        <p:nvSpPr>
+          <p:cNvPr id="9" name="Shape 7"/>
+          <p:cNvSpPr/>
+          <p:nvPr/>
+        </p:nvSpPr>
+        <p:spPr>
+          <a:xfrm>
+            <a:off x="731520" y="3337560"/>
+            <a:ext cx="365760" cy="365760"/>
+          </a:xfrm>
+          <a:prstGeom prst="ellipse">
+            <a:avLst/>
+          </a:prstGeom>
+          <a:solidFill>
+            <a:srgbClr val="C8372D"/>
+          </a:solidFill>
+          <a:ln/>
+        </p:spPr>
+      </p:sp>
+      <p:sp>
+        <p:nvSpPr>
+          <p:cNvPr id="10" name="Text 8"/>
+          <p:cNvSpPr/>
+          <p:nvPr/>
+        </p:nvSpPr>
+        <p:spPr>
+          <a:xfrm>
+            <a:off x="731520" y="3337560"/>
+            <a:ext cx="365760" cy="365760"/>
+          </a:xfrm>
+          <a:prstGeom prst="rect">
+            <a:avLst/>
+          </a:prstGeom>
+          <a:noFill/>
+          <a:ln/>
+        </p:spPr>
+        <p:txBody>
+          <a:bodyPr wrap="square" rtlCol="0" anchor="ctr"/>
+          <a:lstStyle/>
+          <a:p>
+            <a:pPr algn="ctr" indent="0" marL="0">
+              <a:buNone/>
+            </a:pPr>
+            <a:r>
+              <a:rPr lang="en-US" sz="1200" b="1" dirty="0">
+                <a:solidFill>
+                  <a:srgbClr val="FFFFFF"/>
+                </a:solidFill>
+                <a:latin typeface="Arial" pitchFamily="34" charset="0"/>
+                <a:ea typeface="Arial" pitchFamily="34" charset="-122"/>
+                <a:cs typeface="Arial" pitchFamily="34" charset="-120"/>
+              </a:rPr>
+              <a:t>2</a:t>
+            </a:r>
+            <a:endParaRPr lang="en-US" sz="1200" dirty="0"/>
+          </a:p>
+        </p:txBody>
+      </p:sp>
+      <p:sp>
+        <p:nvSpPr>
+          <p:cNvPr id="11" name="Text 9"/>
+          <p:cNvSpPr/>
+          <p:nvPr/>
+        </p:nvSpPr>
+        <p:spPr>
+          <a:xfrm>
+            <a:off x="1280160" y="3291840"/>
+            <a:ext cx="10058400" cy="548640"/>
+          </a:xfrm>
+          <a:prstGeom prst="rect">
+            <a:avLst/>
+          </a:prstGeom>
+          <a:noFill/>
+          <a:ln/>
+        </p:spPr>
+        <p:txBody>
+          <a:bodyPr wrap="square" rtlCol="0" anchor="ctr"/>
+          <a:lstStyle/>
+          <a:p>
+            <a:pPr indent="0" marL="0">
+              <a:buNone/>
+            </a:pPr>
+            <a:r>
+              <a:rPr lang="en-US" sz="1400" dirty="0">
                 <a:solidFill>
                   <a:srgbClr val="3D3A36"/>
                 </a:solidFill>
-                <a:latin typeface="Calibri" pitchFamily="34" charset="0"/>
-                <a:ea typeface="Calibri" pitchFamily="34" charset="-122"/>
-                <a:cs typeface="Calibri" pitchFamily="34" charset="-120"/>
-              </a:rPr>
-              <a:t>If two samples have a spot at the same height, they likely contain the same substance.</a:t>
-            </a:r>
-            <a:endParaRPr lang="en-US" sz="1600" dirty="0"/>
-          </a:p>
-          <a:p>
-            <a:pPr marL="342900" indent="-342900">
-              <a:spcAft>
-                <a:spcPts val="800"/>
-              </a:spcAft>
-              <a:buSzPct val="100000"/>
-              <a:buChar char="•"/>
-            </a:pPr>
-            <a:r>
-              <a:rPr lang="en-US" sz="1600" dirty="0">
+                <a:latin typeface="Arial" pitchFamily="34" charset="0"/>
+                <a:ea typeface="Arial" pitchFamily="34" charset="-122"/>
+                <a:cs typeface="Arial" pitchFamily="34" charset="-120"/>
+              </a:rPr>
+              <a:t>Rf for B = 5.6 ÷ 7.0 = 0.80</a:t>
+            </a:r>
+            <a:endParaRPr lang="en-US" sz="1400" dirty="0"/>
+          </a:p>
+        </p:txBody>
+      </p:sp>
+      <p:sp>
+        <p:nvSpPr>
+          <p:cNvPr id="12" name="Shape 10"/>
+          <p:cNvSpPr/>
+          <p:nvPr/>
+        </p:nvSpPr>
+        <p:spPr>
+          <a:xfrm>
+            <a:off x="731520" y="4023360"/>
+            <a:ext cx="365760" cy="365760"/>
+          </a:xfrm>
+          <a:prstGeom prst="ellipse">
+            <a:avLst/>
+          </a:prstGeom>
+          <a:solidFill>
+            <a:srgbClr val="C8372D"/>
+          </a:solidFill>
+          <a:ln/>
+        </p:spPr>
+      </p:sp>
+      <p:sp>
+        <p:nvSpPr>
+          <p:cNvPr id="13" name="Text 11"/>
+          <p:cNvSpPr/>
+          <p:nvPr/>
+        </p:nvSpPr>
+        <p:spPr>
+          <a:xfrm>
+            <a:off x="731520" y="4023360"/>
+            <a:ext cx="365760" cy="365760"/>
+          </a:xfrm>
+          <a:prstGeom prst="rect">
+            <a:avLst/>
+          </a:prstGeom>
+          <a:noFill/>
+          <a:ln/>
+        </p:spPr>
+        <p:txBody>
+          <a:bodyPr wrap="square" rtlCol="0" anchor="ctr"/>
+          <a:lstStyle/>
+          <a:p>
+            <a:pPr algn="ctr" indent="0" marL="0">
+              <a:buNone/>
+            </a:pPr>
+            <a:r>
+              <a:rPr lang="en-US" sz="1200" b="1" dirty="0">
+                <a:solidFill>
+                  <a:srgbClr val="FFFFFF"/>
+                </a:solidFill>
+                <a:latin typeface="Arial" pitchFamily="34" charset="0"/>
+                <a:ea typeface="Arial" pitchFamily="34" charset="-122"/>
+                <a:cs typeface="Arial" pitchFamily="34" charset="-120"/>
+              </a:rPr>
+              <a:t>3</a:t>
+            </a:r>
+            <a:endParaRPr lang="en-US" sz="1200" dirty="0"/>
+          </a:p>
+        </p:txBody>
+      </p:sp>
+      <p:sp>
+        <p:nvSpPr>
+          <p:cNvPr id="14" name="Text 12"/>
+          <p:cNvSpPr/>
+          <p:nvPr/>
+        </p:nvSpPr>
+        <p:spPr>
+          <a:xfrm>
+            <a:off x="1280160" y="3977640"/>
+            <a:ext cx="10058400" cy="548640"/>
+          </a:xfrm>
+          <a:prstGeom prst="rect">
+            <a:avLst/>
+          </a:prstGeom>
+          <a:noFill/>
+          <a:ln/>
+        </p:spPr>
+        <p:txBody>
+          <a:bodyPr wrap="square" rtlCol="0" anchor="ctr"/>
+          <a:lstStyle/>
+          <a:p>
+            <a:pPr indent="0" marL="0">
+              <a:buNone/>
+            </a:pPr>
+            <a:r>
+              <a:rPr lang="en-US" sz="1400" dirty="0">
                 <a:solidFill>
                   <a:srgbClr val="3D3A36"/>
                 </a:solidFill>
-                <a:latin typeface="Calibri" pitchFamily="34" charset="0"/>
-                <a:ea typeface="Calibri" pitchFamily="34" charset="-122"/>
-                <a:cs typeface="Calibri" pitchFamily="34" charset="-120"/>
-              </a:rPr>
-              <a:t>Rf value = distance substance moved / distance solvent moved.</a:t>
-            </a:r>
-            <a:endParaRPr lang="en-US" sz="1600" dirty="0"/>
-          </a:p>
-          <a:p>
-            <a:pPr marL="342900" indent="-342900">
-              <a:spcAft>
-                <a:spcPts val="800"/>
-              </a:spcAft>
-              <a:buSzPct val="100000"/>
-              <a:buChar char="•"/>
-            </a:pPr>
-            <a:r>
-              <a:rPr lang="en-US" sz="1600" dirty="0">
+                <a:latin typeface="Arial" pitchFamily="34" charset="0"/>
+                <a:ea typeface="Arial" pitchFamily="34" charset="-122"/>
+                <a:cs typeface="Arial" pitchFamily="34" charset="-120"/>
+              </a:rPr>
+              <a:t>B is more soluble (travelled further)</a:t>
+            </a:r>
+            <a:endParaRPr lang="en-US" sz="1400" dirty="0"/>
+          </a:p>
+        </p:txBody>
+      </p:sp>
+      <p:sp>
+        <p:nvSpPr>
+          <p:cNvPr id="15" name="Shape 13"/>
+          <p:cNvSpPr/>
+          <p:nvPr/>
+        </p:nvSpPr>
+        <p:spPr>
+          <a:xfrm>
+            <a:off x="731520" y="4709160"/>
+            <a:ext cx="365760" cy="365760"/>
+          </a:xfrm>
+          <a:prstGeom prst="ellipse">
+            <a:avLst/>
+          </a:prstGeom>
+          <a:solidFill>
+            <a:srgbClr val="C8372D"/>
+          </a:solidFill>
+          <a:ln/>
+        </p:spPr>
+      </p:sp>
+      <p:sp>
+        <p:nvSpPr>
+          <p:cNvPr id="16" name="Text 14"/>
+          <p:cNvSpPr/>
+          <p:nvPr/>
+        </p:nvSpPr>
+        <p:spPr>
+          <a:xfrm>
+            <a:off x="731520" y="4709160"/>
+            <a:ext cx="365760" cy="365760"/>
+          </a:xfrm>
+          <a:prstGeom prst="rect">
+            <a:avLst/>
+          </a:prstGeom>
+          <a:noFill/>
+          <a:ln/>
+        </p:spPr>
+        <p:txBody>
+          <a:bodyPr wrap="square" rtlCol="0" anchor="ctr"/>
+          <a:lstStyle/>
+          <a:p>
+            <a:pPr algn="ctr" indent="0" marL="0">
+              <a:buNone/>
+            </a:pPr>
+            <a:r>
+              <a:rPr lang="en-US" sz="1200" b="1" dirty="0">
+                <a:solidFill>
+                  <a:srgbClr val="FFFFFF"/>
+                </a:solidFill>
+                <a:latin typeface="Arial" pitchFamily="34" charset="0"/>
+                <a:ea typeface="Arial" pitchFamily="34" charset="-122"/>
+                <a:cs typeface="Arial" pitchFamily="34" charset="-120"/>
+              </a:rPr>
+              <a:t>4</a:t>
+            </a:r>
+            <a:endParaRPr lang="en-US" sz="1200" dirty="0"/>
+          </a:p>
+        </p:txBody>
+      </p:sp>
+      <p:sp>
+        <p:nvSpPr>
+          <p:cNvPr id="17" name="Text 15"/>
+          <p:cNvSpPr/>
+          <p:nvPr/>
+        </p:nvSpPr>
+        <p:spPr>
+          <a:xfrm>
+            <a:off x="1280160" y="4663440"/>
+            <a:ext cx="10058400" cy="548640"/>
+          </a:xfrm>
+          <a:prstGeom prst="rect">
+            <a:avLst/>
+          </a:prstGeom>
+          <a:noFill/>
+          <a:ln/>
+        </p:spPr>
+        <p:txBody>
+          <a:bodyPr wrap="square" rtlCol="0" anchor="ctr"/>
+          <a:lstStyle/>
+          <a:p>
+            <a:pPr indent="0" marL="0">
+              <a:buNone/>
+            </a:pPr>
+            <a:r>
+              <a:rPr lang="en-US" sz="1400" dirty="0">
                 <a:solidFill>
                   <a:srgbClr val="3D3A36"/>
                 </a:solidFill>
-                <a:latin typeface="Calibri" pitchFamily="34" charset="0"/>
-                <a:ea typeface="Calibri" pitchFamily="34" charset="-122"/>
-                <a:cs typeface="Calibri" pitchFamily="34" charset="-120"/>
-              </a:rPr>
-              <a:t>Rf is always between 0 and 1.</a:t>
-            </a:r>
-            <a:endParaRPr lang="en-US" sz="1600" dirty="0"/>
-          </a:p>
-          <a:p>
-            <a:pPr marL="342900" indent="-342900">
-              <a:spcAft>
-                <a:spcPts val="800"/>
-              </a:spcAft>
-              <a:buSzPct val="100000"/>
-              <a:buChar char="•"/>
-            </a:pPr>
-            <a:r>
-              <a:rPr lang="en-US" sz="1600" dirty="0">
-                <a:solidFill>
-                  <a:srgbClr val="3D3A36"/>
-                </a:solidFill>
-                <a:latin typeface="Calibri" pitchFamily="34" charset="0"/>
-                <a:ea typeface="Calibri" pitchFamily="34" charset="-122"/>
-                <a:cs typeface="Calibri" pitchFamily="34" charset="-120"/>
-              </a:rPr>
-              <a:t>Same substance always has the same Rf in the same solvent.</a:t>
-            </a:r>
-            <a:endParaRPr lang="en-US" sz="1600" dirty="0"/>
+                <a:latin typeface="Arial" pitchFamily="34" charset="0"/>
+                <a:ea typeface="Arial" pitchFamily="34" charset="-122"/>
+                <a:cs typeface="Arial" pitchFamily="34" charset="-120"/>
+              </a:rPr>
+              <a:t>If a known substance has Rf = 0.50, substance A is a match</a:t>
+            </a:r>
+            <a:endParaRPr lang="en-US" sz="1400" dirty="0"/>
+          </a:p>
+        </p:txBody>
+      </p:sp>
+      <p:sp>
+        <p:nvSpPr>
+          <p:cNvPr id="18" name="Shape 16"/>
+          <p:cNvSpPr/>
+          <p:nvPr/>
+        </p:nvSpPr>
+        <p:spPr>
+          <a:xfrm>
+            <a:off x="0" y="6492240"/>
+            <a:ext cx="12188952" cy="365760"/>
+          </a:xfrm>
+          <a:prstGeom prst="rect">
+            <a:avLst/>
+          </a:prstGeom>
+          <a:solidFill>
+            <a:srgbClr val="1B2A4A"/>
+          </a:solidFill>
+          <a:ln/>
+        </p:spPr>
+      </p:sp>
+      <p:sp>
+        <p:nvSpPr>
+          <p:cNvPr id="19" name="Text 17"/>
+          <p:cNvSpPr/>
+          <p:nvPr/>
+        </p:nvSpPr>
+        <p:spPr>
+          <a:xfrm>
+            <a:off x="10058400" y="6537960"/>
+            <a:ext cx="1828800" cy="274320"/>
+          </a:xfrm>
+          <a:prstGeom prst="rect">
+            <a:avLst/>
+          </a:prstGeom>
+          <a:noFill/>
+          <a:ln/>
+        </p:spPr>
+        <p:txBody>
+          <a:bodyPr wrap="square" rtlCol="0" anchor="ctr"/>
+          <a:lstStyle/>
+          <a:p>
+            <a:pPr algn="r" indent="0" marL="0">
+              <a:buNone/>
+            </a:pPr>
+            <a:r>
+              <a:rPr lang="en-US" sz="900" dirty="0">
+                <a:solidFill>
+                  <a:srgbClr val="E9C46A"/>
+                </a:solidFill>
+                <a:latin typeface="Arial" pitchFamily="34" charset="0"/>
+                <a:ea typeface="Arial" pitchFamily="34" charset="-122"/>
+                <a:cs typeface="Arial" pitchFamily="34" charset="-120"/>
+              </a:rPr>
+              <a:t>mrzocchi.com</a:t>
+            </a:r>
+            <a:endParaRPr lang="en-US" sz="900" dirty="0"/>
           </a:p>
         </p:txBody>
       </p:sp>
@@ -2607,13 +3643,6 @@
 <file path=ppt/slides/slide5.xml><?xml version="1.0" encoding="utf-8"?>
 <p:sld xmlns:a="http://schemas.openxmlformats.org/drawingml/2006/main" xmlns:r="http://schemas.openxmlformats.org/officeDocument/2006/relationships" xmlns:p="http://schemas.openxmlformats.org/presentationml/2006/main">
   <p:cSld name="Slide 5">
-    <p:bg>
-      <p:bgPr>
-        <a:solidFill>
-          <a:srgbClr val="FAF8F5"/>
-        </a:solidFill>
-      </p:bgPr>
-    </p:bg>
     <p:spTree>
       <p:nvGrpSpPr>
         <p:cNvPr id="1" name=""/>
@@ -2637,133 +3666,93 @@
         <p:spPr>
           <a:xfrm>
             <a:off x="0" y="0"/>
-            <a:ext cx="9144000" cy="822960"/>
-          </a:xfrm>
-          <a:prstGeom prst="rect">
-            <a:avLst/>
-          </a:prstGeom>
-          <a:solidFill>
-            <a:srgbClr val="FFFFFF"/>
-          </a:solidFill>
-          <a:ln/>
-        </p:spPr>
-      </p:sp>
-      <p:sp>
-        <p:nvSpPr>
-          <p:cNvPr id="3" name="Shape 1"/>
-          <p:cNvSpPr/>
-          <p:nvPr/>
-        </p:nvSpPr>
-        <p:spPr>
-          <a:xfrm>
-            <a:off x="0" y="795528"/>
-            <a:ext cx="9144000" cy="27432"/>
-          </a:xfrm>
-          <a:prstGeom prst="rect">
-            <a:avLst/>
-          </a:prstGeom>
-          <a:solidFill>
-            <a:srgbClr val="C8372D"/>
-          </a:solidFill>
-          <a:ln/>
-        </p:spPr>
-      </p:sp>
-      <p:sp>
-        <p:nvSpPr>
-          <p:cNvPr id="4" name="Text 2"/>
-          <p:cNvSpPr/>
-          <p:nvPr/>
-        </p:nvSpPr>
-        <p:spPr>
-          <a:xfrm>
-            <a:off x="640080" y="91440"/>
-            <a:ext cx="7863840" cy="640080"/>
-          </a:xfrm>
-          <a:prstGeom prst="rect">
-            <a:avLst/>
-          </a:prstGeom>
-          <a:noFill/>
-          <a:ln/>
-        </p:spPr>
-        <p:txBody>
-          <a:bodyPr wrap="square" lIns="0" tIns="0" rIns="0" bIns="0" rtlCol="0" anchor="ctr"/>
+            <a:ext cx="12188952" cy="1097280"/>
+          </a:xfrm>
+          <a:prstGeom prst="rect">
+            <a:avLst/>
+          </a:prstGeom>
+          <a:solidFill>
+            <a:srgbClr val="1B2A4A"/>
+          </a:solidFill>
+          <a:ln/>
+        </p:spPr>
+      </p:sp>
+      <p:sp>
+        <p:nvSpPr>
+          <p:cNvPr id="3" name="Text 1"/>
+          <p:cNvSpPr/>
+          <p:nvPr/>
+        </p:nvSpPr>
+        <p:spPr>
+          <a:xfrm>
+            <a:off x="548640" y="182880"/>
+            <a:ext cx="10972800" cy="731520"/>
+          </a:xfrm>
+          <a:prstGeom prst="rect">
+            <a:avLst/>
+          </a:prstGeom>
+          <a:noFill/>
+          <a:ln/>
+        </p:spPr>
+        <p:txBody>
+          <a:bodyPr wrap="square" rtlCol="0" anchor="ctr"/>
           <a:lstStyle/>
           <a:p>
             <a:pPr indent="0" marL="0">
               <a:buNone/>
             </a:pPr>
             <a:r>
-              <a:rPr lang="en-US" sz="2200" b="1" dirty="0">
-                <a:solidFill>
-                  <a:srgbClr val="1B2A4A"/>
+              <a:rPr lang="en-US" sz="2600" b="1" dirty="0">
+                <a:solidFill>
+                  <a:srgbClr val="FFFFFF"/>
                 </a:solidFill>
                 <a:latin typeface="Georgia" pitchFamily="34" charset="0"/>
                 <a:ea typeface="Georgia" pitchFamily="34" charset="-122"/>
                 <a:cs typeface="Georgia" pitchFamily="34" charset="-120"/>
               </a:rPr>
-              <a:t>Real-World Chromatography</a:t>
-            </a:r>
-            <a:endParaRPr lang="en-US" sz="2200" dirty="0"/>
-          </a:p>
-        </p:txBody>
-      </p:sp>
-      <p:sp>
-        <p:nvSpPr>
-          <p:cNvPr id="5" name="Shape 3"/>
-          <p:cNvSpPr/>
-          <p:nvPr/>
-        </p:nvSpPr>
-        <p:spPr>
-          <a:xfrm>
-            <a:off x="457200" y="1005840"/>
-            <a:ext cx="3931920" cy="3657600"/>
-          </a:xfrm>
-          <a:prstGeom prst="rect">
-            <a:avLst/>
+              <a:t>Interpreting Chromatograms</a:t>
+            </a:r>
+            <a:endParaRPr lang="en-US" sz="2600" dirty="0"/>
+          </a:p>
+        </p:txBody>
+      </p:sp>
+      <p:sp>
+        <p:nvSpPr>
+          <p:cNvPr id="4" name="Shape 2"/>
+          <p:cNvSpPr/>
+          <p:nvPr/>
+        </p:nvSpPr>
+        <p:spPr>
+          <a:xfrm>
+            <a:off x="731520" y="1371600"/>
+            <a:ext cx="10515600" cy="640080"/>
+          </a:xfrm>
+          <a:prstGeom prst="roundRect">
+            <a:avLst>
+              <a:gd name="adj" fmla="val 14286"/>
+            </a:avLst>
           </a:prstGeom>
           <a:solidFill>
             <a:srgbClr val="FFFFFF"/>
           </a:solidFill>
-          <a:ln/>
-          <a:effectLst>
-            <a:outerShdw sx="100000" sy="100000" kx="0" ky="0" algn="bl" rotWithShape="0" blurRad="76200" dist="25400" dir="8100000">
-              <a:srgbClr val="000000">
-                <a:alpha val="12000"/>
-              </a:srgbClr>
-            </a:outerShdw>
-          </a:effectLst>
-        </p:spPr>
-      </p:sp>
-      <p:sp>
-        <p:nvSpPr>
-          <p:cNvPr id="6" name="Shape 4"/>
-          <p:cNvSpPr/>
-          <p:nvPr/>
-        </p:nvSpPr>
-        <p:spPr>
-          <a:xfrm>
-            <a:off x="457200" y="1005840"/>
-            <a:ext cx="3931920" cy="64008"/>
-          </a:xfrm>
-          <a:prstGeom prst="rect">
-            <a:avLst/>
-          </a:prstGeom>
-          <a:solidFill>
-            <a:srgbClr val="C8372D"/>
-          </a:solidFill>
-          <a:ln/>
-        </p:spPr>
-      </p:sp>
-      <p:sp>
-        <p:nvSpPr>
-          <p:cNvPr id="7" name="Text 5"/>
-          <p:cNvSpPr/>
-          <p:nvPr/>
-        </p:nvSpPr>
-        <p:spPr>
-          <a:xfrm>
-            <a:off x="640080" y="1188720"/>
-            <a:ext cx="3566160" cy="457200"/>
+          <a:ln w="19050">
+            <a:solidFill>
+              <a:srgbClr val="C8372D"/>
+            </a:solidFill>
+            <a:prstDash val="solid"/>
+          </a:ln>
+        </p:spPr>
+      </p:sp>
+      <p:sp>
+        <p:nvSpPr>
+          <p:cNvPr id="5" name="Text 3"/>
+          <p:cNvSpPr/>
+          <p:nvPr/>
+        </p:nvSpPr>
+        <p:spPr>
+          <a:xfrm>
+            <a:off x="1005840" y="1417320"/>
+            <a:ext cx="3657600" cy="548640"/>
           </a:xfrm>
           <a:prstGeom prst="rect">
             <a:avLst/>
@@ -2779,19 +3768,85 @@
               <a:buNone/>
             </a:pPr>
             <a:r>
-              <a:rPr lang="en-US" sz="1600" b="1" dirty="0">
-                <a:solidFill>
-                  <a:srgbClr val="C8372D"/>
-                </a:solidFill>
-                <a:latin typeface="Calibri" pitchFamily="34" charset="0"/>
-                <a:ea typeface="Calibri" pitchFamily="34" charset="-122"/>
-                <a:cs typeface="Calibri" pitchFamily="34" charset="-120"/>
-              </a:rPr>
-              <a:t>Forensics &amp; Crime</a:t>
-            </a:r>
-            <a:endParaRPr lang="en-US" sz="1600" dirty="0"/>
-          </a:p>
-        </p:txBody>
+              <a:rPr lang="en-US" sz="1500" b="1" dirty="0">
+                <a:solidFill>
+                  <a:srgbClr val="1B2A4A"/>
+                </a:solidFill>
+                <a:latin typeface="Arial" pitchFamily="34" charset="0"/>
+                <a:ea typeface="Arial" pitchFamily="34" charset="-122"/>
+                <a:cs typeface="Arial" pitchFamily="34" charset="-120"/>
+              </a:rPr>
+              <a:t>One spot</a:t>
+            </a:r>
+            <a:endParaRPr lang="en-US" sz="1500" dirty="0"/>
+          </a:p>
+        </p:txBody>
+      </p:sp>
+      <p:sp>
+        <p:nvSpPr>
+          <p:cNvPr id="6" name="Text 4"/>
+          <p:cNvSpPr/>
+          <p:nvPr/>
+        </p:nvSpPr>
+        <p:spPr>
+          <a:xfrm>
+            <a:off x="4754880" y="1417320"/>
+            <a:ext cx="6217920" cy="548640"/>
+          </a:xfrm>
+          <a:prstGeom prst="rect">
+            <a:avLst/>
+          </a:prstGeom>
+          <a:noFill/>
+          <a:ln/>
+        </p:spPr>
+        <p:txBody>
+          <a:bodyPr wrap="square" rtlCol="0" anchor="ctr"/>
+          <a:lstStyle/>
+          <a:p>
+            <a:pPr indent="0" marL="0">
+              <a:buNone/>
+            </a:pPr>
+            <a:r>
+              <a:rPr lang="en-US" sz="1400" dirty="0">
+                <a:solidFill>
+                  <a:srgbClr val="6B6660"/>
+                </a:solidFill>
+                <a:latin typeface="Arial" pitchFamily="34" charset="0"/>
+                <a:ea typeface="Arial" pitchFamily="34" charset="-122"/>
+                <a:cs typeface="Arial" pitchFamily="34" charset="-120"/>
+              </a:rPr>
+              <a:t>Substance is pure (only one component)</a:t>
+            </a:r>
+            <a:endParaRPr lang="en-US" sz="1400" dirty="0"/>
+          </a:p>
+        </p:txBody>
+      </p:sp>
+      <p:sp>
+        <p:nvSpPr>
+          <p:cNvPr id="7" name="Shape 5"/>
+          <p:cNvSpPr/>
+          <p:nvPr/>
+        </p:nvSpPr>
+        <p:spPr>
+          <a:xfrm>
+            <a:off x="731520" y="2148840"/>
+            <a:ext cx="10515600" cy="640080"/>
+          </a:xfrm>
+          <a:prstGeom prst="roundRect">
+            <a:avLst>
+              <a:gd name="adj" fmla="val 14286"/>
+            </a:avLst>
+          </a:prstGeom>
+          <a:solidFill>
+            <a:srgbClr val="FFFFFF"/>
+          </a:solidFill>
+          <a:ln w="19050">
+            <a:solidFill>
+              <a:srgbClr val="C8372D"/>
+            </a:solidFill>
+            <a:prstDash val="solid"/>
+          </a:ln>
+        </p:spPr>
       </p:sp>
       <p:sp>
         <p:nvSpPr>
@@ -2801,99 +3856,386 @@
         </p:nvSpPr>
         <p:spPr>
           <a:xfrm>
-            <a:off x="640080" y="1691640"/>
-            <a:ext cx="3566160" cy="2743200"/>
-          </a:xfrm>
-          <a:prstGeom prst="rect">
-            <a:avLst/>
-          </a:prstGeom>
-          <a:noFill/>
-          <a:ln/>
-        </p:spPr>
-        <p:txBody>
-          <a:bodyPr wrap="square" rtlCol="0" anchor="ctr"/>
-          <a:lstStyle/>
-          <a:p>
-            <a:pPr marL="342900" indent="-342900">
-              <a:spcAft>
-                <a:spcPts val="600"/>
-              </a:spcAft>
-              <a:buSzPct val="100000"/>
-              <a:buChar char="•"/>
+            <a:off x="1005840" y="2194560"/>
+            <a:ext cx="3657600" cy="548640"/>
+          </a:xfrm>
+          <a:prstGeom prst="rect">
+            <a:avLst/>
+          </a:prstGeom>
+          <a:noFill/>
+          <a:ln/>
+        </p:spPr>
+        <p:txBody>
+          <a:bodyPr wrap="square" rtlCol="0" anchor="ctr"/>
+          <a:lstStyle/>
+          <a:p>
+            <a:pPr indent="0" marL="0">
+              <a:buNone/>
+            </a:pPr>
+            <a:r>
+              <a:rPr lang="en-US" sz="1500" b="1" dirty="0">
+                <a:solidFill>
+                  <a:srgbClr val="1B2A4A"/>
+                </a:solidFill>
+                <a:latin typeface="Arial" pitchFamily="34" charset="0"/>
+                <a:ea typeface="Arial" pitchFamily="34" charset="-122"/>
+                <a:cs typeface="Arial" pitchFamily="34" charset="-120"/>
+              </a:rPr>
+              <a:t>Multiple spots</a:t>
+            </a:r>
+            <a:endParaRPr lang="en-US" sz="1500" dirty="0"/>
+          </a:p>
+        </p:txBody>
+      </p:sp>
+      <p:sp>
+        <p:nvSpPr>
+          <p:cNvPr id="9" name="Text 7"/>
+          <p:cNvSpPr/>
+          <p:nvPr/>
+        </p:nvSpPr>
+        <p:spPr>
+          <a:xfrm>
+            <a:off x="4754880" y="2194560"/>
+            <a:ext cx="6217920" cy="548640"/>
+          </a:xfrm>
+          <a:prstGeom prst="rect">
+            <a:avLst/>
+          </a:prstGeom>
+          <a:noFill/>
+          <a:ln/>
+        </p:spPr>
+        <p:txBody>
+          <a:bodyPr wrap="square" rtlCol="0" anchor="ctr"/>
+          <a:lstStyle/>
+          <a:p>
+            <a:pPr indent="0" marL="0">
+              <a:buNone/>
             </a:pPr>
             <a:r>
               <a:rPr lang="en-US" sz="1400" dirty="0">
                 <a:solidFill>
-                  <a:srgbClr val="3D3A36"/>
-                </a:solidFill>
-                <a:latin typeface="Calibri" pitchFamily="34" charset="0"/>
-                <a:ea typeface="Calibri" pitchFamily="34" charset="-122"/>
-                <a:cs typeface="Calibri" pitchFamily="34" charset="-120"/>
-              </a:rPr>
-              <a:t>Comparing ink samples in forged documents.</a:t>
+                  <a:srgbClr val="6B6660"/>
+                </a:solidFill>
+                <a:latin typeface="Arial" pitchFamily="34" charset="0"/>
+                <a:ea typeface="Arial" pitchFamily="34" charset="-122"/>
+                <a:cs typeface="Arial" pitchFamily="34" charset="-120"/>
+              </a:rPr>
+              <a:t>Substance is a mixture (several components)</a:t>
             </a:r>
             <a:endParaRPr lang="en-US" sz="1400" dirty="0"/>
           </a:p>
-          <a:p>
-            <a:pPr marL="342900" indent="-342900">
-              <a:spcAft>
-                <a:spcPts val="600"/>
-              </a:spcAft>
-              <a:buSzPct val="100000"/>
-              <a:buChar char="•"/>
+        </p:txBody>
+      </p:sp>
+      <p:sp>
+        <p:nvSpPr>
+          <p:cNvPr id="10" name="Shape 8"/>
+          <p:cNvSpPr/>
+          <p:nvPr/>
+        </p:nvSpPr>
+        <p:spPr>
+          <a:xfrm>
+            <a:off x="731520" y="2926080"/>
+            <a:ext cx="10515600" cy="640080"/>
+          </a:xfrm>
+          <a:prstGeom prst="roundRect">
+            <a:avLst>
+              <a:gd name="adj" fmla="val 14286"/>
+            </a:avLst>
+          </a:prstGeom>
+          <a:solidFill>
+            <a:srgbClr val="FFFFFF"/>
+          </a:solidFill>
+          <a:ln w="19050">
+            <a:solidFill>
+              <a:srgbClr val="C8372D"/>
+            </a:solidFill>
+            <a:prstDash val="solid"/>
+          </a:ln>
+        </p:spPr>
+      </p:sp>
+      <p:sp>
+        <p:nvSpPr>
+          <p:cNvPr id="11" name="Text 9"/>
+          <p:cNvSpPr/>
+          <p:nvPr/>
+        </p:nvSpPr>
+        <p:spPr>
+          <a:xfrm>
+            <a:off x="1005840" y="2971800"/>
+            <a:ext cx="3657600" cy="548640"/>
+          </a:xfrm>
+          <a:prstGeom prst="rect">
+            <a:avLst/>
+          </a:prstGeom>
+          <a:noFill/>
+          <a:ln/>
+        </p:spPr>
+        <p:txBody>
+          <a:bodyPr wrap="square" rtlCol="0" anchor="ctr"/>
+          <a:lstStyle/>
+          <a:p>
+            <a:pPr indent="0" marL="0">
+              <a:buNone/>
+            </a:pPr>
+            <a:r>
+              <a:rPr lang="en-US" sz="1500" b="1" dirty="0">
+                <a:solidFill>
+                  <a:srgbClr val="1B2A4A"/>
+                </a:solidFill>
+                <a:latin typeface="Arial" pitchFamily="34" charset="0"/>
+                <a:ea typeface="Arial" pitchFamily="34" charset="-122"/>
+                <a:cs typeface="Arial" pitchFamily="34" charset="-120"/>
+              </a:rPr>
+              <a:t>Matching Rf values</a:t>
+            </a:r>
+            <a:endParaRPr lang="en-US" sz="1500" dirty="0"/>
+          </a:p>
+        </p:txBody>
+      </p:sp>
+      <p:sp>
+        <p:nvSpPr>
+          <p:cNvPr id="12" name="Text 10"/>
+          <p:cNvSpPr/>
+          <p:nvPr/>
+        </p:nvSpPr>
+        <p:spPr>
+          <a:xfrm>
+            <a:off x="4754880" y="2971800"/>
+            <a:ext cx="6217920" cy="548640"/>
+          </a:xfrm>
+          <a:prstGeom prst="rect">
+            <a:avLst/>
+          </a:prstGeom>
+          <a:noFill/>
+          <a:ln/>
+        </p:spPr>
+        <p:txBody>
+          <a:bodyPr wrap="square" rtlCol="0" anchor="ctr"/>
+          <a:lstStyle/>
+          <a:p>
+            <a:pPr indent="0" marL="0">
+              <a:buNone/>
             </a:pPr>
             <a:r>
               <a:rPr lang="en-US" sz="1400" dirty="0">
                 <a:solidFill>
-                  <a:srgbClr val="3D3A36"/>
-                </a:solidFill>
-                <a:latin typeface="Calibri" pitchFamily="34" charset="0"/>
-                <a:ea typeface="Calibri" pitchFamily="34" charset="-122"/>
-                <a:cs typeface="Calibri" pitchFamily="34" charset="-120"/>
-              </a:rPr>
-              <a:t>Detecting doping in Korean/German athletes' urine.</a:t>
+                  <a:srgbClr val="6B6660"/>
+                </a:solidFill>
+                <a:latin typeface="Arial" pitchFamily="34" charset="0"/>
+                <a:ea typeface="Arial" pitchFamily="34" charset="-122"/>
+                <a:cs typeface="Arial" pitchFamily="34" charset="-120"/>
+              </a:rPr>
+              <a:t>Two substances with same Rf are the same compound</a:t>
             </a:r>
             <a:endParaRPr lang="en-US" sz="1400" dirty="0"/>
           </a:p>
-          <a:p>
-            <a:pPr marL="342900" indent="-342900">
-              <a:spcAft>
-                <a:spcPts val="600"/>
-              </a:spcAft>
-              <a:buSzPct val="100000"/>
-              <a:buChar char="•"/>
+        </p:txBody>
+      </p:sp>
+      <p:sp>
+        <p:nvSpPr>
+          <p:cNvPr id="13" name="Shape 11"/>
+          <p:cNvSpPr/>
+          <p:nvPr/>
+        </p:nvSpPr>
+        <p:spPr>
+          <a:xfrm>
+            <a:off x="731520" y="3703320"/>
+            <a:ext cx="10515600" cy="640080"/>
+          </a:xfrm>
+          <a:prstGeom prst="roundRect">
+            <a:avLst>
+              <a:gd name="adj" fmla="val 14286"/>
+            </a:avLst>
+          </a:prstGeom>
+          <a:solidFill>
+            <a:srgbClr val="FFFFFF"/>
+          </a:solidFill>
+          <a:ln w="19050">
+            <a:solidFill>
+              <a:srgbClr val="C8372D"/>
+            </a:solidFill>
+            <a:prstDash val="solid"/>
+          </a:ln>
+        </p:spPr>
+      </p:sp>
+      <p:sp>
+        <p:nvSpPr>
+          <p:cNvPr id="14" name="Text 12"/>
+          <p:cNvSpPr/>
+          <p:nvPr/>
+        </p:nvSpPr>
+        <p:spPr>
+          <a:xfrm>
+            <a:off x="1005840" y="3749040"/>
+            <a:ext cx="3657600" cy="548640"/>
+          </a:xfrm>
+          <a:prstGeom prst="rect">
+            <a:avLst/>
+          </a:prstGeom>
+          <a:noFill/>
+          <a:ln/>
+        </p:spPr>
+        <p:txBody>
+          <a:bodyPr wrap="square" rtlCol="0" anchor="ctr"/>
+          <a:lstStyle/>
+          <a:p>
+            <a:pPr indent="0" marL="0">
+              <a:buNone/>
+            </a:pPr>
+            <a:r>
+              <a:rPr lang="en-US" sz="1500" b="1" dirty="0">
+                <a:solidFill>
+                  <a:srgbClr val="1B2A4A"/>
+                </a:solidFill>
+                <a:latin typeface="Arial" pitchFamily="34" charset="0"/>
+                <a:ea typeface="Arial" pitchFamily="34" charset="-122"/>
+                <a:cs typeface="Arial" pitchFamily="34" charset="-120"/>
+              </a:rPr>
+              <a:t>Pencil baseline</a:t>
+            </a:r>
+            <a:endParaRPr lang="en-US" sz="1500" dirty="0"/>
+          </a:p>
+        </p:txBody>
+      </p:sp>
+      <p:sp>
+        <p:nvSpPr>
+          <p:cNvPr id="15" name="Text 13"/>
+          <p:cNvSpPr/>
+          <p:nvPr/>
+        </p:nvSpPr>
+        <p:spPr>
+          <a:xfrm>
+            <a:off x="4754880" y="3749040"/>
+            <a:ext cx="6217920" cy="548640"/>
+          </a:xfrm>
+          <a:prstGeom prst="rect">
+            <a:avLst/>
+          </a:prstGeom>
+          <a:noFill/>
+          <a:ln/>
+        </p:spPr>
+        <p:txBody>
+          <a:bodyPr wrap="square" rtlCol="0" anchor="ctr"/>
+          <a:lstStyle/>
+          <a:p>
+            <a:pPr indent="0" marL="0">
+              <a:buNone/>
             </a:pPr>
             <a:r>
               <a:rPr lang="en-US" sz="1400" dirty="0">
                 <a:solidFill>
-                  <a:srgbClr val="3D3A36"/>
-                </a:solidFill>
-                <a:latin typeface="Calibri" pitchFamily="34" charset="0"/>
-                <a:ea typeface="Calibri" pitchFamily="34" charset="-122"/>
-                <a:cs typeface="Calibri" pitchFamily="34" charset="-120"/>
-              </a:rPr>
-              <a:t>Analysing drugs and poisons at crime scenes.</a:t>
+                  <a:srgbClr val="6B6660"/>
+                </a:solidFill>
+                <a:latin typeface="Arial" pitchFamily="34" charset="0"/>
+                <a:ea typeface="Arial" pitchFamily="34" charset="-122"/>
+                <a:cs typeface="Arial" pitchFamily="34" charset="-120"/>
+              </a:rPr>
+              <a:t>Pencil won't dissolve — pen ink would separate</a:t>
             </a:r>
             <a:endParaRPr lang="en-US" sz="1400" dirty="0"/>
           </a:p>
-          <a:p>
-            <a:pPr marL="342900" indent="-342900">
-              <a:spcAft>
-                <a:spcPts val="600"/>
-              </a:spcAft>
-              <a:buSzPct val="100000"/>
-              <a:buChar char="•"/>
+        </p:txBody>
+      </p:sp>
+      <p:sp>
+        <p:nvSpPr>
+          <p:cNvPr id="16" name="Shape 14"/>
+          <p:cNvSpPr/>
+          <p:nvPr/>
+        </p:nvSpPr>
+        <p:spPr>
+          <a:xfrm>
+            <a:off x="731520" y="4480560"/>
+            <a:ext cx="10515600" cy="640080"/>
+          </a:xfrm>
+          <a:prstGeom prst="roundRect">
+            <a:avLst>
+              <a:gd name="adj" fmla="val 14286"/>
+            </a:avLst>
+          </a:prstGeom>
+          <a:solidFill>
+            <a:srgbClr val="FFFFFF"/>
+          </a:solidFill>
+          <a:ln w="19050">
+            <a:solidFill>
+              <a:srgbClr val="C8372D"/>
+            </a:solidFill>
+            <a:prstDash val="solid"/>
+          </a:ln>
+        </p:spPr>
+      </p:sp>
+      <p:sp>
+        <p:nvSpPr>
+          <p:cNvPr id="17" name="Text 15"/>
+          <p:cNvSpPr/>
+          <p:nvPr/>
+        </p:nvSpPr>
+        <p:spPr>
+          <a:xfrm>
+            <a:off x="1005840" y="4526280"/>
+            <a:ext cx="3657600" cy="548640"/>
+          </a:xfrm>
+          <a:prstGeom prst="rect">
+            <a:avLst/>
+          </a:prstGeom>
+          <a:noFill/>
+          <a:ln/>
+        </p:spPr>
+        <p:txBody>
+          <a:bodyPr wrap="square" rtlCol="0" anchor="ctr"/>
+          <a:lstStyle/>
+          <a:p>
+            <a:pPr indent="0" marL="0">
+              <a:buNone/>
+            </a:pPr>
+            <a:r>
+              <a:rPr lang="en-US" sz="1500" b="1" dirty="0">
+                <a:solidFill>
+                  <a:srgbClr val="1B2A4A"/>
+                </a:solidFill>
+                <a:latin typeface="Arial" pitchFamily="34" charset="0"/>
+                <a:ea typeface="Arial" pitchFamily="34" charset="-122"/>
+                <a:cs typeface="Arial" pitchFamily="34" charset="-120"/>
+              </a:rPr>
+              <a:t>No lid on beaker</a:t>
+            </a:r>
+            <a:endParaRPr lang="en-US" sz="1500" dirty="0"/>
+          </a:p>
+        </p:txBody>
+      </p:sp>
+      <p:sp>
+        <p:nvSpPr>
+          <p:cNvPr id="18" name="Text 16"/>
+          <p:cNvSpPr/>
+          <p:nvPr/>
+        </p:nvSpPr>
+        <p:spPr>
+          <a:xfrm>
+            <a:off x="4754880" y="4526280"/>
+            <a:ext cx="6217920" cy="548640"/>
+          </a:xfrm>
+          <a:prstGeom prst="rect">
+            <a:avLst/>
+          </a:prstGeom>
+          <a:noFill/>
+          <a:ln/>
+        </p:spPr>
+        <p:txBody>
+          <a:bodyPr wrap="square" rtlCol="0" anchor="ctr"/>
+          <a:lstStyle/>
+          <a:p>
+            <a:pPr indent="0" marL="0">
+              <a:buNone/>
             </a:pPr>
             <a:r>
               <a:rPr lang="en-US" sz="1400" dirty="0">
                 <a:solidFill>
-                  <a:srgbClr val="3D3A36"/>
-                </a:solidFill>
-                <a:latin typeface="Calibri" pitchFamily="34" charset="0"/>
-                <a:ea typeface="Calibri" pitchFamily="34" charset="-122"/>
-                <a:cs typeface="Calibri" pitchFamily="34" charset="-120"/>
-              </a:rPr>
-              <a:t>Identifying dyes in art forgeries.</a:t>
+                  <a:srgbClr val="6B6660"/>
+                </a:solidFill>
+                <a:latin typeface="Arial" pitchFamily="34" charset="0"/>
+                <a:ea typeface="Arial" pitchFamily="34" charset="-122"/>
+                <a:cs typeface="Arial" pitchFamily="34" charset="-120"/>
+              </a:rPr>
+              <a:t>Solvent evaporates — always use a lid</a:t>
             </a:r>
             <a:endParaRPr lang="en-US" sz="1400" dirty="0"/>
           </a:p>
@@ -2901,193 +4243,60 @@
       </p:sp>
       <p:sp>
         <p:nvSpPr>
-          <p:cNvPr id="9" name="Shape 7"/>
-          <p:cNvSpPr/>
-          <p:nvPr/>
-        </p:nvSpPr>
-        <p:spPr>
-          <a:xfrm>
-            <a:off x="4754880" y="1005840"/>
-            <a:ext cx="3931920" cy="3657600"/>
-          </a:xfrm>
-          <a:prstGeom prst="rect">
-            <a:avLst/>
-          </a:prstGeom>
-          <a:solidFill>
-            <a:srgbClr val="FFFFFF"/>
-          </a:solidFill>
-          <a:ln/>
-          <a:effectLst>
-            <a:outerShdw sx="100000" sy="100000" kx="0" ky="0" algn="bl" rotWithShape="0" blurRad="76200" dist="25400" dir="8100000">
-              <a:srgbClr val="000000">
-                <a:alpha val="12000"/>
-              </a:srgbClr>
-            </a:outerShdw>
-          </a:effectLst>
-        </p:spPr>
-      </p:sp>
-      <p:sp>
-        <p:nvSpPr>
-          <p:cNvPr id="10" name="Shape 8"/>
-          <p:cNvSpPr/>
-          <p:nvPr/>
-        </p:nvSpPr>
-        <p:spPr>
-          <a:xfrm>
-            <a:off x="4754880" y="1005840"/>
-            <a:ext cx="3931920" cy="64008"/>
-          </a:xfrm>
-          <a:prstGeom prst="rect">
-            <a:avLst/>
-          </a:prstGeom>
-          <a:solidFill>
-            <a:srgbClr val="E9C46A"/>
-          </a:solidFill>
-          <a:ln/>
-        </p:spPr>
-      </p:sp>
-      <p:sp>
-        <p:nvSpPr>
-          <p:cNvPr id="11" name="Text 9"/>
-          <p:cNvSpPr/>
-          <p:nvPr/>
-        </p:nvSpPr>
-        <p:spPr>
-          <a:xfrm>
-            <a:off x="4937760" y="1188720"/>
-            <a:ext cx="3566160" cy="457200"/>
-          </a:xfrm>
-          <a:prstGeom prst="rect">
-            <a:avLst/>
-          </a:prstGeom>
-          <a:noFill/>
-          <a:ln/>
-        </p:spPr>
-        <p:txBody>
-          <a:bodyPr wrap="square" rtlCol="0" anchor="ctr"/>
-          <a:lstStyle/>
-          <a:p>
-            <a:pPr indent="0" marL="0">
-              <a:buNone/>
-            </a:pPr>
-            <a:r>
-              <a:rPr lang="en-US" sz="1600" b="1" dirty="0">
+          <p:cNvPr id="19" name="Shape 17"/>
+          <p:cNvSpPr/>
+          <p:nvPr/>
+        </p:nvSpPr>
+        <p:spPr>
+          <a:xfrm>
+            <a:off x="0" y="6492240"/>
+            <a:ext cx="12188952" cy="365760"/>
+          </a:xfrm>
+          <a:prstGeom prst="rect">
+            <a:avLst/>
+          </a:prstGeom>
+          <a:solidFill>
+            <a:srgbClr val="1B2A4A"/>
+          </a:solidFill>
+          <a:ln/>
+        </p:spPr>
+      </p:sp>
+      <p:sp>
+        <p:nvSpPr>
+          <p:cNvPr id="20" name="Text 18"/>
+          <p:cNvSpPr/>
+          <p:nvPr/>
+        </p:nvSpPr>
+        <p:spPr>
+          <a:xfrm>
+            <a:off x="10058400" y="6537960"/>
+            <a:ext cx="1828800" cy="274320"/>
+          </a:xfrm>
+          <a:prstGeom prst="rect">
+            <a:avLst/>
+          </a:prstGeom>
+          <a:noFill/>
+          <a:ln/>
+        </p:spPr>
+        <p:txBody>
+          <a:bodyPr wrap="square" rtlCol="0" anchor="ctr"/>
+          <a:lstStyle/>
+          <a:p>
+            <a:pPr algn="r" indent="0" marL="0">
+              <a:buNone/>
+            </a:pPr>
+            <a:r>
+              <a:rPr lang="en-US" sz="900" dirty="0">
                 <a:solidFill>
                   <a:srgbClr val="E9C46A"/>
                 </a:solidFill>
-                <a:latin typeface="Calibri" pitchFamily="34" charset="0"/>
-                <a:ea typeface="Calibri" pitchFamily="34" charset="-122"/>
-                <a:cs typeface="Calibri" pitchFamily="34" charset="-120"/>
-              </a:rPr>
-              <a:t>Food &amp; Industry</a:t>
-            </a:r>
-            <a:endParaRPr lang="en-US" sz="1600" dirty="0"/>
-          </a:p>
-        </p:txBody>
-      </p:sp>
-      <p:sp>
-        <p:nvSpPr>
-          <p:cNvPr id="12" name="Text 10"/>
-          <p:cNvSpPr/>
-          <p:nvPr/>
-        </p:nvSpPr>
-        <p:spPr>
-          <a:xfrm>
-            <a:off x="4937760" y="1691640"/>
-            <a:ext cx="3566160" cy="2743200"/>
-          </a:xfrm>
-          <a:prstGeom prst="rect">
-            <a:avLst/>
-          </a:prstGeom>
-          <a:noFill/>
-          <a:ln/>
-        </p:spPr>
-        <p:txBody>
-          <a:bodyPr wrap="square" rtlCol="0" anchor="ctr"/>
-          <a:lstStyle/>
-          <a:p>
-            <a:pPr marL="342900" indent="-342900">
-              <a:spcAft>
-                <a:spcPts val="600"/>
-              </a:spcAft>
-              <a:buSzPct val="100000"/>
-              <a:buChar char="•"/>
-            </a:pPr>
-            <a:r>
-              <a:rPr lang="en-US" sz="1400" dirty="0">
-                <a:solidFill>
-                  <a:srgbClr val="3D3A36"/>
-                </a:solidFill>
-                <a:latin typeface="Calibri" pitchFamily="34" charset="0"/>
-                <a:ea typeface="Calibri" pitchFamily="34" charset="-122"/>
-                <a:cs typeface="Calibri" pitchFamily="34" charset="-120"/>
-              </a:rPr>
-              <a:t>Checking food colourings are safe (Chinese food standards).</a:t>
-            </a:r>
-            <a:endParaRPr lang="en-US" sz="1400" dirty="0"/>
-          </a:p>
-          <a:p>
-            <a:pPr marL="342900" indent="-342900">
-              <a:spcAft>
-                <a:spcPts val="600"/>
-              </a:spcAft>
-              <a:buSzPct val="100000"/>
-              <a:buChar char="•"/>
-            </a:pPr>
-            <a:r>
-              <a:rPr lang="en-US" sz="1400" dirty="0">
-                <a:solidFill>
-                  <a:srgbClr val="3D3A36"/>
-                </a:solidFill>
-                <a:latin typeface="Calibri" pitchFamily="34" charset="0"/>
-                <a:ea typeface="Calibri" pitchFamily="34" charset="-122"/>
-                <a:cs typeface="Calibri" pitchFamily="34" charset="-120"/>
-              </a:rPr>
-              <a:t>Detecting pesticides on Korean vegetables.</a:t>
-            </a:r>
-            <a:endParaRPr lang="en-US" sz="1400" dirty="0"/>
-          </a:p>
-          <a:p>
-            <a:pPr marL="342900" indent="-342900">
-              <a:spcAft>
-                <a:spcPts val="600"/>
-              </a:spcAft>
-              <a:buSzPct val="100000"/>
-              <a:buChar char="•"/>
-            </a:pPr>
-            <a:r>
-              <a:rPr lang="en-US" sz="1400" dirty="0">
-                <a:solidFill>
-                  <a:srgbClr val="3D3A36"/>
-                </a:solidFill>
-                <a:latin typeface="Calibri" pitchFamily="34" charset="0"/>
-                <a:ea typeface="Calibri" pitchFamily="34" charset="-122"/>
-                <a:cs typeface="Calibri" pitchFamily="34" charset="-120"/>
-              </a:rPr>
-              <a:t>Quality control in German pharmaceutical factories.</a:t>
-            </a:r>
-            <a:endParaRPr lang="en-US" sz="1400" dirty="0"/>
-          </a:p>
-          <a:p>
-            <a:pPr marL="342900" indent="-342900">
-              <a:spcAft>
-                <a:spcPts val="600"/>
-              </a:spcAft>
-              <a:buSzPct val="100000"/>
-              <a:buChar char="•"/>
-            </a:pPr>
-            <a:r>
-              <a:rPr lang="en-US" sz="1400" dirty="0">
-                <a:solidFill>
-                  <a:srgbClr val="3D3A36"/>
-                </a:solidFill>
-                <a:latin typeface="Calibri" pitchFamily="34" charset="0"/>
-                <a:ea typeface="Calibri" pitchFamily="34" charset="-122"/>
-                <a:cs typeface="Calibri" pitchFamily="34" charset="-120"/>
-              </a:rPr>
-              <a:t>Testing water purity in Nanjing treatment plants.</a:t>
-            </a:r>
-            <a:endParaRPr lang="en-US" sz="1400" dirty="0"/>
+                <a:latin typeface="Arial" pitchFamily="34" charset="0"/>
+                <a:ea typeface="Arial" pitchFamily="34" charset="-122"/>
+                <a:cs typeface="Arial" pitchFamily="34" charset="-120"/>
+              </a:rPr>
+              <a:t>mrzocchi.com</a:t>
+            </a:r>
+            <a:endParaRPr lang="en-US" sz="900" dirty="0"/>
           </a:p>
         </p:txBody>
       </p:sp>
@@ -3102,13 +4311,6 @@
 <file path=ppt/slides/slide6.xml><?xml version="1.0" encoding="utf-8"?>
 <p:sld xmlns:a="http://schemas.openxmlformats.org/drawingml/2006/main" xmlns:r="http://schemas.openxmlformats.org/officeDocument/2006/relationships" xmlns:p="http://schemas.openxmlformats.org/presentationml/2006/main">
   <p:cSld name="Slide 6">
-    <p:bg>
-      <p:bgPr>
-        <a:solidFill>
-          <a:srgbClr val="FAF8F5"/>
-        </a:solidFill>
-      </p:bgPr>
-    </p:bg>
     <p:spTree>
       <p:nvGrpSpPr>
         <p:cNvPr id="1" name=""/>
@@ -3132,75 +4334,82 @@
         <p:spPr>
           <a:xfrm>
             <a:off x="0" y="0"/>
-            <a:ext cx="9144000" cy="822960"/>
-          </a:xfrm>
-          <a:prstGeom prst="rect">
-            <a:avLst/>
-          </a:prstGeom>
-          <a:solidFill>
-            <a:srgbClr val="FFFFFF"/>
-          </a:solidFill>
-          <a:ln/>
-        </p:spPr>
-      </p:sp>
-      <p:sp>
-        <p:nvSpPr>
-          <p:cNvPr id="3" name="Shape 1"/>
-          <p:cNvSpPr/>
-          <p:nvPr/>
-        </p:nvSpPr>
-        <p:spPr>
-          <a:xfrm>
-            <a:off x="0" y="795528"/>
-            <a:ext cx="9144000" cy="27432"/>
-          </a:xfrm>
-          <a:prstGeom prst="rect">
-            <a:avLst/>
-          </a:prstGeom>
-          <a:solidFill>
-            <a:srgbClr val="C8372D"/>
-          </a:solidFill>
-          <a:ln/>
-        </p:spPr>
-      </p:sp>
-      <p:sp>
-        <p:nvSpPr>
-          <p:cNvPr id="4" name="Text 2"/>
-          <p:cNvSpPr/>
-          <p:nvPr/>
-        </p:nvSpPr>
-        <p:spPr>
-          <a:xfrm>
-            <a:off x="640080" y="91440"/>
-            <a:ext cx="7863840" cy="640080"/>
-          </a:xfrm>
-          <a:prstGeom prst="rect">
-            <a:avLst/>
-          </a:prstGeom>
-          <a:noFill/>
-          <a:ln/>
-        </p:spPr>
-        <p:txBody>
-          <a:bodyPr wrap="square" lIns="0" tIns="0" rIns="0" bIns="0" rtlCol="0" anchor="ctr"/>
+            <a:ext cx="12188952" cy="1097280"/>
+          </a:xfrm>
+          <a:prstGeom prst="rect">
+            <a:avLst/>
+          </a:prstGeom>
+          <a:solidFill>
+            <a:srgbClr val="1B2A4A"/>
+          </a:solidFill>
+          <a:ln/>
+        </p:spPr>
+      </p:sp>
+      <p:sp>
+        <p:nvSpPr>
+          <p:cNvPr id="3" name="Text 1"/>
+          <p:cNvSpPr/>
+          <p:nvPr/>
+        </p:nvSpPr>
+        <p:spPr>
+          <a:xfrm>
+            <a:off x="548640" y="182880"/>
+            <a:ext cx="9144000" cy="731520"/>
+          </a:xfrm>
+          <a:prstGeom prst="rect">
+            <a:avLst/>
+          </a:prstGeom>
+          <a:noFill/>
+          <a:ln/>
+        </p:spPr>
+        <p:txBody>
+          <a:bodyPr wrap="square" rtlCol="0" anchor="ctr"/>
           <a:lstStyle/>
           <a:p>
             <a:pPr indent="0" marL="0">
               <a:buNone/>
             </a:pPr>
             <a:r>
-              <a:rPr lang="en-US" sz="2200" b="1" dirty="0">
-                <a:solidFill>
-                  <a:srgbClr val="1B2A4A"/>
+              <a:rPr lang="en-US" sz="2600" b="1" dirty="0">
+                <a:solidFill>
+                  <a:srgbClr val="FFFFFF"/>
                 </a:solidFill>
                 <a:latin typeface="Georgia" pitchFamily="34" charset="0"/>
                 <a:ea typeface="Georgia" pitchFamily="34" charset="-122"/>
                 <a:cs typeface="Georgia" pitchFamily="34" charset="-120"/>
               </a:rPr>
-              <a:t>Paper vs. Other Types</a:t>
-            </a:r>
-            <a:endParaRPr lang="en-US" sz="2200" dirty="0"/>
-          </a:p>
-        </p:txBody>
+              <a:t>📖 Key Vocabulary</a:t>
+            </a:r>
+            <a:endParaRPr lang="en-US" sz="2600" dirty="0"/>
+          </a:p>
+        </p:txBody>
+      </p:sp>
+      <p:sp>
+        <p:nvSpPr>
+          <p:cNvPr id="4" name="Shape 2"/>
+          <p:cNvSpPr/>
+          <p:nvPr/>
+        </p:nvSpPr>
+        <p:spPr>
+          <a:xfrm>
+            <a:off x="548640" y="1371600"/>
+            <a:ext cx="3383280" cy="1280160"/>
+          </a:xfrm>
+          <a:prstGeom prst="roundRect">
+            <a:avLst>
+              <a:gd name="adj" fmla="val 7143"/>
+            </a:avLst>
+          </a:prstGeom>
+          <a:solidFill>
+            <a:srgbClr val="FFFFFF"/>
+          </a:solidFill>
+          <a:ln w="12700">
+            <a:solidFill>
+              <a:srgbClr val="E5E2DC"/>
+            </a:solidFill>
+            <a:prstDash val="solid"/>
+          </a:ln>
+        </p:spPr>
       </p:sp>
       <p:sp>
         <p:nvSpPr>
@@ -3210,122 +4419,657 @@
         </p:nvSpPr>
         <p:spPr>
           <a:xfrm>
-            <a:off x="640080" y="1005840"/>
-            <a:ext cx="7863840" cy="2926080"/>
-          </a:xfrm>
-          <a:prstGeom prst="rect">
-            <a:avLst/>
-          </a:prstGeom>
-          <a:noFill/>
-          <a:ln/>
-        </p:spPr>
-        <p:txBody>
-          <a:bodyPr wrap="square" rtlCol="0" anchor="ctr"/>
-          <a:lstStyle/>
-          <a:p>
-            <a:pPr marL="342900" indent="-342900">
-              <a:spcAft>
-                <a:spcPts val="800"/>
-              </a:spcAft>
-              <a:buSzPct val="100000"/>
-              <a:buChar char="•"/>
-            </a:pPr>
-            <a:r>
-              <a:rPr lang="en-US" sz="1600" dirty="0">
-                <a:solidFill>
-                  <a:srgbClr val="3D3A36"/>
-                </a:solidFill>
-                <a:latin typeface="Calibri" pitchFamily="34" charset="0"/>
-                <a:ea typeface="Calibri" pitchFamily="34" charset="-122"/>
-                <a:cs typeface="Calibri" pitchFamily="34" charset="-120"/>
-              </a:rPr>
-              <a:t>Paper chromatography: simplest, uses paper and water/ethanol.</a:t>
-            </a:r>
-            <a:endParaRPr lang="en-US" sz="1600" dirty="0"/>
-          </a:p>
-          <a:p>
-            <a:pPr marL="342900" indent="-342900">
-              <a:spcAft>
-                <a:spcPts val="800"/>
-              </a:spcAft>
-              <a:buSzPct val="100000"/>
-              <a:buChar char="•"/>
-            </a:pPr>
-            <a:r>
-              <a:rPr lang="en-US" sz="1600" dirty="0">
-                <a:solidFill>
-                  <a:srgbClr val="3D3A36"/>
-                </a:solidFill>
-                <a:latin typeface="Calibri" pitchFamily="34" charset="0"/>
-                <a:ea typeface="Calibri" pitchFamily="34" charset="-122"/>
-                <a:cs typeface="Calibri" pitchFamily="34" charset="-120"/>
-              </a:rPr>
-              <a:t>Thin-layer chromatography (TLC): faster, uses coated glass plate.</a:t>
-            </a:r>
-            <a:endParaRPr lang="en-US" sz="1600" dirty="0"/>
-          </a:p>
-          <a:p>
-            <a:pPr marL="342900" indent="-342900">
-              <a:spcAft>
-                <a:spcPts val="800"/>
-              </a:spcAft>
-              <a:buSzPct val="100000"/>
-              <a:buChar char="•"/>
-            </a:pPr>
-            <a:r>
-              <a:rPr lang="en-US" sz="1600" dirty="0">
-                <a:solidFill>
-                  <a:srgbClr val="3D3A36"/>
-                </a:solidFill>
-                <a:latin typeface="Calibri" pitchFamily="34" charset="0"/>
-                <a:ea typeface="Calibri" pitchFamily="34" charset="-122"/>
-                <a:cs typeface="Calibri" pitchFamily="34" charset="-120"/>
-              </a:rPr>
-              <a:t>Gas chromatography (GC): for gases and volatile liquids. Used in labs worldwide.</a:t>
-            </a:r>
-            <a:endParaRPr lang="en-US" sz="1600" dirty="0"/>
-          </a:p>
-          <a:p>
-            <a:pPr marL="342900" indent="-342900">
-              <a:spcAft>
-                <a:spcPts val="800"/>
-              </a:spcAft>
-              <a:buSzPct val="100000"/>
-              <a:buChar char="•"/>
-            </a:pPr>
-            <a:r>
-              <a:rPr lang="en-US" sz="1600" dirty="0">
-                <a:solidFill>
-                  <a:srgbClr val="3D3A36"/>
-                </a:solidFill>
-                <a:latin typeface="Calibri" pitchFamily="34" charset="0"/>
-                <a:ea typeface="Calibri" pitchFamily="34" charset="-122"/>
-                <a:cs typeface="Calibri" pitchFamily="34" charset="-120"/>
-              </a:rPr>
-              <a:t>HPLC: high performance, used in drug testing at the Olympics.</a:t>
-            </a:r>
-            <a:endParaRPr lang="en-US" sz="1600" dirty="0"/>
-          </a:p>
-          <a:p>
-            <a:pPr marL="342900" indent="-342900">
-              <a:spcAft>
-                <a:spcPts val="800"/>
-              </a:spcAft>
-              <a:buSzPct val="100000"/>
-              <a:buChar char="•"/>
-            </a:pPr>
-            <a:r>
-              <a:rPr lang="en-US" sz="1600" dirty="0">
-                <a:solidFill>
-                  <a:srgbClr val="3D3A36"/>
-                </a:solidFill>
-                <a:latin typeface="Calibri" pitchFamily="34" charset="0"/>
-                <a:ea typeface="Calibri" pitchFamily="34" charset="-122"/>
-                <a:cs typeface="Calibri" pitchFamily="34" charset="-120"/>
-              </a:rPr>
-              <a:t>You'll use paper chromatography in our lab investigation.</a:t>
-            </a:r>
-            <a:endParaRPr lang="en-US" sz="1600" dirty="0"/>
+            <a:off x="685800" y="1463040"/>
+            <a:ext cx="3108960" cy="365760"/>
+          </a:xfrm>
+          <a:prstGeom prst="rect">
+            <a:avLst/>
+          </a:prstGeom>
+          <a:noFill/>
+          <a:ln/>
+        </p:spPr>
+        <p:txBody>
+          <a:bodyPr wrap="square" rtlCol="0" anchor="ctr"/>
+          <a:lstStyle/>
+          <a:p>
+            <a:pPr indent="0" marL="0">
+              <a:buNone/>
+            </a:pPr>
+            <a:r>
+              <a:rPr lang="en-US" sz="1400" b="1" dirty="0">
+                <a:solidFill>
+                  <a:srgbClr val="C8372D"/>
+                </a:solidFill>
+                <a:latin typeface="Arial" pitchFamily="34" charset="0"/>
+                <a:ea typeface="Arial" pitchFamily="34" charset="-122"/>
+                <a:cs typeface="Arial" pitchFamily="34" charset="-120"/>
+              </a:rPr>
+              <a:t>Chromatography  色谱法</a:t>
+            </a:r>
+            <a:endParaRPr lang="en-US" sz="1400" dirty="0"/>
+          </a:p>
+        </p:txBody>
+      </p:sp>
+      <p:sp>
+        <p:nvSpPr>
+          <p:cNvPr id="6" name="Text 4"/>
+          <p:cNvSpPr/>
+          <p:nvPr/>
+        </p:nvSpPr>
+        <p:spPr>
+          <a:xfrm>
+            <a:off x="685800" y="1828800"/>
+            <a:ext cx="3108960" cy="731520"/>
+          </a:xfrm>
+          <a:prstGeom prst="rect">
+            <a:avLst/>
+          </a:prstGeom>
+          <a:noFill/>
+          <a:ln/>
+        </p:spPr>
+        <p:txBody>
+          <a:bodyPr wrap="square" rtlCol="0" anchor="ctr"/>
+          <a:lstStyle/>
+          <a:p>
+            <a:pPr indent="0" marL="0">
+              <a:buNone/>
+            </a:pPr>
+            <a:r>
+              <a:rPr lang="en-US" sz="1100" dirty="0">
+                <a:solidFill>
+                  <a:srgbClr val="6B6660"/>
+                </a:solidFill>
+                <a:latin typeface="Arial" pitchFamily="34" charset="0"/>
+                <a:ea typeface="Arial" pitchFamily="34" charset="-122"/>
+                <a:cs typeface="Arial" pitchFamily="34" charset="-120"/>
+              </a:rPr>
+              <a:t>Separating dissolved substances by how they travel on paper.</a:t>
+            </a:r>
+            <a:endParaRPr lang="en-US" sz="1100" dirty="0"/>
+          </a:p>
+        </p:txBody>
+      </p:sp>
+      <p:sp>
+        <p:nvSpPr>
+          <p:cNvPr id="7" name="Shape 5"/>
+          <p:cNvSpPr/>
+          <p:nvPr/>
+        </p:nvSpPr>
+        <p:spPr>
+          <a:xfrm>
+            <a:off x="4160520" y="1371600"/>
+            <a:ext cx="3383280" cy="1280160"/>
+          </a:xfrm>
+          <a:prstGeom prst="roundRect">
+            <a:avLst>
+              <a:gd name="adj" fmla="val 7143"/>
+            </a:avLst>
+          </a:prstGeom>
+          <a:solidFill>
+            <a:srgbClr val="FFFFFF"/>
+          </a:solidFill>
+          <a:ln w="12700">
+            <a:solidFill>
+              <a:srgbClr val="E5E2DC"/>
+            </a:solidFill>
+            <a:prstDash val="solid"/>
+          </a:ln>
+        </p:spPr>
+      </p:sp>
+      <p:sp>
+        <p:nvSpPr>
+          <p:cNvPr id="8" name="Text 6"/>
+          <p:cNvSpPr/>
+          <p:nvPr/>
+        </p:nvSpPr>
+        <p:spPr>
+          <a:xfrm>
+            <a:off x="4297680" y="1463040"/>
+            <a:ext cx="3108960" cy="365760"/>
+          </a:xfrm>
+          <a:prstGeom prst="rect">
+            <a:avLst/>
+          </a:prstGeom>
+          <a:noFill/>
+          <a:ln/>
+        </p:spPr>
+        <p:txBody>
+          <a:bodyPr wrap="square" rtlCol="0" anchor="ctr"/>
+          <a:lstStyle/>
+          <a:p>
+            <a:pPr indent="0" marL="0">
+              <a:buNone/>
+            </a:pPr>
+            <a:r>
+              <a:rPr lang="en-US" sz="1400" b="1" dirty="0">
+                <a:solidFill>
+                  <a:srgbClr val="C8372D"/>
+                </a:solidFill>
+                <a:latin typeface="Arial" pitchFamily="34" charset="0"/>
+                <a:ea typeface="Arial" pitchFamily="34" charset="-122"/>
+                <a:cs typeface="Arial" pitchFamily="34" charset="-120"/>
+              </a:rPr>
+              <a:t>Rf Value  比移值</a:t>
+            </a:r>
+            <a:endParaRPr lang="en-US" sz="1400" dirty="0"/>
+          </a:p>
+        </p:txBody>
+      </p:sp>
+      <p:sp>
+        <p:nvSpPr>
+          <p:cNvPr id="9" name="Text 7"/>
+          <p:cNvSpPr/>
+          <p:nvPr/>
+        </p:nvSpPr>
+        <p:spPr>
+          <a:xfrm>
+            <a:off x="4297680" y="1828800"/>
+            <a:ext cx="3108960" cy="731520"/>
+          </a:xfrm>
+          <a:prstGeom prst="rect">
+            <a:avLst/>
+          </a:prstGeom>
+          <a:noFill/>
+          <a:ln/>
+        </p:spPr>
+        <p:txBody>
+          <a:bodyPr wrap="square" rtlCol="0" anchor="ctr"/>
+          <a:lstStyle/>
+          <a:p>
+            <a:pPr indent="0" marL="0">
+              <a:buNone/>
+            </a:pPr>
+            <a:r>
+              <a:rPr lang="en-US" sz="1100" dirty="0">
+                <a:solidFill>
+                  <a:srgbClr val="6B6660"/>
+                </a:solidFill>
+                <a:latin typeface="Arial" pitchFamily="34" charset="0"/>
+                <a:ea typeface="Arial" pitchFamily="34" charset="-122"/>
+                <a:cs typeface="Arial" pitchFamily="34" charset="-120"/>
+              </a:rPr>
+              <a:t>Distance of substance ÷ distance of solvent front.</a:t>
+            </a:r>
+            <a:endParaRPr lang="en-US" sz="1100" dirty="0"/>
+          </a:p>
+        </p:txBody>
+      </p:sp>
+      <p:sp>
+        <p:nvSpPr>
+          <p:cNvPr id="10" name="Shape 8"/>
+          <p:cNvSpPr/>
+          <p:nvPr/>
+        </p:nvSpPr>
+        <p:spPr>
+          <a:xfrm>
+            <a:off x="7772400" y="1371600"/>
+            <a:ext cx="3383280" cy="1280160"/>
+          </a:xfrm>
+          <a:prstGeom prst="roundRect">
+            <a:avLst>
+              <a:gd name="adj" fmla="val 7143"/>
+            </a:avLst>
+          </a:prstGeom>
+          <a:solidFill>
+            <a:srgbClr val="FFFFFF"/>
+          </a:solidFill>
+          <a:ln w="12700">
+            <a:solidFill>
+              <a:srgbClr val="E5E2DC"/>
+            </a:solidFill>
+            <a:prstDash val="solid"/>
+          </a:ln>
+        </p:spPr>
+      </p:sp>
+      <p:sp>
+        <p:nvSpPr>
+          <p:cNvPr id="11" name="Text 9"/>
+          <p:cNvSpPr/>
+          <p:nvPr/>
+        </p:nvSpPr>
+        <p:spPr>
+          <a:xfrm>
+            <a:off x="7909560" y="1463040"/>
+            <a:ext cx="3108960" cy="365760"/>
+          </a:xfrm>
+          <a:prstGeom prst="rect">
+            <a:avLst/>
+          </a:prstGeom>
+          <a:noFill/>
+          <a:ln/>
+        </p:spPr>
+        <p:txBody>
+          <a:bodyPr wrap="square" rtlCol="0" anchor="ctr"/>
+          <a:lstStyle/>
+          <a:p>
+            <a:pPr indent="0" marL="0">
+              <a:buNone/>
+            </a:pPr>
+            <a:r>
+              <a:rPr lang="en-US" sz="1400" b="1" dirty="0">
+                <a:solidFill>
+                  <a:srgbClr val="C8372D"/>
+                </a:solidFill>
+                <a:latin typeface="Arial" pitchFamily="34" charset="0"/>
+                <a:ea typeface="Arial" pitchFamily="34" charset="-122"/>
+                <a:cs typeface="Arial" pitchFamily="34" charset="-120"/>
+              </a:rPr>
+              <a:t>Chromatogram  色谱图</a:t>
+            </a:r>
+            <a:endParaRPr lang="en-US" sz="1400" dirty="0"/>
+          </a:p>
+        </p:txBody>
+      </p:sp>
+      <p:sp>
+        <p:nvSpPr>
+          <p:cNvPr id="12" name="Text 10"/>
+          <p:cNvSpPr/>
+          <p:nvPr/>
+        </p:nvSpPr>
+        <p:spPr>
+          <a:xfrm>
+            <a:off x="7909560" y="1828800"/>
+            <a:ext cx="3108960" cy="731520"/>
+          </a:xfrm>
+          <a:prstGeom prst="rect">
+            <a:avLst/>
+          </a:prstGeom>
+          <a:noFill/>
+          <a:ln/>
+        </p:spPr>
+        <p:txBody>
+          <a:bodyPr wrap="square" rtlCol="0" anchor="ctr"/>
+          <a:lstStyle/>
+          <a:p>
+            <a:pPr indent="0" marL="0">
+              <a:buNone/>
+            </a:pPr>
+            <a:r>
+              <a:rPr lang="en-US" sz="1100" dirty="0">
+                <a:solidFill>
+                  <a:srgbClr val="6B6660"/>
+                </a:solidFill>
+                <a:latin typeface="Arial" pitchFamily="34" charset="0"/>
+                <a:ea typeface="Arial" pitchFamily="34" charset="-122"/>
+                <a:cs typeface="Arial" pitchFamily="34" charset="-120"/>
+              </a:rPr>
+              <a:t>The resulting paper showing separated substances.</a:t>
+            </a:r>
+            <a:endParaRPr lang="en-US" sz="1100" dirty="0"/>
+          </a:p>
+        </p:txBody>
+      </p:sp>
+      <p:sp>
+        <p:nvSpPr>
+          <p:cNvPr id="13" name="Shape 11"/>
+          <p:cNvSpPr/>
+          <p:nvPr/>
+        </p:nvSpPr>
+        <p:spPr>
+          <a:xfrm>
+            <a:off x="548640" y="2834640"/>
+            <a:ext cx="3383280" cy="1280160"/>
+          </a:xfrm>
+          <a:prstGeom prst="roundRect">
+            <a:avLst>
+              <a:gd name="adj" fmla="val 7143"/>
+            </a:avLst>
+          </a:prstGeom>
+          <a:solidFill>
+            <a:srgbClr val="FFFFFF"/>
+          </a:solidFill>
+          <a:ln w="12700">
+            <a:solidFill>
+              <a:srgbClr val="E5E2DC"/>
+            </a:solidFill>
+            <a:prstDash val="solid"/>
+          </a:ln>
+        </p:spPr>
+      </p:sp>
+      <p:sp>
+        <p:nvSpPr>
+          <p:cNvPr id="14" name="Text 12"/>
+          <p:cNvSpPr/>
+          <p:nvPr/>
+        </p:nvSpPr>
+        <p:spPr>
+          <a:xfrm>
+            <a:off x="685800" y="2926080"/>
+            <a:ext cx="3108960" cy="365760"/>
+          </a:xfrm>
+          <a:prstGeom prst="rect">
+            <a:avLst/>
+          </a:prstGeom>
+          <a:noFill/>
+          <a:ln/>
+        </p:spPr>
+        <p:txBody>
+          <a:bodyPr wrap="square" rtlCol="0" anchor="ctr"/>
+          <a:lstStyle/>
+          <a:p>
+            <a:pPr indent="0" marL="0">
+              <a:buNone/>
+            </a:pPr>
+            <a:r>
+              <a:rPr lang="en-US" sz="1400" b="1" dirty="0">
+                <a:solidFill>
+                  <a:srgbClr val="C8372D"/>
+                </a:solidFill>
+                <a:latin typeface="Arial" pitchFamily="34" charset="0"/>
+                <a:ea typeface="Arial" pitchFamily="34" charset="-122"/>
+                <a:cs typeface="Arial" pitchFamily="34" charset="-120"/>
+              </a:rPr>
+              <a:t>Solvent Front  溶剂前沿</a:t>
+            </a:r>
+            <a:endParaRPr lang="en-US" sz="1400" dirty="0"/>
+          </a:p>
+        </p:txBody>
+      </p:sp>
+      <p:sp>
+        <p:nvSpPr>
+          <p:cNvPr id="15" name="Text 13"/>
+          <p:cNvSpPr/>
+          <p:nvPr/>
+        </p:nvSpPr>
+        <p:spPr>
+          <a:xfrm>
+            <a:off x="685800" y="3291840"/>
+            <a:ext cx="3108960" cy="731520"/>
+          </a:xfrm>
+          <a:prstGeom prst="rect">
+            <a:avLst/>
+          </a:prstGeom>
+          <a:noFill/>
+          <a:ln/>
+        </p:spPr>
+        <p:txBody>
+          <a:bodyPr wrap="square" rtlCol="0" anchor="ctr"/>
+          <a:lstStyle/>
+          <a:p>
+            <a:pPr indent="0" marL="0">
+              <a:buNone/>
+            </a:pPr>
+            <a:r>
+              <a:rPr lang="en-US" sz="1100" dirty="0">
+                <a:solidFill>
+                  <a:srgbClr val="6B6660"/>
+                </a:solidFill>
+                <a:latin typeface="Arial" pitchFamily="34" charset="0"/>
+                <a:ea typeface="Arial" pitchFamily="34" charset="-122"/>
+                <a:cs typeface="Arial" pitchFamily="34" charset="-120"/>
+              </a:rPr>
+              <a:t>The furthest point reached by the solvent.</a:t>
+            </a:r>
+            <a:endParaRPr lang="en-US" sz="1100" dirty="0"/>
+          </a:p>
+        </p:txBody>
+      </p:sp>
+      <p:sp>
+        <p:nvSpPr>
+          <p:cNvPr id="16" name="Shape 14"/>
+          <p:cNvSpPr/>
+          <p:nvPr/>
+        </p:nvSpPr>
+        <p:spPr>
+          <a:xfrm>
+            <a:off x="4160520" y="2834640"/>
+            <a:ext cx="3383280" cy="1280160"/>
+          </a:xfrm>
+          <a:prstGeom prst="roundRect">
+            <a:avLst>
+              <a:gd name="adj" fmla="val 7143"/>
+            </a:avLst>
+          </a:prstGeom>
+          <a:solidFill>
+            <a:srgbClr val="FFFFFF"/>
+          </a:solidFill>
+          <a:ln w="12700">
+            <a:solidFill>
+              <a:srgbClr val="E5E2DC"/>
+            </a:solidFill>
+            <a:prstDash val="solid"/>
+          </a:ln>
+        </p:spPr>
+      </p:sp>
+      <p:sp>
+        <p:nvSpPr>
+          <p:cNvPr id="17" name="Text 15"/>
+          <p:cNvSpPr/>
+          <p:nvPr/>
+        </p:nvSpPr>
+        <p:spPr>
+          <a:xfrm>
+            <a:off x="4297680" y="2926080"/>
+            <a:ext cx="3108960" cy="365760"/>
+          </a:xfrm>
+          <a:prstGeom prst="rect">
+            <a:avLst/>
+          </a:prstGeom>
+          <a:noFill/>
+          <a:ln/>
+        </p:spPr>
+        <p:txBody>
+          <a:bodyPr wrap="square" rtlCol="0" anchor="ctr"/>
+          <a:lstStyle/>
+          <a:p>
+            <a:pPr indent="0" marL="0">
+              <a:buNone/>
+            </a:pPr>
+            <a:r>
+              <a:rPr lang="en-US" sz="1400" b="1" dirty="0">
+                <a:solidFill>
+                  <a:srgbClr val="C8372D"/>
+                </a:solidFill>
+                <a:latin typeface="Arial" pitchFamily="34" charset="0"/>
+                <a:ea typeface="Arial" pitchFamily="34" charset="-122"/>
+                <a:cs typeface="Arial" pitchFamily="34" charset="-120"/>
+              </a:rPr>
+              <a:t>Mobile Phase  流动相</a:t>
+            </a:r>
+            <a:endParaRPr lang="en-US" sz="1400" dirty="0"/>
+          </a:p>
+        </p:txBody>
+      </p:sp>
+      <p:sp>
+        <p:nvSpPr>
+          <p:cNvPr id="18" name="Text 16"/>
+          <p:cNvSpPr/>
+          <p:nvPr/>
+        </p:nvSpPr>
+        <p:spPr>
+          <a:xfrm>
+            <a:off x="4297680" y="3291840"/>
+            <a:ext cx="3108960" cy="731520"/>
+          </a:xfrm>
+          <a:prstGeom prst="rect">
+            <a:avLst/>
+          </a:prstGeom>
+          <a:noFill/>
+          <a:ln/>
+        </p:spPr>
+        <p:txBody>
+          <a:bodyPr wrap="square" rtlCol="0" anchor="ctr"/>
+          <a:lstStyle/>
+          <a:p>
+            <a:pPr indent="0" marL="0">
+              <a:buNone/>
+            </a:pPr>
+            <a:r>
+              <a:rPr lang="en-US" sz="1100" dirty="0">
+                <a:solidFill>
+                  <a:srgbClr val="6B6660"/>
+                </a:solidFill>
+                <a:latin typeface="Arial" pitchFamily="34" charset="0"/>
+                <a:ea typeface="Arial" pitchFamily="34" charset="-122"/>
+                <a:cs typeface="Arial" pitchFamily="34" charset="-120"/>
+              </a:rPr>
+              <a:t>The solvent moving up the paper.</a:t>
+            </a:r>
+            <a:endParaRPr lang="en-US" sz="1100" dirty="0"/>
+          </a:p>
+        </p:txBody>
+      </p:sp>
+      <p:sp>
+        <p:nvSpPr>
+          <p:cNvPr id="19" name="Shape 17"/>
+          <p:cNvSpPr/>
+          <p:nvPr/>
+        </p:nvSpPr>
+        <p:spPr>
+          <a:xfrm>
+            <a:off x="7772400" y="2834640"/>
+            <a:ext cx="3383280" cy="1280160"/>
+          </a:xfrm>
+          <a:prstGeom prst="roundRect">
+            <a:avLst>
+              <a:gd name="adj" fmla="val 7143"/>
+            </a:avLst>
+          </a:prstGeom>
+          <a:solidFill>
+            <a:srgbClr val="FFFFFF"/>
+          </a:solidFill>
+          <a:ln w="12700">
+            <a:solidFill>
+              <a:srgbClr val="E5E2DC"/>
+            </a:solidFill>
+            <a:prstDash val="solid"/>
+          </a:ln>
+        </p:spPr>
+      </p:sp>
+      <p:sp>
+        <p:nvSpPr>
+          <p:cNvPr id="20" name="Text 18"/>
+          <p:cNvSpPr/>
+          <p:nvPr/>
+        </p:nvSpPr>
+        <p:spPr>
+          <a:xfrm>
+            <a:off x="7909560" y="2926080"/>
+            <a:ext cx="3108960" cy="365760"/>
+          </a:xfrm>
+          <a:prstGeom prst="rect">
+            <a:avLst/>
+          </a:prstGeom>
+          <a:noFill/>
+          <a:ln/>
+        </p:spPr>
+        <p:txBody>
+          <a:bodyPr wrap="square" rtlCol="0" anchor="ctr"/>
+          <a:lstStyle/>
+          <a:p>
+            <a:pPr indent="0" marL="0">
+              <a:buNone/>
+            </a:pPr>
+            <a:r>
+              <a:rPr lang="en-US" sz="1400" b="1" dirty="0">
+                <a:solidFill>
+                  <a:srgbClr val="C8372D"/>
+                </a:solidFill>
+                <a:latin typeface="Arial" pitchFamily="34" charset="0"/>
+                <a:ea typeface="Arial" pitchFamily="34" charset="-122"/>
+                <a:cs typeface="Arial" pitchFamily="34" charset="-120"/>
+              </a:rPr>
+              <a:t>Stationary Phase  固定相</a:t>
+            </a:r>
+            <a:endParaRPr lang="en-US" sz="1400" dirty="0"/>
+          </a:p>
+        </p:txBody>
+      </p:sp>
+      <p:sp>
+        <p:nvSpPr>
+          <p:cNvPr id="21" name="Text 19"/>
+          <p:cNvSpPr/>
+          <p:nvPr/>
+        </p:nvSpPr>
+        <p:spPr>
+          <a:xfrm>
+            <a:off x="7909560" y="3291840"/>
+            <a:ext cx="3108960" cy="731520"/>
+          </a:xfrm>
+          <a:prstGeom prst="rect">
+            <a:avLst/>
+          </a:prstGeom>
+          <a:noFill/>
+          <a:ln/>
+        </p:spPr>
+        <p:txBody>
+          <a:bodyPr wrap="square" rtlCol="0" anchor="ctr"/>
+          <a:lstStyle/>
+          <a:p>
+            <a:pPr indent="0" marL="0">
+              <a:buNone/>
+            </a:pPr>
+            <a:r>
+              <a:rPr lang="en-US" sz="1100" dirty="0">
+                <a:solidFill>
+                  <a:srgbClr val="6B6660"/>
+                </a:solidFill>
+                <a:latin typeface="Arial" pitchFamily="34" charset="0"/>
+                <a:ea typeface="Arial" pitchFamily="34" charset="-122"/>
+                <a:cs typeface="Arial" pitchFamily="34" charset="-120"/>
+              </a:rPr>
+              <a:t>The paper — stays still.</a:t>
+            </a:r>
+            <a:endParaRPr lang="en-US" sz="1100" dirty="0"/>
+          </a:p>
+        </p:txBody>
+      </p:sp>
+      <p:sp>
+        <p:nvSpPr>
+          <p:cNvPr id="22" name="Shape 20"/>
+          <p:cNvSpPr/>
+          <p:nvPr/>
+        </p:nvSpPr>
+        <p:spPr>
+          <a:xfrm>
+            <a:off x="0" y="6492240"/>
+            <a:ext cx="12188952" cy="365760"/>
+          </a:xfrm>
+          <a:prstGeom prst="rect">
+            <a:avLst/>
+          </a:prstGeom>
+          <a:solidFill>
+            <a:srgbClr val="1B2A4A"/>
+          </a:solidFill>
+          <a:ln/>
+        </p:spPr>
+      </p:sp>
+      <p:sp>
+        <p:nvSpPr>
+          <p:cNvPr id="23" name="Text 21"/>
+          <p:cNvSpPr/>
+          <p:nvPr/>
+        </p:nvSpPr>
+        <p:spPr>
+          <a:xfrm>
+            <a:off x="10058400" y="6537960"/>
+            <a:ext cx="1828800" cy="274320"/>
+          </a:xfrm>
+          <a:prstGeom prst="rect">
+            <a:avLst/>
+          </a:prstGeom>
+          <a:noFill/>
+          <a:ln/>
+        </p:spPr>
+        <p:txBody>
+          <a:bodyPr wrap="square" rtlCol="0" anchor="ctr"/>
+          <a:lstStyle/>
+          <a:p>
+            <a:pPr algn="r" indent="0" marL="0">
+              <a:buNone/>
+            </a:pPr>
+            <a:r>
+              <a:rPr lang="en-US" sz="900" dirty="0">
+                <a:solidFill>
+                  <a:srgbClr val="E9C46A"/>
+                </a:solidFill>
+                <a:latin typeface="Arial" pitchFamily="34" charset="0"/>
+                <a:ea typeface="Arial" pitchFamily="34" charset="-122"/>
+                <a:cs typeface="Arial" pitchFamily="34" charset="-120"/>
+              </a:rPr>
+              <a:t>mrzocchi.com</a:t>
+            </a:r>
+            <a:endParaRPr lang="en-US" sz="900" dirty="0"/>
           </a:p>
         </p:txBody>
       </p:sp>
@@ -3340,13 +5084,6 @@
 <file path=ppt/slides/slide7.xml><?xml version="1.0" encoding="utf-8"?>
 <p:sld xmlns:a="http://schemas.openxmlformats.org/drawingml/2006/main" xmlns:r="http://schemas.openxmlformats.org/officeDocument/2006/relationships" xmlns:p="http://schemas.openxmlformats.org/presentationml/2006/main">
   <p:cSld name="Slide 7">
-    <p:bg>
-      <p:bgPr>
-        <a:solidFill>
-          <a:srgbClr val="FAF8F5"/>
-        </a:solidFill>
-      </p:bgPr>
-    </p:bg>
     <p:spTree>
       <p:nvGrpSpPr>
         <p:cNvPr id="1" name=""/>
@@ -3370,75 +5107,82 @@
         <p:spPr>
           <a:xfrm>
             <a:off x="0" y="0"/>
-            <a:ext cx="9144000" cy="822960"/>
-          </a:xfrm>
-          <a:prstGeom prst="rect">
-            <a:avLst/>
-          </a:prstGeom>
-          <a:solidFill>
-            <a:srgbClr val="FFFFFF"/>
-          </a:solidFill>
-          <a:ln/>
-        </p:spPr>
-      </p:sp>
-      <p:sp>
-        <p:nvSpPr>
-          <p:cNvPr id="3" name="Shape 1"/>
-          <p:cNvSpPr/>
-          <p:nvPr/>
-        </p:nvSpPr>
-        <p:spPr>
-          <a:xfrm>
-            <a:off x="0" y="795528"/>
-            <a:ext cx="9144000" cy="27432"/>
-          </a:xfrm>
-          <a:prstGeom prst="rect">
-            <a:avLst/>
-          </a:prstGeom>
-          <a:solidFill>
-            <a:srgbClr val="C8372D"/>
-          </a:solidFill>
-          <a:ln/>
-        </p:spPr>
-      </p:sp>
-      <p:sp>
-        <p:nvSpPr>
-          <p:cNvPr id="4" name="Text 2"/>
-          <p:cNvSpPr/>
-          <p:nvPr/>
-        </p:nvSpPr>
-        <p:spPr>
-          <a:xfrm>
-            <a:off x="640080" y="91440"/>
-            <a:ext cx="7863840" cy="640080"/>
-          </a:xfrm>
-          <a:prstGeom prst="rect">
-            <a:avLst/>
-          </a:prstGeom>
-          <a:noFill/>
-          <a:ln/>
-        </p:spPr>
-        <p:txBody>
-          <a:bodyPr wrap="square" lIns="0" tIns="0" rIns="0" bIns="0" rtlCol="0" anchor="ctr"/>
+            <a:ext cx="12188952" cy="1097280"/>
+          </a:xfrm>
+          <a:prstGeom prst="rect">
+            <a:avLst/>
+          </a:prstGeom>
+          <a:solidFill>
+            <a:srgbClr val="1B2A4A"/>
+          </a:solidFill>
+          <a:ln/>
+        </p:spPr>
+      </p:sp>
+      <p:sp>
+        <p:nvSpPr>
+          <p:cNvPr id="3" name="Text 1"/>
+          <p:cNvSpPr/>
+          <p:nvPr/>
+        </p:nvSpPr>
+        <p:spPr>
+          <a:xfrm>
+            <a:off x="548640" y="182880"/>
+            <a:ext cx="9144000" cy="731520"/>
+          </a:xfrm>
+          <a:prstGeom prst="rect">
+            <a:avLst/>
+          </a:prstGeom>
+          <a:noFill/>
+          <a:ln/>
+        </p:spPr>
+        <p:txBody>
+          <a:bodyPr wrap="square" rtlCol="0" anchor="ctr"/>
           <a:lstStyle/>
           <a:p>
             <a:pPr indent="0" marL="0">
               <a:buNone/>
             </a:pPr>
             <a:r>
-              <a:rPr lang="en-US" sz="2200" b="1" dirty="0">
-                <a:solidFill>
-                  <a:srgbClr val="1B2A4A"/>
+              <a:rPr lang="en-US" sz="2600" b="1" dirty="0">
+                <a:solidFill>
+                  <a:srgbClr val="FFFFFF"/>
                 </a:solidFill>
                 <a:latin typeface="Georgia" pitchFamily="34" charset="0"/>
                 <a:ea typeface="Georgia" pitchFamily="34" charset="-122"/>
                 <a:cs typeface="Georgia" pitchFamily="34" charset="-120"/>
               </a:rPr>
-              <a:t>Recommended Videos</a:t>
-            </a:r>
-            <a:endParaRPr lang="en-US" sz="2200" dirty="0"/>
-          </a:p>
-        </p:txBody>
+              <a:t>🧠 Check Your Understanding</a:t>
+            </a:r>
+            <a:endParaRPr lang="en-US" sz="2600" dirty="0"/>
+          </a:p>
+        </p:txBody>
+      </p:sp>
+      <p:sp>
+        <p:nvSpPr>
+          <p:cNvPr id="4" name="Shape 2"/>
+          <p:cNvSpPr/>
+          <p:nvPr/>
+        </p:nvSpPr>
+        <p:spPr>
+          <a:xfrm>
+            <a:off x="548640" y="1371600"/>
+            <a:ext cx="10972800" cy="502920"/>
+          </a:xfrm>
+          <a:prstGeom prst="roundRect">
+            <a:avLst>
+              <a:gd name="adj" fmla="val 14545"/>
+            </a:avLst>
+          </a:prstGeom>
+          <a:solidFill>
+            <a:srgbClr val="FFFFFF"/>
+          </a:solidFill>
+          <a:ln w="12700">
+            <a:solidFill>
+              <a:srgbClr val="C8372D"/>
+            </a:solidFill>
+            <a:prstDash val="solid"/>
+          </a:ln>
+        </p:spPr>
       </p:sp>
       <p:sp>
         <p:nvSpPr>
@@ -3448,8 +5192,8 @@
         </p:nvSpPr>
         <p:spPr>
           <a:xfrm>
-            <a:off x="640080" y="868680"/>
-            <a:ext cx="7863840" cy="274320"/>
+            <a:off x="822960" y="1389888"/>
+            <a:ext cx="10515600" cy="457200"/>
           </a:xfrm>
           <a:prstGeom prst="rect">
             <a:avLst/>
@@ -3465,105 +5209,107 @@
               <a:buNone/>
             </a:pPr>
             <a:r>
-              <a:rPr lang="en-US" sz="1200" i="1" dirty="0">
+              <a:rPr lang="en-US" sz="1400" b="1" dirty="0">
+                <a:solidFill>
+                  <a:srgbClr val="1B2A4A"/>
+                </a:solidFill>
+                <a:latin typeface="Arial" pitchFamily="34" charset="0"/>
+                <a:ea typeface="Arial" pitchFamily="34" charset="-122"/>
+                <a:cs typeface="Arial" pitchFamily="34" charset="-120"/>
+              </a:rPr>
+              <a:t>Q1: Why use pencil, not pen, for the baseline?</a:t>
+            </a:r>
+            <a:endParaRPr lang="en-US" sz="1400" dirty="0"/>
+          </a:p>
+        </p:txBody>
+      </p:sp>
+      <p:sp>
+        <p:nvSpPr>
+          <p:cNvPr id="6" name="Shape 4"/>
+          <p:cNvSpPr/>
+          <p:nvPr/>
+        </p:nvSpPr>
+        <p:spPr>
+          <a:xfrm>
+            <a:off x="1097280" y="1965960"/>
+            <a:ext cx="10424160" cy="502920"/>
+          </a:xfrm>
+          <a:prstGeom prst="roundRect">
+            <a:avLst>
+              <a:gd name="adj" fmla="val 14545"/>
+            </a:avLst>
+          </a:prstGeom>
+          <a:solidFill>
+            <a:srgbClr val="F3F1EE"/>
+          </a:solidFill>
+          <a:ln/>
+        </p:spPr>
+      </p:sp>
+      <p:sp>
+        <p:nvSpPr>
+          <p:cNvPr id="7" name="Text 5"/>
+          <p:cNvSpPr/>
+          <p:nvPr/>
+        </p:nvSpPr>
+        <p:spPr>
+          <a:xfrm>
+            <a:off x="1371600" y="1984248"/>
+            <a:ext cx="9875520" cy="457200"/>
+          </a:xfrm>
+          <a:prstGeom prst="rect">
+            <a:avLst/>
+          </a:prstGeom>
+          <a:noFill/>
+          <a:ln/>
+        </p:spPr>
+        <p:txBody>
+          <a:bodyPr wrap="square" rtlCol="0" anchor="ctr"/>
+          <a:lstStyle/>
+          <a:p>
+            <a:pPr indent="0" marL="0">
+              <a:buNone/>
+            </a:pPr>
+            <a:r>
+              <a:rPr lang="en-US" sz="1300" i="1" dirty="0">
                 <a:solidFill>
                   <a:srgbClr val="6B6660"/>
                 </a:solidFill>
-                <a:latin typeface="Calibri" pitchFamily="34" charset="0"/>
-                <a:ea typeface="Calibri" pitchFamily="34" charset="-122"/>
-                <a:cs typeface="Calibri" pitchFamily="34" charset="-120"/>
-              </a:rPr>
-              <a:t>Search these on YouTube to learn more.</a:t>
-            </a:r>
-            <a:endParaRPr lang="en-US" sz="1200" dirty="0"/>
-          </a:p>
-        </p:txBody>
-      </p:sp>
-      <p:sp>
-        <p:nvSpPr>
-          <p:cNvPr id="6" name="Shape 4"/>
-          <p:cNvSpPr/>
-          <p:nvPr/>
-        </p:nvSpPr>
-        <p:spPr>
-          <a:xfrm>
-            <a:off x="457200" y="1234440"/>
-            <a:ext cx="8229600" cy="1051560"/>
-          </a:xfrm>
-          <a:prstGeom prst="rect">
-            <a:avLst/>
+                <a:latin typeface="Arial" pitchFamily="34" charset="0"/>
+                <a:ea typeface="Arial" pitchFamily="34" charset="-122"/>
+                <a:cs typeface="Arial" pitchFamily="34" charset="-120"/>
+              </a:rPr>
+              <a:t>→ Pen ink dissolves and would separate, affecting results.</a:t>
+            </a:r>
+            <a:endParaRPr lang="en-US" sz="1300" dirty="0"/>
+          </a:p>
+        </p:txBody>
+      </p:sp>
+      <p:sp>
+        <p:nvSpPr>
+          <p:cNvPr id="8" name="Shape 6"/>
+          <p:cNvSpPr/>
+          <p:nvPr/>
+        </p:nvSpPr>
+        <p:spPr>
+          <a:xfrm>
+            <a:off x="548640" y="2606040"/>
+            <a:ext cx="10972800" cy="502920"/>
+          </a:xfrm>
+          <a:prstGeom prst="roundRect">
+            <a:avLst>
+              <a:gd name="adj" fmla="val 14545"/>
+            </a:avLst>
           </a:prstGeom>
           <a:solidFill>
             <a:srgbClr val="FFFFFF"/>
           </a:solidFill>
-          <a:ln/>
-          <a:effectLst>
-            <a:outerShdw sx="100000" sy="100000" kx="0" ky="0" algn="bl" rotWithShape="0" blurRad="76200" dist="25400" dir="8100000">
-              <a:srgbClr val="000000">
-                <a:alpha val="12000"/>
-              </a:srgbClr>
-            </a:outerShdw>
-          </a:effectLst>
-        </p:spPr>
-      </p:sp>
-      <p:sp>
-        <p:nvSpPr>
-          <p:cNvPr id="7" name="Shape 5"/>
-          <p:cNvSpPr/>
-          <p:nvPr/>
-        </p:nvSpPr>
-        <p:spPr>
-          <a:xfrm>
-            <a:off x="457200" y="1234440"/>
-            <a:ext cx="64008" cy="1051560"/>
-          </a:xfrm>
-          <a:prstGeom prst="rect">
-            <a:avLst/>
-          </a:prstGeom>
-          <a:solidFill>
-            <a:srgbClr val="C8372D"/>
-          </a:solidFill>
-          <a:ln/>
-        </p:spPr>
-      </p:sp>
-      <p:sp>
-        <p:nvSpPr>
-          <p:cNvPr id="8" name="Text 6"/>
-          <p:cNvSpPr/>
-          <p:nvPr/>
-        </p:nvSpPr>
-        <p:spPr>
-          <a:xfrm>
-            <a:off x="640080" y="1325880"/>
-            <a:ext cx="457200" cy="457200"/>
-          </a:xfrm>
-          <a:prstGeom prst="rect">
-            <a:avLst/>
-          </a:prstGeom>
-          <a:noFill/>
-          <a:ln/>
-        </p:spPr>
-        <p:txBody>
-          <a:bodyPr wrap="square" rtlCol="0" anchor="ctr"/>
-          <a:lstStyle/>
-          <a:p>
-            <a:pPr algn="ctr" indent="0" marL="0">
-              <a:buNone/>
-            </a:pPr>
-            <a:r>
-              <a:rPr lang="en-US" sz="2000" dirty="0">
-                <a:solidFill>
-                  <a:srgbClr val="C8372D"/>
-                </a:solidFill>
-                <a:latin typeface="Calibri" pitchFamily="34" charset="0"/>
-                <a:ea typeface="Calibri" pitchFamily="34" charset="-122"/>
-                <a:cs typeface="Calibri" pitchFamily="34" charset="-120"/>
-              </a:rPr>
-              <a:t>▶</a:t>
-            </a:r>
-            <a:endParaRPr lang="en-US" sz="2000" dirty="0"/>
-          </a:p>
-        </p:txBody>
+          <a:ln w="12700">
+            <a:solidFill>
+              <a:srgbClr val="C8372D"/>
+            </a:solidFill>
+            <a:prstDash val="solid"/>
+          </a:ln>
+        </p:spPr>
       </p:sp>
       <p:sp>
         <p:nvSpPr>
@@ -3573,8 +5319,8 @@
         </p:nvSpPr>
         <p:spPr>
           <a:xfrm>
-            <a:off x="1188720" y="1307592"/>
-            <a:ext cx="7132320" cy="411480"/>
+            <a:off x="822960" y="2624328"/>
+            <a:ext cx="10515600" cy="457200"/>
           </a:xfrm>
           <a:prstGeom prst="rect">
             <a:avLst/>
@@ -3594,11 +5340,11 @@
                 <a:solidFill>
                   <a:srgbClr val="1B2A4A"/>
                 </a:solidFill>
-                <a:latin typeface="Calibri" pitchFamily="34" charset="0"/>
-                <a:ea typeface="Calibri" pitchFamily="34" charset="-122"/>
-                <a:cs typeface="Calibri" pitchFamily="34" charset="-120"/>
-              </a:rPr>
-              <a:t>Chromatography — How It Works</a:t>
+                <a:latin typeface="Arial" pitchFamily="34" charset="0"/>
+                <a:ea typeface="Arial" pitchFamily="34" charset="-122"/>
+                <a:cs typeface="Arial" pitchFamily="34" charset="-120"/>
+              </a:rPr>
+              <a:t>Q2: Substance moves 4.8 cm, solvent front 8.0 cm. Rf?</a:t>
             </a:r>
             <a:endParaRPr lang="en-US" sz="1400" dirty="0"/>
           </a:p>
@@ -3606,14 +5352,36 @@
       </p:sp>
       <p:sp>
         <p:nvSpPr>
-          <p:cNvPr id="10" name="Text 8"/>
-          <p:cNvSpPr/>
-          <p:nvPr/>
-        </p:nvSpPr>
-        <p:spPr>
-          <a:xfrm>
-            <a:off x="1188720" y="1691640"/>
-            <a:ext cx="7132320" cy="320040"/>
+          <p:cNvPr id="10" name="Shape 8"/>
+          <p:cNvSpPr/>
+          <p:nvPr/>
+        </p:nvSpPr>
+        <p:spPr>
+          <a:xfrm>
+            <a:off x="1097280" y="3200400"/>
+            <a:ext cx="10424160" cy="502920"/>
+          </a:xfrm>
+          <a:prstGeom prst="roundRect">
+            <a:avLst>
+              <a:gd name="adj" fmla="val 14545"/>
+            </a:avLst>
+          </a:prstGeom>
+          <a:solidFill>
+            <a:srgbClr val="F3F1EE"/>
+          </a:solidFill>
+          <a:ln/>
+        </p:spPr>
+      </p:sp>
+      <p:sp>
+        <p:nvSpPr>
+          <p:cNvPr id="11" name="Text 9"/>
+          <p:cNvSpPr/>
+          <p:nvPr/>
+        </p:nvSpPr>
+        <p:spPr>
+          <a:xfrm>
+            <a:off x="1371600" y="3218688"/>
+            <a:ext cx="9875520" cy="457200"/>
           </a:xfrm>
           <a:prstGeom prst="rect">
             <a:avLst/>
@@ -3629,65 +5397,45 @@
               <a:buNone/>
             </a:pPr>
             <a:r>
-              <a:rPr lang="en-US" sz="1100" dirty="0">
+              <a:rPr lang="en-US" sz="1300" i="1" dirty="0">
                 <a:solidFill>
                   <a:srgbClr val="6B6660"/>
                 </a:solidFill>
-                <a:latin typeface="Calibri" pitchFamily="34" charset="0"/>
-                <a:ea typeface="Calibri" pitchFamily="34" charset="-122"/>
-                <a:cs typeface="Calibri" pitchFamily="34" charset="-120"/>
-              </a:rPr>
-              <a:t>FuseSchool  •  4 min</a:t>
-            </a:r>
-            <a:endParaRPr lang="en-US" sz="1100" dirty="0"/>
-          </a:p>
-        </p:txBody>
-      </p:sp>
-      <p:sp>
-        <p:nvSpPr>
-          <p:cNvPr id="11" name="Shape 9"/>
-          <p:cNvSpPr/>
-          <p:nvPr/>
-        </p:nvSpPr>
-        <p:spPr>
-          <a:xfrm>
-            <a:off x="457200" y="2423160"/>
-            <a:ext cx="8229600" cy="1051560"/>
-          </a:xfrm>
-          <a:prstGeom prst="rect">
-            <a:avLst/>
+                <a:latin typeface="Arial" pitchFamily="34" charset="0"/>
+                <a:ea typeface="Arial" pitchFamily="34" charset="-122"/>
+                <a:cs typeface="Arial" pitchFamily="34" charset="-120"/>
+              </a:rPr>
+              <a:t>→ Rf = 4.8 ÷ 8.0 = 0.60</a:t>
+            </a:r>
+            <a:endParaRPr lang="en-US" sz="1300" dirty="0"/>
+          </a:p>
+        </p:txBody>
+      </p:sp>
+      <p:sp>
+        <p:nvSpPr>
+          <p:cNvPr id="12" name="Shape 10"/>
+          <p:cNvSpPr/>
+          <p:nvPr/>
+        </p:nvSpPr>
+        <p:spPr>
+          <a:xfrm>
+            <a:off x="548640" y="3840480"/>
+            <a:ext cx="10972800" cy="502920"/>
+          </a:xfrm>
+          <a:prstGeom prst="roundRect">
+            <a:avLst>
+              <a:gd name="adj" fmla="val 14545"/>
+            </a:avLst>
           </a:prstGeom>
           <a:solidFill>
             <a:srgbClr val="FFFFFF"/>
           </a:solidFill>
-          <a:ln/>
-          <a:effectLst>
-            <a:outerShdw sx="100000" sy="100000" kx="0" ky="0" algn="bl" rotWithShape="0" blurRad="76200" dist="25400" dir="8100000">
-              <a:srgbClr val="000000">
-                <a:alpha val="12000"/>
-              </a:srgbClr>
-            </a:outerShdw>
-          </a:effectLst>
-        </p:spPr>
-      </p:sp>
-      <p:sp>
-        <p:nvSpPr>
-          <p:cNvPr id="12" name="Shape 10"/>
-          <p:cNvSpPr/>
-          <p:nvPr/>
-        </p:nvSpPr>
-        <p:spPr>
-          <a:xfrm>
-            <a:off x="457200" y="2423160"/>
-            <a:ext cx="64008" cy="1051560"/>
-          </a:xfrm>
-          <a:prstGeom prst="rect">
-            <a:avLst/>
-          </a:prstGeom>
-          <a:solidFill>
-            <a:srgbClr val="C8372D"/>
-          </a:solidFill>
-          <a:ln/>
+          <a:ln w="12700">
+            <a:solidFill>
+              <a:srgbClr val="C8372D"/>
+            </a:solidFill>
+            <a:prstDash val="solid"/>
+          </a:ln>
         </p:spPr>
       </p:sp>
       <p:sp>
@@ -3698,47 +5446,8 @@
         </p:nvSpPr>
         <p:spPr>
           <a:xfrm>
-            <a:off x="640080" y="2514600"/>
-            <a:ext cx="457200" cy="457200"/>
-          </a:xfrm>
-          <a:prstGeom prst="rect">
-            <a:avLst/>
-          </a:prstGeom>
-          <a:noFill/>
-          <a:ln/>
-        </p:spPr>
-        <p:txBody>
-          <a:bodyPr wrap="square" rtlCol="0" anchor="ctr"/>
-          <a:lstStyle/>
-          <a:p>
-            <a:pPr algn="ctr" indent="0" marL="0">
-              <a:buNone/>
-            </a:pPr>
-            <a:r>
-              <a:rPr lang="en-US" sz="2000" dirty="0">
-                <a:solidFill>
-                  <a:srgbClr val="C8372D"/>
-                </a:solidFill>
-                <a:latin typeface="Calibri" pitchFamily="34" charset="0"/>
-                <a:ea typeface="Calibri" pitchFamily="34" charset="-122"/>
-                <a:cs typeface="Calibri" pitchFamily="34" charset="-120"/>
-              </a:rPr>
-              <a:t>▶</a:t>
-            </a:r>
-            <a:endParaRPr lang="en-US" sz="2000" dirty="0"/>
-          </a:p>
-        </p:txBody>
-      </p:sp>
-      <p:sp>
-        <p:nvSpPr>
-          <p:cNvPr id="14" name="Text 12"/>
-          <p:cNvSpPr/>
-          <p:nvPr/>
-        </p:nvSpPr>
-        <p:spPr>
-          <a:xfrm>
-            <a:off x="1188720" y="2496312"/>
-            <a:ext cx="7132320" cy="411480"/>
+            <a:off x="822960" y="3858768"/>
+            <a:ext cx="10515600" cy="457200"/>
           </a:xfrm>
           <a:prstGeom prst="rect">
             <a:avLst/>
@@ -3758,11 +5467,11 @@
                 <a:solidFill>
                   <a:srgbClr val="1B2A4A"/>
                 </a:solidFill>
-                <a:latin typeface="Calibri" pitchFamily="34" charset="0"/>
-                <a:ea typeface="Calibri" pitchFamily="34" charset="-122"/>
-                <a:cs typeface="Calibri" pitchFamily="34" charset="-120"/>
-              </a:rPr>
-              <a:t>Paper Chromatography Experiment</a:t>
+                <a:latin typeface="Arial" pitchFamily="34" charset="0"/>
+                <a:ea typeface="Arial" pitchFamily="34" charset="-122"/>
+                <a:cs typeface="Arial" pitchFamily="34" charset="-120"/>
+              </a:rPr>
+              <a:t>Q3: A chromatogram shows three spots. Is it pure or a mixture?</a:t>
             </a:r>
             <a:endParaRPr lang="en-US" sz="1400" dirty="0"/>
           </a:p>
@@ -3770,14 +5479,36 @@
       </p:sp>
       <p:sp>
         <p:nvSpPr>
+          <p:cNvPr id="14" name="Shape 12"/>
+          <p:cNvSpPr/>
+          <p:nvPr/>
+        </p:nvSpPr>
+        <p:spPr>
+          <a:xfrm>
+            <a:off x="1097280" y="4434840"/>
+            <a:ext cx="10424160" cy="502920"/>
+          </a:xfrm>
+          <a:prstGeom prst="roundRect">
+            <a:avLst>
+              <a:gd name="adj" fmla="val 14545"/>
+            </a:avLst>
+          </a:prstGeom>
+          <a:solidFill>
+            <a:srgbClr val="F3F1EE"/>
+          </a:solidFill>
+          <a:ln/>
+        </p:spPr>
+      </p:sp>
+      <p:sp>
+        <p:nvSpPr>
           <p:cNvPr id="15" name="Text 13"/>
           <p:cNvSpPr/>
           <p:nvPr/>
         </p:nvSpPr>
         <p:spPr>
           <a:xfrm>
-            <a:off x="1188720" y="2880360"/>
-            <a:ext cx="7132320" cy="320040"/>
+            <a:off x="1371600" y="4453128"/>
+            <a:ext cx="9875520" cy="457200"/>
           </a:xfrm>
           <a:prstGeom prst="rect">
             <a:avLst/>
@@ -3793,17 +5524,17 @@
               <a:buNone/>
             </a:pPr>
             <a:r>
-              <a:rPr lang="en-US" sz="1100" dirty="0">
+              <a:rPr lang="en-US" sz="1300" i="1" dirty="0">
                 <a:solidFill>
                   <a:srgbClr val="6B6660"/>
                 </a:solidFill>
-                <a:latin typeface="Calibri" pitchFamily="34" charset="0"/>
-                <a:ea typeface="Calibri" pitchFamily="34" charset="-122"/>
-                <a:cs typeface="Calibri" pitchFamily="34" charset="-120"/>
-              </a:rPr>
-              <a:t>Cognito  •  5 min</a:t>
-            </a:r>
-            <a:endParaRPr lang="en-US" sz="1100" dirty="0"/>
+                <a:latin typeface="Arial" pitchFamily="34" charset="0"/>
+                <a:ea typeface="Arial" pitchFamily="34" charset="-122"/>
+                <a:cs typeface="Arial" pitchFamily="34" charset="-120"/>
+              </a:rPr>
+              <a:t>→ A mixture — pure substances show only one spot.</a:t>
+            </a:r>
+            <a:endParaRPr lang="en-US" sz="1300" dirty="0"/>
           </a:p>
         </p:txBody>
       </p:sp>
@@ -3815,83 +5546,85 @@
         </p:nvSpPr>
         <p:spPr>
           <a:xfrm>
-            <a:off x="457200" y="3611880"/>
-            <a:ext cx="8229600" cy="1051560"/>
-          </a:xfrm>
-          <a:prstGeom prst="rect">
-            <a:avLst/>
+            <a:off x="548640" y="5074920"/>
+            <a:ext cx="10972800" cy="502920"/>
+          </a:xfrm>
+          <a:prstGeom prst="roundRect">
+            <a:avLst>
+              <a:gd name="adj" fmla="val 14545"/>
+            </a:avLst>
           </a:prstGeom>
           <a:solidFill>
             <a:srgbClr val="FFFFFF"/>
           </a:solidFill>
-          <a:ln/>
-          <a:effectLst>
-            <a:outerShdw sx="100000" sy="100000" kx="0" ky="0" algn="bl" rotWithShape="0" blurRad="76200" dist="25400" dir="8100000">
-              <a:srgbClr val="000000">
-                <a:alpha val="12000"/>
-              </a:srgbClr>
-            </a:outerShdw>
-          </a:effectLst>
-        </p:spPr>
-      </p:sp>
-      <p:sp>
-        <p:nvSpPr>
-          <p:cNvPr id="17" name="Shape 15"/>
-          <p:cNvSpPr/>
-          <p:nvPr/>
-        </p:nvSpPr>
-        <p:spPr>
-          <a:xfrm>
-            <a:off x="457200" y="3611880"/>
-            <a:ext cx="64008" cy="1051560"/>
-          </a:xfrm>
-          <a:prstGeom prst="rect">
-            <a:avLst/>
-          </a:prstGeom>
-          <a:solidFill>
-            <a:srgbClr val="C8372D"/>
-          </a:solidFill>
-          <a:ln/>
-        </p:spPr>
-      </p:sp>
-      <p:sp>
-        <p:nvSpPr>
-          <p:cNvPr id="18" name="Text 16"/>
-          <p:cNvSpPr/>
-          <p:nvPr/>
-        </p:nvSpPr>
-        <p:spPr>
-          <a:xfrm>
-            <a:off x="640080" y="3703320"/>
-            <a:ext cx="457200" cy="457200"/>
-          </a:xfrm>
-          <a:prstGeom prst="rect">
-            <a:avLst/>
-          </a:prstGeom>
-          <a:noFill/>
-          <a:ln/>
-        </p:spPr>
-        <p:txBody>
-          <a:bodyPr wrap="square" rtlCol="0" anchor="ctr"/>
-          <a:lstStyle/>
-          <a:p>
-            <a:pPr algn="ctr" indent="0" marL="0">
-              <a:buNone/>
-            </a:pPr>
-            <a:r>
-              <a:rPr lang="en-US" sz="2000" dirty="0">
-                <a:solidFill>
-                  <a:srgbClr val="C8372D"/>
-                </a:solidFill>
-                <a:latin typeface="Calibri" pitchFamily="34" charset="0"/>
-                <a:ea typeface="Calibri" pitchFamily="34" charset="-122"/>
-                <a:cs typeface="Calibri" pitchFamily="34" charset="-120"/>
-              </a:rPr>
-              <a:t>▶</a:t>
-            </a:r>
-            <a:endParaRPr lang="en-US" sz="2000" dirty="0"/>
-          </a:p>
-        </p:txBody>
+          <a:ln w="12700">
+            <a:solidFill>
+              <a:srgbClr val="C8372D"/>
+            </a:solidFill>
+            <a:prstDash val="solid"/>
+          </a:ln>
+        </p:spPr>
+      </p:sp>
+      <p:sp>
+        <p:nvSpPr>
+          <p:cNvPr id="17" name="Text 15"/>
+          <p:cNvSpPr/>
+          <p:nvPr/>
+        </p:nvSpPr>
+        <p:spPr>
+          <a:xfrm>
+            <a:off x="822960" y="5093208"/>
+            <a:ext cx="10515600" cy="457200"/>
+          </a:xfrm>
+          <a:prstGeom prst="rect">
+            <a:avLst/>
+          </a:prstGeom>
+          <a:noFill/>
+          <a:ln/>
+        </p:spPr>
+        <p:txBody>
+          <a:bodyPr wrap="square" rtlCol="0" anchor="ctr"/>
+          <a:lstStyle/>
+          <a:p>
+            <a:pPr indent="0" marL="0">
+              <a:buNone/>
+            </a:pPr>
+            <a:r>
+              <a:rPr lang="en-US" sz="1400" b="1" dirty="0">
+                <a:solidFill>
+                  <a:srgbClr val="1B2A4A"/>
+                </a:solidFill>
+                <a:latin typeface="Arial" pitchFamily="34" charset="0"/>
+                <a:ea typeface="Arial" pitchFamily="34" charset="-122"/>
+                <a:cs typeface="Arial" pitchFamily="34" charset="-120"/>
+              </a:rPr>
+              <a:t>Q4: How do you identify an unknown substance?</a:t>
+            </a:r>
+            <a:endParaRPr lang="en-US" sz="1400" dirty="0"/>
+          </a:p>
+        </p:txBody>
+      </p:sp>
+      <p:sp>
+        <p:nvSpPr>
+          <p:cNvPr id="18" name="Shape 16"/>
+          <p:cNvSpPr/>
+          <p:nvPr/>
+        </p:nvSpPr>
+        <p:spPr>
+          <a:xfrm>
+            <a:off x="1097280" y="5669280"/>
+            <a:ext cx="10424160" cy="502920"/>
+          </a:xfrm>
+          <a:prstGeom prst="roundRect">
+            <a:avLst>
+              <a:gd name="adj" fmla="val 14545"/>
+            </a:avLst>
+          </a:prstGeom>
+          <a:solidFill>
+            <a:srgbClr val="F3F1EE"/>
+          </a:solidFill>
+          <a:ln/>
+        </p:spPr>
       </p:sp>
       <p:sp>
         <p:nvSpPr>
@@ -3901,8 +5634,8 @@
         </p:nvSpPr>
         <p:spPr>
           <a:xfrm>
-            <a:off x="1188720" y="3685032"/>
-            <a:ext cx="7132320" cy="411480"/>
+            <a:off x="1371600" y="5687568"/>
+            <a:ext cx="9875520" cy="457200"/>
           </a:xfrm>
           <a:prstGeom prst="rect">
             <a:avLst/>
@@ -3918,56 +5651,76 @@
               <a:buNone/>
             </a:pPr>
             <a:r>
-              <a:rPr lang="en-US" sz="1400" b="1" dirty="0">
-                <a:solidFill>
-                  <a:srgbClr val="1B2A4A"/>
-                </a:solidFill>
-                <a:latin typeface="Calibri" pitchFamily="34" charset="0"/>
-                <a:ea typeface="Calibri" pitchFamily="34" charset="-122"/>
-                <a:cs typeface="Calibri" pitchFamily="34" charset="-120"/>
-              </a:rPr>
-              <a:t>Forensic Chromatography</a:t>
-            </a:r>
-            <a:endParaRPr lang="en-US" sz="1400" dirty="0"/>
-          </a:p>
-        </p:txBody>
-      </p:sp>
-      <p:sp>
-        <p:nvSpPr>
-          <p:cNvPr id="20" name="Text 18"/>
-          <p:cNvSpPr/>
-          <p:nvPr/>
-        </p:nvSpPr>
-        <p:spPr>
-          <a:xfrm>
-            <a:off x="1188720" y="4069080"/>
-            <a:ext cx="7132320" cy="320040"/>
-          </a:xfrm>
-          <a:prstGeom prst="rect">
-            <a:avLst/>
-          </a:prstGeom>
-          <a:noFill/>
-          <a:ln/>
-        </p:spPr>
-        <p:txBody>
-          <a:bodyPr wrap="square" rtlCol="0" anchor="ctr"/>
-          <a:lstStyle/>
-          <a:p>
-            <a:pPr indent="0" marL="0">
-              <a:buNone/>
-            </a:pPr>
-            <a:r>
-              <a:rPr lang="en-US" sz="1100" dirty="0">
+              <a:rPr lang="en-US" sz="1300" i="1" dirty="0">
                 <a:solidFill>
                   <a:srgbClr val="6B6660"/>
                 </a:solidFill>
-                <a:latin typeface="Calibri" pitchFamily="34" charset="0"/>
-                <a:ea typeface="Calibri" pitchFamily="34" charset="-122"/>
-                <a:cs typeface="Calibri" pitchFamily="34" charset="-120"/>
-              </a:rPr>
-              <a:t>Amoeba Sisters  •  6 min</a:t>
-            </a:r>
-            <a:endParaRPr lang="en-US" sz="1100" dirty="0"/>
+                <a:latin typeface="Arial" pitchFamily="34" charset="0"/>
+                <a:ea typeface="Arial" pitchFamily="34" charset="-122"/>
+                <a:cs typeface="Arial" pitchFamily="34" charset="-120"/>
+              </a:rPr>
+              <a:t>→ Compare its Rf value to known substances — matching Rf = same substance.</a:t>
+            </a:r>
+            <a:endParaRPr lang="en-US" sz="1300" dirty="0"/>
+          </a:p>
+        </p:txBody>
+      </p:sp>
+      <p:sp>
+        <p:nvSpPr>
+          <p:cNvPr id="20" name="Shape 18"/>
+          <p:cNvSpPr/>
+          <p:nvPr/>
+        </p:nvSpPr>
+        <p:spPr>
+          <a:xfrm>
+            <a:off x="0" y="6492240"/>
+            <a:ext cx="12188952" cy="365760"/>
+          </a:xfrm>
+          <a:prstGeom prst="rect">
+            <a:avLst/>
+          </a:prstGeom>
+          <a:solidFill>
+            <a:srgbClr val="1B2A4A"/>
+          </a:solidFill>
+          <a:ln/>
+        </p:spPr>
+      </p:sp>
+      <p:sp>
+        <p:nvSpPr>
+          <p:cNvPr id="21" name="Text 19"/>
+          <p:cNvSpPr/>
+          <p:nvPr/>
+        </p:nvSpPr>
+        <p:spPr>
+          <a:xfrm>
+            <a:off x="10058400" y="6537960"/>
+            <a:ext cx="1828800" cy="274320"/>
+          </a:xfrm>
+          <a:prstGeom prst="rect">
+            <a:avLst/>
+          </a:prstGeom>
+          <a:noFill/>
+          <a:ln/>
+        </p:spPr>
+        <p:txBody>
+          <a:bodyPr wrap="square" rtlCol="0" anchor="ctr"/>
+          <a:lstStyle/>
+          <a:p>
+            <a:pPr algn="r" indent="0" marL="0">
+              <a:buNone/>
+            </a:pPr>
+            <a:r>
+              <a:rPr lang="en-US" sz="900" dirty="0">
+                <a:solidFill>
+                  <a:srgbClr val="E9C46A"/>
+                </a:solidFill>
+                <a:latin typeface="Arial" pitchFamily="34" charset="0"/>
+                <a:ea typeface="Arial" pitchFamily="34" charset="-122"/>
+                <a:cs typeface="Arial" pitchFamily="34" charset="-120"/>
+              </a:rPr>
+              <a:t>mrzocchi.com</a:t>
+            </a:r>
+            <a:endParaRPr lang="en-US" sz="900" dirty="0"/>
           </a:p>
         </p:txBody>
       </p:sp>
@@ -4005,7 +5758,7 @@
         <p:spPr>
           <a:xfrm>
             <a:off x="0" y="0"/>
-            <a:ext cx="9144000" cy="5143500"/>
+            <a:ext cx="12188952" cy="1097280"/>
           </a:xfrm>
           <a:prstGeom prst="rect">
             <a:avLst/>
@@ -4018,50 +5771,30 @@
       </p:sp>
       <p:sp>
         <p:nvSpPr>
-          <p:cNvPr id="3" name="Shape 1"/>
-          <p:cNvSpPr/>
-          <p:nvPr/>
-        </p:nvSpPr>
-        <p:spPr>
-          <a:xfrm>
-            <a:off x="0" y="4777740"/>
-            <a:ext cx="9144000" cy="365760"/>
-          </a:xfrm>
-          <a:prstGeom prst="rect">
-            <a:avLst/>
-          </a:prstGeom>
-          <a:solidFill>
-            <a:srgbClr val="C8372D"/>
-          </a:solidFill>
-          <a:ln/>
-        </p:spPr>
-      </p:sp>
-      <p:sp>
-        <p:nvSpPr>
-          <p:cNvPr id="4" name="Text 2"/>
-          <p:cNvSpPr/>
-          <p:nvPr/>
-        </p:nvSpPr>
-        <p:spPr>
-          <a:xfrm>
-            <a:off x="731520" y="1371600"/>
-            <a:ext cx="7680960" cy="914400"/>
-          </a:xfrm>
-          <a:prstGeom prst="rect">
-            <a:avLst/>
-          </a:prstGeom>
-          <a:noFill/>
-          <a:ln/>
-        </p:spPr>
-        <p:txBody>
-          <a:bodyPr wrap="square" rtlCol="0" anchor="ctr"/>
-          <a:lstStyle/>
-          <a:p>
-            <a:pPr algn="ctr" indent="0" marL="0">
-              <a:buNone/>
-            </a:pPr>
-            <a:r>
-              <a:rPr lang="en-US" sz="3600" b="1" dirty="0">
+          <p:cNvPr id="3" name="Text 1"/>
+          <p:cNvSpPr/>
+          <p:nvPr/>
+        </p:nvSpPr>
+        <p:spPr>
+          <a:xfrm>
+            <a:off x="548640" y="182880"/>
+            <a:ext cx="9144000" cy="731520"/>
+          </a:xfrm>
+          <a:prstGeom prst="rect">
+            <a:avLst/>
+          </a:prstGeom>
+          <a:noFill/>
+          <a:ln/>
+        </p:spPr>
+        <p:txBody>
+          <a:bodyPr wrap="square" rtlCol="0" anchor="ctr"/>
+          <a:lstStyle/>
+          <a:p>
+            <a:pPr indent="0" marL="0">
+              <a:buNone/>
+            </a:pPr>
+            <a:r>
+              <a:rPr lang="en-US" sz="2600" b="1" dirty="0">
                 <a:solidFill>
                   <a:srgbClr val="FFFFFF"/>
                 </a:solidFill>
@@ -4069,7 +5802,695 @@
                 <a:ea typeface="Georgia" pitchFamily="34" charset="-122"/>
                 <a:cs typeface="Georgia" pitchFamily="34" charset="-120"/>
               </a:rPr>
-              <a:t>Review &amp; Practise</a:t>
+              <a:t>📌 Key Takeaways</a:t>
+            </a:r>
+            <a:endParaRPr lang="en-US" sz="2600" dirty="0"/>
+          </a:p>
+        </p:txBody>
+      </p:sp>
+      <p:sp>
+        <p:nvSpPr>
+          <p:cNvPr id="4" name="Shape 2"/>
+          <p:cNvSpPr/>
+          <p:nvPr/>
+        </p:nvSpPr>
+        <p:spPr>
+          <a:xfrm>
+            <a:off x="731520" y="1463040"/>
+            <a:ext cx="10515600" cy="685800"/>
+          </a:xfrm>
+          <a:prstGeom prst="roundRect">
+            <a:avLst>
+              <a:gd name="adj" fmla="val 16000"/>
+            </a:avLst>
+          </a:prstGeom>
+          <a:solidFill>
+            <a:srgbClr val="FFFFFF"/>
+          </a:solidFill>
+          <a:ln w="19050">
+            <a:solidFill>
+              <a:srgbClr val="C8372D"/>
+            </a:solidFill>
+            <a:prstDash val="solid"/>
+          </a:ln>
+        </p:spPr>
+      </p:sp>
+      <p:sp>
+        <p:nvSpPr>
+          <p:cNvPr id="5" name="Text 3"/>
+          <p:cNvSpPr/>
+          <p:nvPr/>
+        </p:nvSpPr>
+        <p:spPr>
+          <a:xfrm>
+            <a:off x="914400" y="1554480"/>
+            <a:ext cx="365760" cy="457200"/>
+          </a:xfrm>
+          <a:prstGeom prst="rect">
+            <a:avLst/>
+          </a:prstGeom>
+          <a:noFill/>
+          <a:ln/>
+        </p:spPr>
+        <p:txBody>
+          <a:bodyPr wrap="square" rtlCol="0" anchor="ctr"/>
+          <a:lstStyle/>
+          <a:p>
+            <a:pPr indent="0" marL="0">
+              <a:buNone/>
+            </a:pPr>
+            <a:r>
+              <a:rPr lang="en-US" sz="1600" b="1" dirty="0">
+                <a:solidFill>
+                  <a:srgbClr val="C8372D"/>
+                </a:solidFill>
+                <a:latin typeface="Arial" pitchFamily="34" charset="0"/>
+                <a:ea typeface="Arial" pitchFamily="34" charset="-122"/>
+                <a:cs typeface="Arial" pitchFamily="34" charset="-120"/>
+              </a:rPr>
+              <a:t>✓</a:t>
+            </a:r>
+            <a:endParaRPr lang="en-US" sz="1600" dirty="0"/>
+          </a:p>
+        </p:txBody>
+      </p:sp>
+      <p:sp>
+        <p:nvSpPr>
+          <p:cNvPr id="6" name="Text 4"/>
+          <p:cNvSpPr/>
+          <p:nvPr/>
+        </p:nvSpPr>
+        <p:spPr>
+          <a:xfrm>
+            <a:off x="1371600" y="1554480"/>
+            <a:ext cx="9601200" cy="502920"/>
+          </a:xfrm>
+          <a:prstGeom prst="rect">
+            <a:avLst/>
+          </a:prstGeom>
+          <a:noFill/>
+          <a:ln/>
+        </p:spPr>
+        <p:txBody>
+          <a:bodyPr wrap="square" rtlCol="0" anchor="ctr"/>
+          <a:lstStyle/>
+          <a:p>
+            <a:pPr indent="0" marL="0">
+              <a:buNone/>
+            </a:pPr>
+            <a:r>
+              <a:rPr lang="en-US" sz="1500" dirty="0">
+                <a:solidFill>
+                  <a:srgbClr val="3D3A36"/>
+                </a:solidFill>
+                <a:latin typeface="Arial" pitchFamily="34" charset="0"/>
+                <a:ea typeface="Arial" pitchFamily="34" charset="-122"/>
+                <a:cs typeface="Arial" pitchFamily="34" charset="-120"/>
+              </a:rPr>
+              <a:t>Chromatography separates dissolved substances by solubility</a:t>
+            </a:r>
+            <a:endParaRPr lang="en-US" sz="1500" dirty="0"/>
+          </a:p>
+        </p:txBody>
+      </p:sp>
+      <p:sp>
+        <p:nvSpPr>
+          <p:cNvPr id="7" name="Shape 5"/>
+          <p:cNvSpPr/>
+          <p:nvPr/>
+        </p:nvSpPr>
+        <p:spPr>
+          <a:xfrm>
+            <a:off x="731520" y="2286000"/>
+            <a:ext cx="10515600" cy="685800"/>
+          </a:xfrm>
+          <a:prstGeom prst="roundRect">
+            <a:avLst>
+              <a:gd name="adj" fmla="val 16000"/>
+            </a:avLst>
+          </a:prstGeom>
+          <a:solidFill>
+            <a:srgbClr val="FFFFFF"/>
+          </a:solidFill>
+          <a:ln w="19050">
+            <a:solidFill>
+              <a:srgbClr val="C8372D"/>
+            </a:solidFill>
+            <a:prstDash val="solid"/>
+          </a:ln>
+        </p:spPr>
+      </p:sp>
+      <p:sp>
+        <p:nvSpPr>
+          <p:cNvPr id="8" name="Text 6"/>
+          <p:cNvSpPr/>
+          <p:nvPr/>
+        </p:nvSpPr>
+        <p:spPr>
+          <a:xfrm>
+            <a:off x="914400" y="2377440"/>
+            <a:ext cx="365760" cy="457200"/>
+          </a:xfrm>
+          <a:prstGeom prst="rect">
+            <a:avLst/>
+          </a:prstGeom>
+          <a:noFill/>
+          <a:ln/>
+        </p:spPr>
+        <p:txBody>
+          <a:bodyPr wrap="square" rtlCol="0" anchor="ctr"/>
+          <a:lstStyle/>
+          <a:p>
+            <a:pPr indent="0" marL="0">
+              <a:buNone/>
+            </a:pPr>
+            <a:r>
+              <a:rPr lang="en-US" sz="1600" b="1" dirty="0">
+                <a:solidFill>
+                  <a:srgbClr val="C8372D"/>
+                </a:solidFill>
+                <a:latin typeface="Arial" pitchFamily="34" charset="0"/>
+                <a:ea typeface="Arial" pitchFamily="34" charset="-122"/>
+                <a:cs typeface="Arial" pitchFamily="34" charset="-120"/>
+              </a:rPr>
+              <a:t>✓</a:t>
+            </a:r>
+            <a:endParaRPr lang="en-US" sz="1600" dirty="0"/>
+          </a:p>
+        </p:txBody>
+      </p:sp>
+      <p:sp>
+        <p:nvSpPr>
+          <p:cNvPr id="9" name="Text 7"/>
+          <p:cNvSpPr/>
+          <p:nvPr/>
+        </p:nvSpPr>
+        <p:spPr>
+          <a:xfrm>
+            <a:off x="1371600" y="2377440"/>
+            <a:ext cx="9601200" cy="502920"/>
+          </a:xfrm>
+          <a:prstGeom prst="rect">
+            <a:avLst/>
+          </a:prstGeom>
+          <a:noFill/>
+          <a:ln/>
+        </p:spPr>
+        <p:txBody>
+          <a:bodyPr wrap="square" rtlCol="0" anchor="ctr"/>
+          <a:lstStyle/>
+          <a:p>
+            <a:pPr indent="0" marL="0">
+              <a:buNone/>
+            </a:pPr>
+            <a:r>
+              <a:rPr lang="en-US" sz="1500" dirty="0">
+                <a:solidFill>
+                  <a:srgbClr val="3D3A36"/>
+                </a:solidFill>
+                <a:latin typeface="Arial" pitchFamily="34" charset="0"/>
+                <a:ea typeface="Arial" pitchFamily="34" charset="-122"/>
+                <a:cs typeface="Arial" pitchFamily="34" charset="-120"/>
+              </a:rPr>
+              <a:t>Rf = distance of substance ÷ distance of solvent front</a:t>
+            </a:r>
+            <a:endParaRPr lang="en-US" sz="1500" dirty="0"/>
+          </a:p>
+        </p:txBody>
+      </p:sp>
+      <p:sp>
+        <p:nvSpPr>
+          <p:cNvPr id="10" name="Shape 8"/>
+          <p:cNvSpPr/>
+          <p:nvPr/>
+        </p:nvSpPr>
+        <p:spPr>
+          <a:xfrm>
+            <a:off x="731520" y="3108960"/>
+            <a:ext cx="10515600" cy="685800"/>
+          </a:xfrm>
+          <a:prstGeom prst="roundRect">
+            <a:avLst>
+              <a:gd name="adj" fmla="val 16000"/>
+            </a:avLst>
+          </a:prstGeom>
+          <a:solidFill>
+            <a:srgbClr val="FFFFFF"/>
+          </a:solidFill>
+          <a:ln w="19050">
+            <a:solidFill>
+              <a:srgbClr val="C8372D"/>
+            </a:solidFill>
+            <a:prstDash val="solid"/>
+          </a:ln>
+        </p:spPr>
+      </p:sp>
+      <p:sp>
+        <p:nvSpPr>
+          <p:cNvPr id="11" name="Text 9"/>
+          <p:cNvSpPr/>
+          <p:nvPr/>
+        </p:nvSpPr>
+        <p:spPr>
+          <a:xfrm>
+            <a:off x="914400" y="3200400"/>
+            <a:ext cx="365760" cy="457200"/>
+          </a:xfrm>
+          <a:prstGeom prst="rect">
+            <a:avLst/>
+          </a:prstGeom>
+          <a:noFill/>
+          <a:ln/>
+        </p:spPr>
+        <p:txBody>
+          <a:bodyPr wrap="square" rtlCol="0" anchor="ctr"/>
+          <a:lstStyle/>
+          <a:p>
+            <a:pPr indent="0" marL="0">
+              <a:buNone/>
+            </a:pPr>
+            <a:r>
+              <a:rPr lang="en-US" sz="1600" b="1" dirty="0">
+                <a:solidFill>
+                  <a:srgbClr val="C8372D"/>
+                </a:solidFill>
+                <a:latin typeface="Arial" pitchFamily="34" charset="0"/>
+                <a:ea typeface="Arial" pitchFamily="34" charset="-122"/>
+                <a:cs typeface="Arial" pitchFamily="34" charset="-120"/>
+              </a:rPr>
+              <a:t>✓</a:t>
+            </a:r>
+            <a:endParaRPr lang="en-US" sz="1600" dirty="0"/>
+          </a:p>
+        </p:txBody>
+      </p:sp>
+      <p:sp>
+        <p:nvSpPr>
+          <p:cNvPr id="12" name="Text 10"/>
+          <p:cNvSpPr/>
+          <p:nvPr/>
+        </p:nvSpPr>
+        <p:spPr>
+          <a:xfrm>
+            <a:off x="1371600" y="3200400"/>
+            <a:ext cx="9601200" cy="502920"/>
+          </a:xfrm>
+          <a:prstGeom prst="rect">
+            <a:avLst/>
+          </a:prstGeom>
+          <a:noFill/>
+          <a:ln/>
+        </p:spPr>
+        <p:txBody>
+          <a:bodyPr wrap="square" rtlCol="0" anchor="ctr"/>
+          <a:lstStyle/>
+          <a:p>
+            <a:pPr indent="0" marL="0">
+              <a:buNone/>
+            </a:pPr>
+            <a:r>
+              <a:rPr lang="en-US" sz="1500" dirty="0">
+                <a:solidFill>
+                  <a:srgbClr val="3D3A36"/>
+                </a:solidFill>
+                <a:latin typeface="Arial" pitchFamily="34" charset="0"/>
+                <a:ea typeface="Arial" pitchFamily="34" charset="-122"/>
+                <a:cs typeface="Arial" pitchFamily="34" charset="-120"/>
+              </a:rPr>
+              <a:t>Pure substances show one spot; mixtures show multiple</a:t>
+            </a:r>
+            <a:endParaRPr lang="en-US" sz="1500" dirty="0"/>
+          </a:p>
+        </p:txBody>
+      </p:sp>
+      <p:sp>
+        <p:nvSpPr>
+          <p:cNvPr id="13" name="Shape 11"/>
+          <p:cNvSpPr/>
+          <p:nvPr/>
+        </p:nvSpPr>
+        <p:spPr>
+          <a:xfrm>
+            <a:off x="731520" y="3931920"/>
+            <a:ext cx="10515600" cy="685800"/>
+          </a:xfrm>
+          <a:prstGeom prst="roundRect">
+            <a:avLst>
+              <a:gd name="adj" fmla="val 16000"/>
+            </a:avLst>
+          </a:prstGeom>
+          <a:solidFill>
+            <a:srgbClr val="FFFFFF"/>
+          </a:solidFill>
+          <a:ln w="19050">
+            <a:solidFill>
+              <a:srgbClr val="C8372D"/>
+            </a:solidFill>
+            <a:prstDash val="solid"/>
+          </a:ln>
+        </p:spPr>
+      </p:sp>
+      <p:sp>
+        <p:nvSpPr>
+          <p:cNvPr id="14" name="Text 12"/>
+          <p:cNvSpPr/>
+          <p:nvPr/>
+        </p:nvSpPr>
+        <p:spPr>
+          <a:xfrm>
+            <a:off x="914400" y="4023360"/>
+            <a:ext cx="365760" cy="457200"/>
+          </a:xfrm>
+          <a:prstGeom prst="rect">
+            <a:avLst/>
+          </a:prstGeom>
+          <a:noFill/>
+          <a:ln/>
+        </p:spPr>
+        <p:txBody>
+          <a:bodyPr wrap="square" rtlCol="0" anchor="ctr"/>
+          <a:lstStyle/>
+          <a:p>
+            <a:pPr indent="0" marL="0">
+              <a:buNone/>
+            </a:pPr>
+            <a:r>
+              <a:rPr lang="en-US" sz="1600" b="1" dirty="0">
+                <a:solidFill>
+                  <a:srgbClr val="C8372D"/>
+                </a:solidFill>
+                <a:latin typeface="Arial" pitchFamily="34" charset="0"/>
+                <a:ea typeface="Arial" pitchFamily="34" charset="-122"/>
+                <a:cs typeface="Arial" pitchFamily="34" charset="-120"/>
+              </a:rPr>
+              <a:t>✓</a:t>
+            </a:r>
+            <a:endParaRPr lang="en-US" sz="1600" dirty="0"/>
+          </a:p>
+        </p:txBody>
+      </p:sp>
+      <p:sp>
+        <p:nvSpPr>
+          <p:cNvPr id="15" name="Text 13"/>
+          <p:cNvSpPr/>
+          <p:nvPr/>
+        </p:nvSpPr>
+        <p:spPr>
+          <a:xfrm>
+            <a:off x="1371600" y="4023360"/>
+            <a:ext cx="9601200" cy="502920"/>
+          </a:xfrm>
+          <a:prstGeom prst="rect">
+            <a:avLst/>
+          </a:prstGeom>
+          <a:noFill/>
+          <a:ln/>
+        </p:spPr>
+        <p:txBody>
+          <a:bodyPr wrap="square" rtlCol="0" anchor="ctr"/>
+          <a:lstStyle/>
+          <a:p>
+            <a:pPr indent="0" marL="0">
+              <a:buNone/>
+            </a:pPr>
+            <a:r>
+              <a:rPr lang="en-US" sz="1500" dirty="0">
+                <a:solidFill>
+                  <a:srgbClr val="3D3A36"/>
+                </a:solidFill>
+                <a:latin typeface="Arial" pitchFamily="34" charset="0"/>
+                <a:ea typeface="Arial" pitchFamily="34" charset="-122"/>
+                <a:cs typeface="Arial" pitchFamily="34" charset="-120"/>
+              </a:rPr>
+              <a:t>Matching Rf values identify unknown substances</a:t>
+            </a:r>
+            <a:endParaRPr lang="en-US" sz="1500" dirty="0"/>
+          </a:p>
+        </p:txBody>
+      </p:sp>
+      <p:sp>
+        <p:nvSpPr>
+          <p:cNvPr id="16" name="Shape 14"/>
+          <p:cNvSpPr/>
+          <p:nvPr/>
+        </p:nvSpPr>
+        <p:spPr>
+          <a:xfrm>
+            <a:off x="731520" y="4754880"/>
+            <a:ext cx="10515600" cy="685800"/>
+          </a:xfrm>
+          <a:prstGeom prst="roundRect">
+            <a:avLst>
+              <a:gd name="adj" fmla="val 16000"/>
+            </a:avLst>
+          </a:prstGeom>
+          <a:solidFill>
+            <a:srgbClr val="FFFFFF"/>
+          </a:solidFill>
+          <a:ln w="19050">
+            <a:solidFill>
+              <a:srgbClr val="C8372D"/>
+            </a:solidFill>
+            <a:prstDash val="solid"/>
+          </a:ln>
+        </p:spPr>
+      </p:sp>
+      <p:sp>
+        <p:nvSpPr>
+          <p:cNvPr id="17" name="Text 15"/>
+          <p:cNvSpPr/>
+          <p:nvPr/>
+        </p:nvSpPr>
+        <p:spPr>
+          <a:xfrm>
+            <a:off x="914400" y="4846320"/>
+            <a:ext cx="365760" cy="457200"/>
+          </a:xfrm>
+          <a:prstGeom prst="rect">
+            <a:avLst/>
+          </a:prstGeom>
+          <a:noFill/>
+          <a:ln/>
+        </p:spPr>
+        <p:txBody>
+          <a:bodyPr wrap="square" rtlCol="0" anchor="ctr"/>
+          <a:lstStyle/>
+          <a:p>
+            <a:pPr indent="0" marL="0">
+              <a:buNone/>
+            </a:pPr>
+            <a:r>
+              <a:rPr lang="en-US" sz="1600" b="1" dirty="0">
+                <a:solidFill>
+                  <a:srgbClr val="C8372D"/>
+                </a:solidFill>
+                <a:latin typeface="Arial" pitchFamily="34" charset="0"/>
+                <a:ea typeface="Arial" pitchFamily="34" charset="-122"/>
+                <a:cs typeface="Arial" pitchFamily="34" charset="-120"/>
+              </a:rPr>
+              <a:t>✓</a:t>
+            </a:r>
+            <a:endParaRPr lang="en-US" sz="1600" dirty="0"/>
+          </a:p>
+        </p:txBody>
+      </p:sp>
+      <p:sp>
+        <p:nvSpPr>
+          <p:cNvPr id="18" name="Text 16"/>
+          <p:cNvSpPr/>
+          <p:nvPr/>
+        </p:nvSpPr>
+        <p:spPr>
+          <a:xfrm>
+            <a:off x="1371600" y="4846320"/>
+            <a:ext cx="9601200" cy="502920"/>
+          </a:xfrm>
+          <a:prstGeom prst="rect">
+            <a:avLst/>
+          </a:prstGeom>
+          <a:noFill/>
+          <a:ln/>
+        </p:spPr>
+        <p:txBody>
+          <a:bodyPr wrap="square" rtlCol="0" anchor="ctr"/>
+          <a:lstStyle/>
+          <a:p>
+            <a:pPr indent="0" marL="0">
+              <a:buNone/>
+            </a:pPr>
+            <a:r>
+              <a:rPr lang="en-US" sz="1500" dirty="0">
+                <a:solidFill>
+                  <a:srgbClr val="3D3A36"/>
+                </a:solidFill>
+                <a:latin typeface="Arial" pitchFamily="34" charset="0"/>
+                <a:ea typeface="Arial" pitchFamily="34" charset="-122"/>
+                <a:cs typeface="Arial" pitchFamily="34" charset="-120"/>
+              </a:rPr>
+              <a:t>Always use pencil baseline and cover the beaker</a:t>
+            </a:r>
+            <a:endParaRPr lang="en-US" sz="1500" dirty="0"/>
+          </a:p>
+        </p:txBody>
+      </p:sp>
+      <p:sp>
+        <p:nvSpPr>
+          <p:cNvPr id="19" name="Shape 17"/>
+          <p:cNvSpPr/>
+          <p:nvPr/>
+        </p:nvSpPr>
+        <p:spPr>
+          <a:xfrm>
+            <a:off x="0" y="6492240"/>
+            <a:ext cx="12188952" cy="365760"/>
+          </a:xfrm>
+          <a:prstGeom prst="rect">
+            <a:avLst/>
+          </a:prstGeom>
+          <a:solidFill>
+            <a:srgbClr val="1B2A4A"/>
+          </a:solidFill>
+          <a:ln/>
+        </p:spPr>
+      </p:sp>
+      <p:sp>
+        <p:nvSpPr>
+          <p:cNvPr id="20" name="Text 18"/>
+          <p:cNvSpPr/>
+          <p:nvPr/>
+        </p:nvSpPr>
+        <p:spPr>
+          <a:xfrm>
+            <a:off x="10058400" y="6537960"/>
+            <a:ext cx="1828800" cy="274320"/>
+          </a:xfrm>
+          <a:prstGeom prst="rect">
+            <a:avLst/>
+          </a:prstGeom>
+          <a:noFill/>
+          <a:ln/>
+        </p:spPr>
+        <p:txBody>
+          <a:bodyPr wrap="square" rtlCol="0" anchor="ctr"/>
+          <a:lstStyle/>
+          <a:p>
+            <a:pPr algn="r" indent="0" marL="0">
+              <a:buNone/>
+            </a:pPr>
+            <a:r>
+              <a:rPr lang="en-US" sz="900" dirty="0">
+                <a:solidFill>
+                  <a:srgbClr val="E9C46A"/>
+                </a:solidFill>
+                <a:latin typeface="Arial" pitchFamily="34" charset="0"/>
+                <a:ea typeface="Arial" pitchFamily="34" charset="-122"/>
+                <a:cs typeface="Arial" pitchFamily="34" charset="-120"/>
+              </a:rPr>
+              <a:t>mrzocchi.com</a:t>
+            </a:r>
+            <a:endParaRPr lang="en-US" sz="900" dirty="0"/>
+          </a:p>
+        </p:txBody>
+      </p:sp>
+    </p:spTree>
+  </p:cSld>
+  <p:clrMapOvr>
+    <a:masterClrMapping/>
+  </p:clrMapOvr>
+</p:sld>
+</file>
+
+<file path=ppt/slides/slide9.xml><?xml version="1.0" encoding="utf-8"?>
+<p:sld xmlns:a="http://schemas.openxmlformats.org/drawingml/2006/main" xmlns:r="http://schemas.openxmlformats.org/officeDocument/2006/relationships" xmlns:p="http://schemas.openxmlformats.org/presentationml/2006/main">
+  <p:cSld name="Slide 9">
+    <p:spTree>
+      <p:nvGrpSpPr>
+        <p:cNvPr id="1" name=""/>
+        <p:cNvGrpSpPr/>
+        <p:nvPr/>
+      </p:nvGrpSpPr>
+      <p:grpSpPr>
+        <a:xfrm>
+          <a:off x="0" y="0"/>
+          <a:ext cx="0" cy="0"/>
+          <a:chOff x="0" y="0"/>
+          <a:chExt cx="0" cy="0"/>
+        </a:xfrm>
+      </p:grpSpPr>
+      <p:sp>
+        <p:nvSpPr>
+          <p:cNvPr id="2" name="Shape 0"/>
+          <p:cNvSpPr/>
+          <p:nvPr/>
+        </p:nvSpPr>
+        <p:spPr>
+          <a:xfrm>
+            <a:off x="0" y="0"/>
+            <a:ext cx="12188952" cy="6858000"/>
+          </a:xfrm>
+          <a:prstGeom prst="rect">
+            <a:avLst/>
+          </a:prstGeom>
+          <a:solidFill>
+            <a:srgbClr val="1B2A4A"/>
+          </a:solidFill>
+          <a:ln/>
+        </p:spPr>
+      </p:sp>
+      <p:sp>
+        <p:nvSpPr>
+          <p:cNvPr id="3" name="Shape 1"/>
+          <p:cNvSpPr/>
+          <p:nvPr/>
+        </p:nvSpPr>
+        <p:spPr>
+          <a:xfrm>
+            <a:off x="0" y="6400800"/>
+            <a:ext cx="12188952" cy="73152"/>
+          </a:xfrm>
+          <a:prstGeom prst="rect">
+            <a:avLst/>
+          </a:prstGeom>
+          <a:solidFill>
+            <a:srgbClr val="C8372D"/>
+          </a:solidFill>
+          <a:ln/>
+        </p:spPr>
+      </p:sp>
+      <p:sp>
+        <p:nvSpPr>
+          <p:cNvPr id="4" name="Text 2"/>
+          <p:cNvSpPr/>
+          <p:nvPr/>
+        </p:nvSpPr>
+        <p:spPr>
+          <a:xfrm>
+            <a:off x="0" y="1828800"/>
+            <a:ext cx="12188952" cy="1097280"/>
+          </a:xfrm>
+          <a:prstGeom prst="rect">
+            <a:avLst/>
+          </a:prstGeom>
+          <a:noFill/>
+          <a:ln/>
+        </p:spPr>
+        <p:txBody>
+          <a:bodyPr wrap="square" rtlCol="0" anchor="ctr"/>
+          <a:lstStyle/>
+          <a:p>
+            <a:pPr algn="ctr" indent="0" marL="0">
+              <a:buNone/>
+            </a:pPr>
+            <a:r>
+              <a:rPr lang="en-US" sz="3600" b="1" dirty="0">
+                <a:solidFill>
+                  <a:srgbClr val="FFFFFF"/>
+                </a:solidFill>
+                <a:latin typeface="Georgia" pitchFamily="34" charset="0"/>
+                <a:ea typeface="Georgia" pitchFamily="34" charset="-122"/>
+                <a:cs typeface="Georgia" pitchFamily="34" charset="-120"/>
+              </a:rPr>
+              <a:t>Keep Practising!</a:t>
             </a:r>
             <a:endParaRPr lang="en-US" sz="3600" dirty="0"/>
           </a:p>
@@ -4083,8 +6504,8 @@
         </p:nvSpPr>
         <p:spPr>
           <a:xfrm>
-            <a:off x="731520" y="2560320"/>
-            <a:ext cx="7680960" cy="548640"/>
+            <a:off x="0" y="3017520"/>
+            <a:ext cx="12188952" cy="548640"/>
           </a:xfrm>
           <a:prstGeom prst="rect">
             <a:avLst/>
@@ -4100,17 +6521,56 @@
               <a:buNone/>
             </a:pPr>
             <a:r>
-              <a:rPr lang="en-US" sz="2000" dirty="0">
-                <a:solidFill>
-                  <a:srgbClr val="C8372D"/>
-                </a:solidFill>
-                <a:latin typeface="Calibri" pitchFamily="34" charset="0"/>
-                <a:ea typeface="Calibri" pitchFamily="34" charset="-122"/>
-                <a:cs typeface="Calibri" pitchFamily="34" charset="-120"/>
+              <a:rPr lang="en-US" sz="1600" dirty="0">
+                <a:solidFill>
+                  <a:srgbClr val="E9C46A"/>
+                </a:solidFill>
+                <a:latin typeface="Arial" pitchFamily="34" charset="0"/>
+                <a:ea typeface="Arial" pitchFamily="34" charset="-122"/>
+                <a:cs typeface="Arial" pitchFamily="34" charset="-120"/>
+              </a:rPr>
+              <a:t>Use the Self-Quiz and Review Games on mrzocchi.com</a:t>
+            </a:r>
+            <a:endParaRPr lang="en-US" sz="1600" dirty="0"/>
+          </a:p>
+        </p:txBody>
+      </p:sp>
+      <p:sp>
+        <p:nvSpPr>
+          <p:cNvPr id="6" name="Text 4"/>
+          <p:cNvSpPr/>
+          <p:nvPr/>
+        </p:nvSpPr>
+        <p:spPr>
+          <a:xfrm>
+            <a:off x="0" y="5029200"/>
+            <a:ext cx="12188952" cy="457200"/>
+          </a:xfrm>
+          <a:prstGeom prst="rect">
+            <a:avLst/>
+          </a:prstGeom>
+          <a:noFill/>
+          <a:ln/>
+        </p:spPr>
+        <p:txBody>
+          <a:bodyPr wrap="square" rtlCol="0" anchor="ctr"/>
+          <a:lstStyle/>
+          <a:p>
+            <a:pPr algn="ctr" indent="0" marL="0">
+              <a:buNone/>
+            </a:pPr>
+            <a:r>
+              <a:rPr lang="en-US" sz="1400" dirty="0">
+                <a:solidFill>
+                  <a:srgbClr val="9B9690"/>
+                </a:solidFill>
+                <a:latin typeface="Arial" pitchFamily="34" charset="0"/>
+                <a:ea typeface="Arial" pitchFamily="34" charset="-122"/>
+                <a:cs typeface="Arial" pitchFamily="34" charset="-120"/>
               </a:rPr>
               <a:t>mrzocchi.com</a:t>
             </a:r>
-            <a:endParaRPr lang="en-US" sz="2000" dirty="0"/>
+            <a:endParaRPr lang="en-US" sz="1400" dirty="0"/>
           </a:p>
         </p:txBody>
       </p:sp>
